--- a/四类客群矩阵.pptx
+++ b/四类客群矩阵.pptx
@@ -11928,8 +11928,8 @@
         </p:nvSpPr>
         <p:spPr>
           <a:xfrm>
-            <a:off x="708498" y="2404872"/>
-            <a:ext cx="5065776" cy="986232"/>
+            <a:off x="685980" y="2539315"/>
+            <a:ext cx="5065776" cy="594360"/>
           </a:xfrm>
           <a:prstGeom prst="rect">
             <a:avLst/>
@@ -11942,396 +11942,87 @@
           </a:bodyPr>
           <a:lstStyle/>
           <a:p>
-            <a:pPr marL="171450" marR="0" lvl="0" indent="-171450" algn="l" defTabSz="914400" rtl="0" eaLnBrk="1" fontAlgn="auto" latinLnBrk="0" hangingPunct="1">
+            <a:pPr algn="l">
               <a:lnSpc>
-                <a:spcPct val="200000"/>
+                <a:spcPct val="100000"/>
               </a:lnSpc>
-              <a:spcBef>
-                <a:spcPts val="0"/>
-              </a:spcBef>
               <a:spcAft>
                 <a:spcPts val="100"/>
               </a:spcAft>
-              <a:buClrTx/>
-              <a:buSzTx/>
-              <a:buFont typeface="Arial" panose="020B0604020202020204" pitchFamily="34" charset="0"/>
-              <a:buChar char="•"/>
-              <a:tabLst/>
-              <a:defRPr/>
             </a:pPr>
             <a:r>
-              <a:rPr kumimoji="0" sz="800" b="0" i="0" u="none" strike="noStrike" kern="1200" cap="none" spc="0" normalizeH="0" baseline="0" noProof="0" dirty="0" err="1">
-                <a:ln>
-                  <a:noFill/>
-                </a:ln>
+              <a:rPr sz="800">
                 <a:solidFill>
                   <a:srgbClr val="3D3C3A"/>
                 </a:solidFill>
-                <a:effectLst/>
-                <a:uLnTx/>
-                <a:uFillTx/>
                 <a:latin typeface="Microsoft YaHei"/>
                 <a:ea typeface="Microsoft YaHei"/>
                 <a:cs typeface="Microsoft YaHei"/>
               </a:rPr>
-              <a:t>总收入</a:t>
-            </a:r>
-            <a:r>
-              <a:rPr kumimoji="0" sz="800" b="0" i="0" u="none" strike="noStrike" kern="1200" cap="none" spc="0" normalizeH="0" baseline="0" noProof="0" dirty="0">
-                <a:ln>
-                  <a:noFill/>
-                </a:ln>
+              <a:t>总收入 96,943 / 总支出 92,348；发薪最稳（std 2.50），福利依赖低（2.7%）</a:t>
+            </a:r>
+          </a:p>
+          <a:p>
+            <a:pPr algn="l">
+              <a:lnSpc>
+                <a:spcPct val="100000"/>
+              </a:lnSpc>
+              <a:spcAft>
+                <a:spcPts val="100"/>
+              </a:spcAft>
+            </a:pPr>
+            <a:r>
+              <a:rPr sz="800">
                 <a:solidFill>
                   <a:srgbClr val="3D3C3A"/>
                 </a:solidFill>
-                <a:effectLst/>
-                <a:uLnTx/>
-                <a:uFillTx/>
                 <a:latin typeface="Microsoft YaHei"/>
                 <a:ea typeface="Microsoft YaHei"/>
                 <a:cs typeface="Microsoft YaHei"/>
               </a:rPr>
-              <a:t> 96,943 / </a:t>
-            </a:r>
-            <a:r>
-              <a:rPr kumimoji="0" sz="800" b="0" i="0" u="none" strike="noStrike" kern="1200" cap="none" spc="0" normalizeH="0" baseline="0" noProof="0" dirty="0" err="1">
-                <a:ln>
-                  <a:noFill/>
-                </a:ln>
+              <a:t>还款 24,276元 / 34.0次，履约最积极，显著高于低价值两组</a:t>
+            </a:r>
+          </a:p>
+          <a:p>
+            <a:pPr algn="l">
+              <a:lnSpc>
+                <a:spcPct val="100000"/>
+              </a:lnSpc>
+              <a:spcAft>
+                <a:spcPts val="100"/>
+              </a:spcAft>
+            </a:pPr>
+            <a:r>
+              <a:rPr sz="800">
                 <a:solidFill>
                   <a:srgbClr val="3D3C3A"/>
                 </a:solidFill>
-                <a:effectLst/>
-                <a:uLnTx/>
-                <a:uFillTx/>
                 <a:latin typeface="Microsoft YaHei"/>
                 <a:ea typeface="Microsoft YaHei"/>
                 <a:cs typeface="Microsoft YaHei"/>
               </a:rPr>
-              <a:t>总支出</a:t>
-            </a:r>
-            <a:r>
-              <a:rPr kumimoji="0" sz="800" b="0" i="0" u="none" strike="noStrike" kern="1200" cap="none" spc="0" normalizeH="0" baseline="0" noProof="0" dirty="0">
-                <a:ln>
-                  <a:noFill/>
-                </a:ln>
+              <a:t>赌博占比 2.5%，余额异常 3.82天；3M30余额逾期率 2.62%</a:t>
+            </a:r>
+          </a:p>
+          <a:p>
+            <a:pPr algn="l">
+              <a:lnSpc>
+                <a:spcPct val="100000"/>
+              </a:lnSpc>
+              <a:spcAft>
+                <a:spcPts val="100"/>
+              </a:spcAft>
+            </a:pPr>
+            <a:r>
+              <a:rPr sz="800">
                 <a:solidFill>
                   <a:srgbClr val="3D3C3A"/>
                 </a:solidFill>
-                <a:effectLst/>
-                <a:uLnTx/>
-                <a:uFillTx/>
                 <a:latin typeface="Microsoft YaHei"/>
                 <a:ea typeface="Microsoft YaHei"/>
                 <a:cs typeface="Microsoft YaHei"/>
               </a:rPr>
-              <a:t> 92,348，发薪周期最稳定（std 2.50），福利依赖低（2.7%）</a:t>
-            </a:r>
-          </a:p>
-          <a:p>
-            <a:pPr marL="171450" marR="0" lvl="0" indent="-171450" algn="l" defTabSz="914400" rtl="0" eaLnBrk="1" fontAlgn="auto" latinLnBrk="0" hangingPunct="1">
-              <a:lnSpc>
-                <a:spcPct val="200000"/>
-              </a:lnSpc>
-              <a:spcBef>
-                <a:spcPts val="0"/>
-              </a:spcBef>
-              <a:spcAft>
-                <a:spcPts val="100"/>
-              </a:spcAft>
-              <a:buClrTx/>
-              <a:buSzTx/>
-              <a:buFont typeface="Arial" panose="020B0604020202020204" pitchFamily="34" charset="0"/>
-              <a:buChar char="•"/>
-              <a:tabLst/>
-              <a:defRPr/>
-            </a:pPr>
-            <a:r>
-              <a:rPr kumimoji="0" sz="800" b="0" i="0" u="none" strike="noStrike" kern="1200" cap="none" spc="0" normalizeH="0" baseline="0" noProof="0" dirty="0" err="1">
-                <a:ln>
-                  <a:noFill/>
-                </a:ln>
-                <a:solidFill>
-                  <a:srgbClr val="3D3C3A"/>
-                </a:solidFill>
-                <a:effectLst/>
-                <a:uLnTx/>
-                <a:uFillTx/>
-                <a:latin typeface="Microsoft YaHei"/>
-                <a:ea typeface="Microsoft YaHei"/>
-                <a:cs typeface="Microsoft YaHei"/>
-              </a:rPr>
-              <a:t>还款</a:t>
-            </a:r>
-            <a:r>
-              <a:rPr kumimoji="0" sz="800" b="0" i="0" u="none" strike="noStrike" kern="1200" cap="none" spc="0" normalizeH="0" baseline="0" noProof="0" dirty="0">
-                <a:ln>
-                  <a:noFill/>
-                </a:ln>
-                <a:solidFill>
-                  <a:srgbClr val="3D3C3A"/>
-                </a:solidFill>
-                <a:effectLst/>
-                <a:uLnTx/>
-                <a:uFillTx/>
-                <a:latin typeface="Microsoft YaHei"/>
-                <a:ea typeface="Microsoft YaHei"/>
-                <a:cs typeface="Microsoft YaHei"/>
-              </a:rPr>
-              <a:t> 24,276 元 / 34.0 </a:t>
-            </a:r>
-            <a:r>
-              <a:rPr kumimoji="0" sz="800" b="0" i="0" u="none" strike="noStrike" kern="1200" cap="none" spc="0" normalizeH="0" baseline="0" noProof="0" dirty="0" err="1">
-                <a:ln>
-                  <a:noFill/>
-                </a:ln>
-                <a:solidFill>
-                  <a:srgbClr val="3D3C3A"/>
-                </a:solidFill>
-                <a:effectLst/>
-                <a:uLnTx/>
-                <a:uFillTx/>
-                <a:latin typeface="Microsoft YaHei"/>
-                <a:ea typeface="Microsoft YaHei"/>
-                <a:cs typeface="Microsoft YaHei"/>
-              </a:rPr>
-              <a:t>次，信贷履约最积极，显著高于低价值两组</a:t>
-            </a:r>
-            <a:endParaRPr kumimoji="0" sz="800" b="0" i="0" u="none" strike="noStrike" kern="1200" cap="none" spc="0" normalizeH="0" baseline="0" noProof="0" dirty="0">
-              <a:ln>
-                <a:noFill/>
-              </a:ln>
-              <a:solidFill>
-                <a:srgbClr val="3D3C3A"/>
-              </a:solidFill>
-              <a:effectLst/>
-              <a:uLnTx/>
-              <a:uFillTx/>
-              <a:latin typeface="Microsoft YaHei"/>
-              <a:ea typeface="Microsoft YaHei"/>
-              <a:cs typeface="Microsoft YaHei"/>
-            </a:endParaRPr>
-          </a:p>
-          <a:p>
-            <a:pPr marL="171450" marR="0" lvl="0" indent="-171450" algn="l" defTabSz="914400" rtl="0" eaLnBrk="1" fontAlgn="auto" latinLnBrk="0" hangingPunct="1">
-              <a:lnSpc>
-                <a:spcPct val="200000"/>
-              </a:lnSpc>
-              <a:spcBef>
-                <a:spcPts val="0"/>
-              </a:spcBef>
-              <a:spcAft>
-                <a:spcPts val="100"/>
-              </a:spcAft>
-              <a:buClrTx/>
-              <a:buSzTx/>
-              <a:buFont typeface="Arial" panose="020B0604020202020204" pitchFamily="34" charset="0"/>
-              <a:buChar char="•"/>
-              <a:tabLst/>
-              <a:defRPr/>
-            </a:pPr>
-            <a:r>
-              <a:rPr kumimoji="0" sz="800" b="0" i="0" u="none" strike="noStrike" kern="1200" cap="none" spc="0" normalizeH="0" baseline="0" noProof="0" dirty="0" err="1">
-                <a:ln>
-                  <a:noFill/>
-                </a:ln>
-                <a:solidFill>
-                  <a:srgbClr val="3D3C3A"/>
-                </a:solidFill>
-                <a:effectLst/>
-                <a:uLnTx/>
-                <a:uFillTx/>
-                <a:latin typeface="Microsoft YaHei"/>
-                <a:ea typeface="Microsoft YaHei"/>
-                <a:cs typeface="Microsoft YaHei"/>
-              </a:rPr>
-              <a:t>赌博占比</a:t>
-            </a:r>
-            <a:r>
-              <a:rPr kumimoji="0" sz="800" b="0" i="0" u="none" strike="noStrike" kern="1200" cap="none" spc="0" normalizeH="0" baseline="0" noProof="0" dirty="0">
-                <a:ln>
-                  <a:noFill/>
-                </a:ln>
-                <a:solidFill>
-                  <a:srgbClr val="3D3C3A"/>
-                </a:solidFill>
-                <a:effectLst/>
-                <a:uLnTx/>
-                <a:uFillTx/>
-                <a:latin typeface="Microsoft YaHei"/>
-                <a:ea typeface="Microsoft YaHei"/>
-                <a:cs typeface="Microsoft YaHei"/>
-              </a:rPr>
-              <a:t> 2.5%、</a:t>
-            </a:r>
-            <a:r>
-              <a:rPr kumimoji="0" sz="800" b="0" i="0" u="none" strike="noStrike" kern="1200" cap="none" spc="0" normalizeH="0" baseline="0" noProof="0" dirty="0" err="1">
-                <a:ln>
-                  <a:noFill/>
-                </a:ln>
-                <a:solidFill>
-                  <a:srgbClr val="3D3C3A"/>
-                </a:solidFill>
-                <a:effectLst/>
-                <a:uLnTx/>
-                <a:uFillTx/>
-                <a:latin typeface="Microsoft YaHei"/>
-                <a:ea typeface="Microsoft YaHei"/>
-                <a:cs typeface="Microsoft YaHei"/>
-              </a:rPr>
-              <a:t>余额异常</a:t>
-            </a:r>
-            <a:r>
-              <a:rPr kumimoji="0" sz="800" b="0" i="0" u="none" strike="noStrike" kern="1200" cap="none" spc="0" normalizeH="0" baseline="0" noProof="0" dirty="0">
-                <a:ln>
-                  <a:noFill/>
-                </a:ln>
-                <a:solidFill>
-                  <a:srgbClr val="3D3C3A"/>
-                </a:solidFill>
-                <a:effectLst/>
-                <a:uLnTx/>
-                <a:uFillTx/>
-                <a:latin typeface="Microsoft YaHei"/>
-                <a:ea typeface="Microsoft YaHei"/>
-                <a:cs typeface="Microsoft YaHei"/>
-              </a:rPr>
-              <a:t> 3.82 天；3M30 </a:t>
-            </a:r>
-            <a:r>
-              <a:rPr kumimoji="0" sz="800" b="0" i="0" u="none" strike="noStrike" kern="1200" cap="none" spc="0" normalizeH="0" baseline="0" noProof="0" dirty="0" err="1">
-                <a:ln>
-                  <a:noFill/>
-                </a:ln>
-                <a:solidFill>
-                  <a:srgbClr val="3D3C3A"/>
-                </a:solidFill>
-                <a:effectLst/>
-                <a:uLnTx/>
-                <a:uFillTx/>
-                <a:latin typeface="Microsoft YaHei"/>
-                <a:ea typeface="Microsoft YaHei"/>
-                <a:cs typeface="Microsoft YaHei"/>
-              </a:rPr>
-              <a:t>金额逾期率</a:t>
-            </a:r>
-            <a:r>
-              <a:rPr kumimoji="0" sz="800" b="0" i="0" u="none" strike="noStrike" kern="1200" cap="none" spc="0" normalizeH="0" baseline="0" noProof="0" dirty="0">
-                <a:ln>
-                  <a:noFill/>
-                </a:ln>
-                <a:solidFill>
-                  <a:srgbClr val="3D3C3A"/>
-                </a:solidFill>
-                <a:effectLst/>
-                <a:uLnTx/>
-                <a:uFillTx/>
-                <a:latin typeface="Microsoft YaHei"/>
-                <a:ea typeface="Microsoft YaHei"/>
-                <a:cs typeface="Microsoft YaHei"/>
-              </a:rPr>
-              <a:t> 2.62%，</a:t>
-            </a:r>
-            <a:endParaRPr kumimoji="0" lang="en-US" sz="800" b="0" i="0" u="none" strike="noStrike" kern="1200" cap="none" spc="0" normalizeH="0" baseline="0" noProof="0" dirty="0">
-              <a:ln>
-                <a:noFill/>
-              </a:ln>
-              <a:solidFill>
-                <a:srgbClr val="3D3C3A"/>
-              </a:solidFill>
-              <a:effectLst/>
-              <a:uLnTx/>
-              <a:uFillTx/>
-              <a:latin typeface="Microsoft YaHei"/>
-              <a:ea typeface="Microsoft YaHei"/>
-              <a:cs typeface="Microsoft YaHei"/>
-            </a:endParaRPr>
-          </a:p>
-          <a:p>
-            <a:pPr marL="171450" marR="0" lvl="0" indent="-171450" algn="l" defTabSz="914400" rtl="0" eaLnBrk="1" fontAlgn="auto" latinLnBrk="0" hangingPunct="1">
-              <a:lnSpc>
-                <a:spcPct val="200000"/>
-              </a:lnSpc>
-              <a:spcBef>
-                <a:spcPts val="0"/>
-              </a:spcBef>
-              <a:spcAft>
-                <a:spcPts val="100"/>
-              </a:spcAft>
-              <a:buClrTx/>
-              <a:buSzTx/>
-              <a:buFont typeface="Arial" panose="020B0604020202020204" pitchFamily="34" charset="0"/>
-              <a:buChar char="•"/>
-              <a:tabLst/>
-              <a:defRPr/>
-            </a:pPr>
-            <a:r>
-              <a:rPr kumimoji="0" sz="800" b="0" i="0" u="none" strike="noStrike" kern="1200" cap="none" spc="0" normalizeH="0" baseline="0" noProof="0" dirty="0" err="1">
-                <a:ln>
-                  <a:noFill/>
-                </a:ln>
-                <a:solidFill>
-                  <a:srgbClr val="3D3C3A"/>
-                </a:solidFill>
-                <a:effectLst/>
-                <a:uLnTx/>
-                <a:uFillTx/>
-                <a:latin typeface="Microsoft YaHei"/>
-                <a:ea typeface="Microsoft YaHei"/>
-                <a:cs typeface="Microsoft YaHei"/>
-              </a:rPr>
-              <a:t>平均申请金额</a:t>
-            </a:r>
-            <a:r>
-              <a:rPr kumimoji="0" sz="800" b="0" i="0" u="none" strike="noStrike" kern="1200" cap="none" spc="0" normalizeH="0" baseline="0" noProof="0" dirty="0">
-                <a:ln>
-                  <a:noFill/>
-                </a:ln>
-                <a:solidFill>
-                  <a:srgbClr val="3D3C3A"/>
-                </a:solidFill>
-                <a:effectLst/>
-                <a:uLnTx/>
-                <a:uFillTx/>
-                <a:latin typeface="Microsoft YaHei"/>
-                <a:ea typeface="Microsoft YaHei"/>
-                <a:cs typeface="Microsoft YaHei"/>
-              </a:rPr>
-              <a:t> 2,589、件均总额度 1,627，均处四象限高位；额度</a:t>
-            </a:r>
-            <a:r>
-              <a:rPr kumimoji="0" lang="zh-CN" altLang="en-US" sz="800" b="0" i="0" u="none" strike="noStrike" kern="1200" cap="none" spc="0" normalizeH="0" baseline="0" noProof="0" dirty="0">
-                <a:ln>
-                  <a:noFill/>
-                </a:ln>
-                <a:solidFill>
-                  <a:srgbClr val="3D3C3A"/>
-                </a:solidFill>
-                <a:effectLst/>
-                <a:uLnTx/>
-                <a:uFillTx/>
-                <a:latin typeface="Microsoft YaHei"/>
-                <a:ea typeface="Microsoft YaHei"/>
-                <a:cs typeface="Microsoft YaHei"/>
-              </a:rPr>
-              <a:t>满足率</a:t>
-            </a:r>
-            <a:r>
-              <a:rPr kumimoji="0" sz="800" b="0" i="0" u="none" strike="noStrike" kern="1200" cap="none" spc="0" normalizeH="0" baseline="0" noProof="0" dirty="0">
-                <a:ln>
-                  <a:noFill/>
-                </a:ln>
-                <a:solidFill>
-                  <a:srgbClr val="3D3C3A"/>
-                </a:solidFill>
-                <a:effectLst/>
-                <a:uLnTx/>
-                <a:uFillTx/>
-                <a:latin typeface="Microsoft YaHei"/>
-                <a:ea typeface="Microsoft YaHei"/>
-                <a:cs typeface="Microsoft YaHei"/>
-              </a:rPr>
-              <a:t> 62.8%</a:t>
+              <a:t>平均申请 2,589，件均额度 1,627，均处高位；额度满足率 62.8%</a:t>
             </a:r>
           </a:p>
         </p:txBody>
@@ -12351,7 +12042,7 @@
         <p:spPr>
           <a:xfrm>
             <a:off x="6283090" y="2454638"/>
-            <a:ext cx="5659077" cy="1245277"/>
+            <a:ext cx="5659077" cy="731520"/>
           </a:xfrm>
           <a:prstGeom prst="rect">
             <a:avLst/>
@@ -12364,315 +12055,108 @@
           </a:bodyPr>
           <a:lstStyle/>
           <a:p>
-            <a:pPr marL="171450" indent="-171450">
+            <a:pPr algn="l">
               <a:lnSpc>
-                <a:spcPct val="200000"/>
+                <a:spcPct val="100000"/>
               </a:lnSpc>
               <a:spcAft>
                 <a:spcPts val="100"/>
               </a:spcAft>
-              <a:buFont typeface="Arial" panose="020B0604020202020204" pitchFamily="34" charset="0"/>
-              <a:buChar char="•"/>
-              <a:defRPr/>
             </a:pPr>
             <a:r>
-              <a:rPr sz="800" dirty="0" err="1">
+              <a:rPr sz="800">
                 <a:solidFill>
                   <a:srgbClr val="3D3C3A"/>
                 </a:solidFill>
                 <a:latin typeface="Microsoft YaHei"/>
                 <a:ea typeface="Microsoft YaHei"/>
+                <a:cs typeface="Microsoft YaHei"/>
               </a:rPr>
-              <a:t>申请时平均收入</a:t>
-            </a:r>
-            <a:r>
-              <a:rPr sz="800" dirty="0">
+              <a:t>平均收入 19,425，net surplus 10,620，静态偿付能力最佳</a:t>
+            </a:r>
+          </a:p>
+          <a:p>
+            <a:pPr algn="l">
+              <a:lnSpc>
+                <a:spcPct val="100000"/>
+              </a:lnSpc>
+              <a:spcAft>
+                <a:spcPts val="100"/>
+              </a:spcAft>
+            </a:pPr>
+            <a:r>
+              <a:rPr sz="800">
                 <a:solidFill>
                   <a:srgbClr val="3D3C3A"/>
                 </a:solidFill>
                 <a:latin typeface="Microsoft YaHei"/>
                 <a:ea typeface="Microsoft YaHei"/>
+                <a:cs typeface="Microsoft YaHei"/>
               </a:rPr>
-              <a:t> 19,425，net surplus 10,620，静态偿付四象限最好</a:t>
-            </a:r>
-          </a:p>
-          <a:p>
-            <a:pPr marL="171450" indent="-171450">
+              <a:t>3M30人数 / 余额逾期率 10.42% / 7.96%，余额逾期率约为人数的 76.4%</a:t>
+            </a:r>
+          </a:p>
+          <a:p>
+            <a:pPr algn="l">
               <a:lnSpc>
-                <a:spcPct val="200000"/>
+                <a:spcPct val="100000"/>
               </a:lnSpc>
               <a:spcAft>
                 <a:spcPts val="100"/>
               </a:spcAft>
-              <a:buFont typeface="Arial" panose="020B0604020202020204" pitchFamily="34" charset="0"/>
-              <a:buChar char="•"/>
-              <a:defRPr/>
             </a:pPr>
             <a:r>
-              <a:rPr sz="800" dirty="0">
+              <a:rPr sz="800">
                 <a:solidFill>
                   <a:srgbClr val="3D3C3A"/>
                 </a:solidFill>
                 <a:latin typeface="Microsoft YaHei"/>
                 <a:ea typeface="Microsoft YaHei"/>
+                <a:cs typeface="Microsoft YaHei"/>
               </a:rPr>
-              <a:t>但 3M30 </a:t>
-            </a:r>
-            <a:r>
-              <a:rPr sz="800" dirty="0" err="1">
+              <a:t>总收入 191,383、工资 50,253，均最高；总支出 193,711 已超收入，金额波动 std 8,442，处高位</a:t>
+            </a:r>
+          </a:p>
+          <a:p>
+            <a:pPr algn="l">
+              <a:lnSpc>
+                <a:spcPct val="100000"/>
+              </a:lnSpc>
+              <a:spcAft>
+                <a:spcPts val="100"/>
+              </a:spcAft>
+            </a:pPr>
+            <a:r>
+              <a:rPr sz="800">
                 <a:solidFill>
                   <a:srgbClr val="3D3C3A"/>
                 </a:solidFill>
                 <a:latin typeface="Microsoft YaHei"/>
                 <a:ea typeface="Microsoft YaHei"/>
+                <a:cs typeface="Microsoft YaHei"/>
               </a:rPr>
-              <a:t>人数</a:t>
-            </a:r>
-            <a:r>
-              <a:rPr sz="800" dirty="0">
+              <a:t>赌博支出 7,416（5.2%）</a:t>
+            </a:r>
+          </a:p>
+          <a:p>
+            <a:pPr algn="l">
+              <a:lnSpc>
+                <a:spcPct val="100000"/>
+              </a:lnSpc>
+              <a:spcAft>
+                <a:spcPts val="100"/>
+              </a:spcAft>
+            </a:pPr>
+            <a:r>
+              <a:rPr sz="800">
                 <a:solidFill>
                   <a:srgbClr val="3D3C3A"/>
                 </a:solidFill>
                 <a:latin typeface="Microsoft YaHei"/>
                 <a:ea typeface="Microsoft YaHei"/>
+                <a:cs typeface="Microsoft YaHei"/>
               </a:rPr>
-              <a:t> / </a:t>
-            </a:r>
-            <a:r>
-              <a:rPr sz="800" dirty="0" err="1">
-                <a:solidFill>
-                  <a:srgbClr val="3D3C3A"/>
-                </a:solidFill>
-                <a:latin typeface="Microsoft YaHei"/>
-                <a:ea typeface="Microsoft YaHei"/>
-              </a:rPr>
-              <a:t>金额逾期率仍达</a:t>
-            </a:r>
-            <a:r>
-              <a:rPr sz="800" dirty="0">
-                <a:solidFill>
-                  <a:srgbClr val="3D3C3A"/>
-                </a:solidFill>
-                <a:latin typeface="Microsoft YaHei"/>
-                <a:ea typeface="Microsoft YaHei"/>
-              </a:rPr>
-              <a:t> 10.42% / 7.96%，</a:t>
-            </a:r>
-            <a:r>
-              <a:rPr sz="800" dirty="0" err="1">
-                <a:solidFill>
-                  <a:srgbClr val="3D3C3A"/>
-                </a:solidFill>
-                <a:latin typeface="Microsoft YaHei"/>
-                <a:ea typeface="Microsoft YaHei"/>
-              </a:rPr>
-              <a:t>金额约为人数逾期率的</a:t>
-            </a:r>
-            <a:r>
-              <a:rPr sz="800" dirty="0">
-                <a:solidFill>
-                  <a:srgbClr val="3D3C3A"/>
-                </a:solidFill>
-                <a:latin typeface="Microsoft YaHei"/>
-                <a:ea typeface="Microsoft YaHei"/>
-              </a:rPr>
-              <a:t> 76.4%</a:t>
-            </a:r>
-          </a:p>
-          <a:p>
-            <a:pPr marL="171450" indent="-171450">
-              <a:lnSpc>
-                <a:spcPct val="200000"/>
-              </a:lnSpc>
-              <a:spcAft>
-                <a:spcPts val="100"/>
-              </a:spcAft>
-              <a:buFont typeface="Arial" panose="020B0604020202020204" pitchFamily="34" charset="0"/>
-              <a:buChar char="•"/>
-              <a:defRPr/>
-            </a:pPr>
-            <a:r>
-              <a:rPr sz="800" dirty="0" err="1">
-                <a:solidFill>
-                  <a:srgbClr val="3D3C3A"/>
-                </a:solidFill>
-                <a:latin typeface="Microsoft YaHei"/>
-                <a:ea typeface="Microsoft YaHei"/>
-              </a:rPr>
-              <a:t>总收入</a:t>
-            </a:r>
-            <a:r>
-              <a:rPr sz="800" dirty="0">
-                <a:solidFill>
-                  <a:srgbClr val="3D3C3A"/>
-                </a:solidFill>
-                <a:latin typeface="Microsoft YaHei"/>
-                <a:ea typeface="Microsoft YaHei"/>
-              </a:rPr>
-              <a:t> 191,383、工资 50,253 </a:t>
-            </a:r>
-            <a:r>
-              <a:rPr sz="800" dirty="0" err="1">
-                <a:solidFill>
-                  <a:srgbClr val="3D3C3A"/>
-                </a:solidFill>
-                <a:latin typeface="Microsoft YaHei"/>
-                <a:ea typeface="Microsoft YaHei"/>
-              </a:rPr>
-              <a:t>四象限最高，总支出</a:t>
-            </a:r>
-            <a:r>
-              <a:rPr sz="800" dirty="0">
-                <a:solidFill>
-                  <a:srgbClr val="3D3C3A"/>
-                </a:solidFill>
-                <a:latin typeface="Microsoft YaHei"/>
-                <a:ea typeface="Microsoft YaHei"/>
-              </a:rPr>
-              <a:t> 193,711 </a:t>
-            </a:r>
-            <a:r>
-              <a:rPr sz="800" dirty="0" err="1">
-                <a:solidFill>
-                  <a:srgbClr val="3D3C3A"/>
-                </a:solidFill>
-                <a:latin typeface="Microsoft YaHei"/>
-                <a:ea typeface="Microsoft YaHei"/>
-              </a:rPr>
-              <a:t>已略超收入；余额波动</a:t>
-            </a:r>
-            <a:r>
-              <a:rPr sz="800" dirty="0">
-                <a:solidFill>
-                  <a:srgbClr val="3D3C3A"/>
-                </a:solidFill>
-                <a:latin typeface="Microsoft YaHei"/>
-                <a:ea typeface="Microsoft YaHei"/>
-              </a:rPr>
-              <a:t> std 8,442 </a:t>
-            </a:r>
-            <a:r>
-              <a:rPr sz="800" dirty="0" err="1">
-                <a:solidFill>
-                  <a:srgbClr val="3D3C3A"/>
-                </a:solidFill>
-                <a:latin typeface="Microsoft YaHei"/>
-                <a:ea typeface="Microsoft YaHei"/>
-              </a:rPr>
-              <a:t>显著偏高</a:t>
-            </a:r>
-            <a:endParaRPr sz="800" dirty="0">
-              <a:solidFill>
-                <a:srgbClr val="3D3C3A"/>
-              </a:solidFill>
-              <a:latin typeface="Microsoft YaHei"/>
-              <a:ea typeface="Microsoft YaHei"/>
-            </a:endParaRPr>
-          </a:p>
-          <a:p>
-            <a:pPr marL="171450" indent="-171450">
-              <a:lnSpc>
-                <a:spcPct val="200000"/>
-              </a:lnSpc>
-              <a:spcAft>
-                <a:spcPts val="100"/>
-              </a:spcAft>
-              <a:buFont typeface="Arial" panose="020B0604020202020204" pitchFamily="34" charset="0"/>
-              <a:buChar char="•"/>
-              <a:defRPr/>
-            </a:pPr>
-            <a:r>
-              <a:rPr sz="800" dirty="0" err="1">
-                <a:solidFill>
-                  <a:srgbClr val="3D3C3A"/>
-                </a:solidFill>
-                <a:latin typeface="Microsoft YaHei"/>
-                <a:ea typeface="Microsoft YaHei"/>
-              </a:rPr>
-              <a:t>赌博支出</a:t>
-            </a:r>
-            <a:r>
-              <a:rPr sz="800" dirty="0">
-                <a:solidFill>
-                  <a:srgbClr val="3D3C3A"/>
-                </a:solidFill>
-                <a:latin typeface="Microsoft YaHei"/>
-                <a:ea typeface="Microsoft YaHei"/>
-              </a:rPr>
-              <a:t> 7,416（占比 5.2%）</a:t>
-            </a:r>
-          </a:p>
-          <a:p>
-            <a:pPr marL="171450" indent="-171450">
-              <a:lnSpc>
-                <a:spcPct val="200000"/>
-              </a:lnSpc>
-              <a:spcAft>
-                <a:spcPts val="100"/>
-              </a:spcAft>
-              <a:buFont typeface="Arial" panose="020B0604020202020204" pitchFamily="34" charset="0"/>
-              <a:buChar char="•"/>
-              <a:defRPr/>
-            </a:pPr>
-            <a:r>
-              <a:rPr sz="800" dirty="0" err="1">
-                <a:solidFill>
-                  <a:srgbClr val="3D3C3A"/>
-                </a:solidFill>
-                <a:latin typeface="Microsoft YaHei"/>
-                <a:ea typeface="Microsoft YaHei"/>
-              </a:rPr>
-              <a:t>平均申请金额</a:t>
-            </a:r>
-            <a:r>
-              <a:rPr sz="800" dirty="0">
-                <a:solidFill>
-                  <a:srgbClr val="3D3C3A"/>
-                </a:solidFill>
-                <a:latin typeface="Microsoft YaHei"/>
-                <a:ea typeface="Microsoft YaHei"/>
-              </a:rPr>
-              <a:t> 2,625 </a:t>
-            </a:r>
-            <a:r>
-              <a:rPr sz="800" dirty="0" err="1">
-                <a:solidFill>
-                  <a:srgbClr val="3D3C3A"/>
-                </a:solidFill>
-                <a:latin typeface="Microsoft YaHei"/>
-                <a:ea typeface="Microsoft YaHei"/>
-              </a:rPr>
-              <a:t>四象限最高，件均总额度</a:t>
-            </a:r>
-            <a:r>
-              <a:rPr sz="800" dirty="0">
-                <a:solidFill>
-                  <a:srgbClr val="3D3C3A"/>
-                </a:solidFill>
-                <a:latin typeface="Microsoft YaHei"/>
-                <a:ea typeface="Microsoft YaHei"/>
-              </a:rPr>
-              <a:t> 1,449、</a:t>
-            </a:r>
-            <a:r>
-              <a:rPr lang="zh-CN" altLang="en-US" sz="800" dirty="0">
-                <a:solidFill>
-                  <a:srgbClr val="3D3C3A"/>
-                </a:solidFill>
-                <a:latin typeface="Microsoft YaHei"/>
-                <a:ea typeface="Microsoft YaHei"/>
-              </a:rPr>
-              <a:t>额度满足率</a:t>
-            </a:r>
-            <a:r>
-              <a:rPr sz="800" dirty="0">
-                <a:solidFill>
-                  <a:srgbClr val="3D3C3A"/>
-                </a:solidFill>
-                <a:latin typeface="Microsoft YaHei"/>
-                <a:ea typeface="Microsoft YaHei"/>
-              </a:rPr>
-              <a:t> 55.2%</a:t>
+              <a:t>平均申请 2,625，最高；件均额度 1,449，额度满足率 55.2%</a:t>
             </a:r>
           </a:p>
         </p:txBody>
@@ -12692,7 +12176,7 @@
         <p:spPr>
           <a:xfrm>
             <a:off x="708498" y="5376281"/>
-            <a:ext cx="5065776" cy="986232"/>
+            <a:ext cx="5065776" cy="594360"/>
           </a:xfrm>
           <a:prstGeom prst="rect">
             <a:avLst/>
@@ -12705,222 +12189,87 @@
           </a:bodyPr>
           <a:lstStyle/>
           <a:p>
-            <a:pPr marL="171450" indent="-171450">
+            <a:pPr algn="l">
               <a:lnSpc>
-                <a:spcPct val="200000"/>
+                <a:spcPct val="100000"/>
               </a:lnSpc>
               <a:spcAft>
                 <a:spcPts val="100"/>
               </a:spcAft>
-              <a:buFont typeface="Arial" panose="020B0604020202020204" pitchFamily="34" charset="0"/>
-              <a:buChar char="•"/>
-              <a:defRPr/>
             </a:pPr>
             <a:r>
-              <a:rPr sz="800" dirty="0" err="1">
+              <a:rPr sz="800">
                 <a:solidFill>
                   <a:srgbClr val="3D3C3A"/>
                 </a:solidFill>
                 <a:latin typeface="Microsoft YaHei"/>
                 <a:ea typeface="Microsoft YaHei"/>
+                <a:cs typeface="Microsoft YaHei"/>
               </a:rPr>
-              <a:t>总收入</a:t>
-            </a:r>
-            <a:r>
-              <a:rPr sz="800" dirty="0">
+              <a:t>总收入 45,568、工资 8,750，均最低</a:t>
+            </a:r>
+          </a:p>
+          <a:p>
+            <a:pPr algn="l">
+              <a:lnSpc>
+                <a:spcPct val="100000"/>
+              </a:lnSpc>
+              <a:spcAft>
+                <a:spcPts val="100"/>
+              </a:spcAft>
+            </a:pPr>
+            <a:r>
+              <a:rPr sz="800">
                 <a:solidFill>
                   <a:srgbClr val="3D3C3A"/>
                 </a:solidFill>
                 <a:latin typeface="Microsoft YaHei"/>
                 <a:ea typeface="Microsoft YaHei"/>
+                <a:cs typeface="Microsoft YaHei"/>
               </a:rPr>
-              <a:t> 45,568、工资 8,750，均为四象限最低</a:t>
-            </a:r>
-          </a:p>
-          <a:p>
-            <a:pPr marL="171450" indent="-171450">
+              <a:t>Centrelink 占比 22.1%</a:t>
+            </a:r>
+          </a:p>
+          <a:p>
+            <a:pPr algn="l">
               <a:lnSpc>
-                <a:spcPct val="200000"/>
+                <a:spcPct val="100000"/>
               </a:lnSpc>
               <a:spcAft>
                 <a:spcPts val="100"/>
               </a:spcAft>
-              <a:buFont typeface="Arial" panose="020B0604020202020204" pitchFamily="34" charset="0"/>
-              <a:buChar char="•"/>
-              <a:defRPr/>
             </a:pPr>
             <a:r>
-              <a:rPr sz="800" dirty="0">
+              <a:rPr sz="800">
                 <a:solidFill>
                   <a:srgbClr val="3D3C3A"/>
                 </a:solidFill>
                 <a:latin typeface="Microsoft YaHei"/>
                 <a:ea typeface="Microsoft YaHei"/>
+                <a:cs typeface="Microsoft YaHei"/>
               </a:rPr>
-              <a:t>Centrelink </a:t>
-            </a:r>
-            <a:r>
-              <a:rPr sz="800" dirty="0" err="1">
+              <a:t>赌博占比 1.3%、余额波动 std 478.1、余额异常 3.45天，均最低</a:t>
+            </a:r>
+          </a:p>
+          <a:p>
+            <a:pPr algn="l">
+              <a:lnSpc>
+                <a:spcPct val="100000"/>
+              </a:lnSpc>
+              <a:spcAft>
+                <a:spcPts val="100"/>
+              </a:spcAft>
+            </a:pPr>
+            <a:r>
+              <a:rPr sz="800">
                 <a:solidFill>
                   <a:srgbClr val="3D3C3A"/>
                 </a:solidFill>
                 <a:latin typeface="Microsoft YaHei"/>
                 <a:ea typeface="Microsoft YaHei"/>
+                <a:cs typeface="Microsoft YaHei"/>
               </a:rPr>
-              <a:t>占比</a:t>
-            </a:r>
-            <a:r>
-              <a:rPr sz="800" dirty="0">
-                <a:solidFill>
-                  <a:srgbClr val="3D3C3A"/>
-                </a:solidFill>
-                <a:latin typeface="Microsoft YaHei"/>
-                <a:ea typeface="Microsoft YaHei"/>
-              </a:rPr>
-              <a:t> 22.1%</a:t>
-            </a:r>
-          </a:p>
-          <a:p>
-            <a:pPr marL="171450" indent="-171450">
-              <a:lnSpc>
-                <a:spcPct val="200000"/>
-              </a:lnSpc>
-              <a:spcAft>
-                <a:spcPts val="100"/>
-              </a:spcAft>
-              <a:buFont typeface="Arial" panose="020B0604020202020204" pitchFamily="34" charset="0"/>
-              <a:buChar char="•"/>
-              <a:defRPr/>
-            </a:pPr>
-            <a:r>
-              <a:rPr sz="800" dirty="0" err="1">
-                <a:solidFill>
-                  <a:srgbClr val="3D3C3A"/>
-                </a:solidFill>
-                <a:latin typeface="Microsoft YaHei"/>
-                <a:ea typeface="Microsoft YaHei"/>
-              </a:rPr>
-              <a:t>赌博占比</a:t>
-            </a:r>
-            <a:r>
-              <a:rPr sz="800" dirty="0">
-                <a:solidFill>
-                  <a:srgbClr val="3D3C3A"/>
-                </a:solidFill>
-                <a:latin typeface="Microsoft YaHei"/>
-                <a:ea typeface="Microsoft YaHei"/>
-              </a:rPr>
-              <a:t> 1.3%、</a:t>
-            </a:r>
-            <a:r>
-              <a:rPr sz="800" dirty="0" err="1">
-                <a:solidFill>
-                  <a:srgbClr val="3D3C3A"/>
-                </a:solidFill>
-                <a:latin typeface="Microsoft YaHei"/>
-                <a:ea typeface="Microsoft YaHei"/>
-              </a:rPr>
-              <a:t>余额波动</a:t>
-            </a:r>
-            <a:r>
-              <a:rPr sz="800" dirty="0">
-                <a:solidFill>
-                  <a:srgbClr val="3D3C3A"/>
-                </a:solidFill>
-                <a:latin typeface="Microsoft YaHei"/>
-                <a:ea typeface="Microsoft YaHei"/>
-              </a:rPr>
-              <a:t> std 478.1、余额异常 3.45 </a:t>
-            </a:r>
-            <a:r>
-              <a:rPr sz="800" dirty="0" err="1">
-                <a:solidFill>
-                  <a:srgbClr val="3D3C3A"/>
-                </a:solidFill>
-                <a:latin typeface="Microsoft YaHei"/>
-                <a:ea typeface="Microsoft YaHei"/>
-              </a:rPr>
-              <a:t>天，均为四象限最低</a:t>
-            </a:r>
-            <a:endParaRPr sz="800" dirty="0">
-              <a:solidFill>
-                <a:srgbClr val="3D3C3A"/>
-              </a:solidFill>
-              <a:latin typeface="Microsoft YaHei"/>
-              <a:ea typeface="Microsoft YaHei"/>
-            </a:endParaRPr>
-          </a:p>
-          <a:p>
-            <a:pPr marL="171450" indent="-171450">
-              <a:lnSpc>
-                <a:spcPct val="200000"/>
-              </a:lnSpc>
-              <a:spcAft>
-                <a:spcPts val="100"/>
-              </a:spcAft>
-              <a:buFont typeface="Arial" panose="020B0604020202020204" pitchFamily="34" charset="0"/>
-              <a:buChar char="•"/>
-              <a:defRPr/>
-            </a:pPr>
-            <a:r>
-              <a:rPr sz="800" dirty="0" err="1">
-                <a:solidFill>
-                  <a:srgbClr val="3D3C3A"/>
-                </a:solidFill>
-                <a:latin typeface="Microsoft YaHei"/>
-                <a:ea typeface="Microsoft YaHei"/>
-              </a:rPr>
-              <a:t>平均申请金额仅</a:t>
-            </a:r>
-            <a:r>
-              <a:rPr sz="800" dirty="0">
-                <a:solidFill>
-                  <a:srgbClr val="3D3C3A"/>
-                </a:solidFill>
-                <a:latin typeface="Microsoft YaHei"/>
-                <a:ea typeface="Microsoft YaHei"/>
-              </a:rPr>
-              <a:t> 1,763、件均</a:t>
-            </a:r>
-            <a:r>
-              <a:rPr lang="zh-CN" altLang="en-US" sz="800" dirty="0">
-                <a:solidFill>
-                  <a:srgbClr val="3D3C3A"/>
-                </a:solidFill>
-                <a:latin typeface="Microsoft YaHei"/>
-                <a:ea typeface="Microsoft YaHei"/>
-              </a:rPr>
-              <a:t>为</a:t>
-            </a:r>
-            <a:r>
-              <a:rPr sz="800" dirty="0">
-                <a:solidFill>
-                  <a:srgbClr val="3D3C3A"/>
-                </a:solidFill>
-                <a:latin typeface="Microsoft YaHei"/>
-                <a:ea typeface="Microsoft YaHei"/>
-              </a:rPr>
-              <a:t>973，但通过后成交率 89.86% </a:t>
-            </a:r>
-            <a:r>
-              <a:rPr sz="800" dirty="0" err="1">
-                <a:solidFill>
-                  <a:srgbClr val="3D3C3A"/>
-                </a:solidFill>
-                <a:latin typeface="Microsoft YaHei"/>
-                <a:ea typeface="Microsoft YaHei"/>
-              </a:rPr>
-              <a:t>为四象限最高</a:t>
-            </a:r>
-            <a:r>
-              <a:rPr sz="800" dirty="0">
-                <a:solidFill>
-                  <a:srgbClr val="3D3C3A"/>
-                </a:solidFill>
-                <a:latin typeface="Microsoft YaHei"/>
-                <a:ea typeface="Microsoft YaHei"/>
-              </a:rPr>
-              <a:t>；</a:t>
+              <a:t>平均申请仅 1,763、件均 973；通过后成交率 89.86%，最高</a:t>
             </a:r>
           </a:p>
         </p:txBody>
@@ -12940,7 +12289,7 @@
         <p:spPr>
           <a:xfrm>
             <a:off x="6373368" y="5376994"/>
-            <a:ext cx="5065776" cy="986232"/>
+            <a:ext cx="5065776" cy="594360"/>
           </a:xfrm>
           <a:prstGeom prst="rect">
             <a:avLst/>
@@ -12953,206 +12302,87 @@
           </a:bodyPr>
           <a:lstStyle/>
           <a:p>
-            <a:pPr marL="171450" indent="-171450">
+            <a:pPr algn="l">
               <a:lnSpc>
-                <a:spcPct val="200000"/>
+                <a:spcPct val="100000"/>
               </a:lnSpc>
               <a:spcAft>
                 <a:spcPts val="100"/>
               </a:spcAft>
-              <a:buFont typeface="Arial" panose="020B0604020202020204" pitchFamily="34" charset="0"/>
-              <a:buChar char="•"/>
-              <a:defRPr/>
             </a:pPr>
             <a:r>
-              <a:rPr sz="800" dirty="0" err="1">
+              <a:rPr sz="800">
                 <a:solidFill>
                   <a:srgbClr val="3D3C3A"/>
                 </a:solidFill>
                 <a:latin typeface="Microsoft YaHei"/>
                 <a:ea typeface="Microsoft YaHei"/>
+                <a:cs typeface="Microsoft YaHei"/>
               </a:rPr>
-              <a:t>平均申请金额</a:t>
-            </a:r>
-            <a:r>
-              <a:rPr sz="800" dirty="0">
+              <a:t>平均申请 1,678、件均额度仅 760，额度覆盖率约 45.3%，均最低</a:t>
+            </a:r>
+          </a:p>
+          <a:p>
+            <a:pPr algn="l">
+              <a:lnSpc>
+                <a:spcPct val="100000"/>
+              </a:lnSpc>
+              <a:spcAft>
+                <a:spcPts val="100"/>
+              </a:spcAft>
+            </a:pPr>
+            <a:r>
+              <a:rPr sz="800">
                 <a:solidFill>
                   <a:srgbClr val="3D3C3A"/>
                 </a:solidFill>
                 <a:latin typeface="Microsoft YaHei"/>
                 <a:ea typeface="Microsoft YaHei"/>
+                <a:cs typeface="Microsoft YaHei"/>
               </a:rPr>
-              <a:t> 1,678、件均总额度仅 760、额度覆盖率约 45.3%（</a:t>
-            </a:r>
-            <a:r>
-              <a:rPr sz="800" dirty="0" err="1">
+              <a:t>发薪周期 std 4.01、余额异常 5.22天，均最高</a:t>
+            </a:r>
+          </a:p>
+          <a:p>
+            <a:pPr algn="l">
+              <a:lnSpc>
+                <a:spcPct val="100000"/>
+              </a:lnSpc>
+              <a:spcAft>
+                <a:spcPts val="100"/>
+              </a:spcAft>
+            </a:pPr>
+            <a:r>
+              <a:rPr sz="800">
                 <a:solidFill>
                   <a:srgbClr val="3D3C3A"/>
                 </a:solidFill>
                 <a:latin typeface="Microsoft YaHei"/>
                 <a:ea typeface="Microsoft YaHei"/>
+                <a:cs typeface="Microsoft YaHei"/>
               </a:rPr>
-              <a:t>四象限最低</a:t>
-            </a:r>
-            <a:r>
-              <a:rPr sz="800" dirty="0">
+              <a:t>还款 4,133元 / 10.8次，均低于“价值差×风险好”与“价值好×风险好”</a:t>
+            </a:r>
+          </a:p>
+          <a:p>
+            <a:pPr algn="l">
+              <a:lnSpc>
+                <a:spcPct val="100000"/>
+              </a:lnSpc>
+              <a:spcAft>
+                <a:spcPts val="100"/>
+              </a:spcAft>
+            </a:pPr>
+            <a:r>
+              <a:rPr sz="800">
                 <a:solidFill>
                   <a:srgbClr val="3D3C3A"/>
                 </a:solidFill>
                 <a:latin typeface="Microsoft YaHei"/>
                 <a:ea typeface="Microsoft YaHei"/>
+                <a:cs typeface="Microsoft YaHei"/>
               </a:rPr>
-              <a:t>）</a:t>
-            </a:r>
-            <a:endParaRPr lang="en-US" sz="800" dirty="0">
-              <a:solidFill>
-                <a:srgbClr val="3D3C3A"/>
-              </a:solidFill>
-              <a:latin typeface="Microsoft YaHei"/>
-              <a:ea typeface="Microsoft YaHei"/>
-            </a:endParaRPr>
-          </a:p>
-          <a:p>
-            <a:pPr marL="171450" indent="-171450">
-              <a:lnSpc>
-                <a:spcPct val="200000"/>
-              </a:lnSpc>
-              <a:spcAft>
-                <a:spcPts val="100"/>
-              </a:spcAft>
-              <a:buFont typeface="Arial" panose="020B0604020202020204" pitchFamily="34" charset="0"/>
-              <a:buChar char="•"/>
-              <a:defRPr/>
-            </a:pPr>
-            <a:r>
-              <a:rPr sz="800" dirty="0" err="1">
-                <a:solidFill>
-                  <a:srgbClr val="3D3C3A"/>
-                </a:solidFill>
-                <a:latin typeface="Microsoft YaHei"/>
-                <a:ea typeface="Microsoft YaHei"/>
-              </a:rPr>
-              <a:t>发薪周期</a:t>
-            </a:r>
-            <a:r>
-              <a:rPr sz="800" dirty="0">
-                <a:solidFill>
-                  <a:srgbClr val="3D3C3A"/>
-                </a:solidFill>
-                <a:latin typeface="Microsoft YaHei"/>
-                <a:ea typeface="Microsoft YaHei"/>
-              </a:rPr>
-              <a:t> std 4.01、余额异常 5.22 </a:t>
-            </a:r>
-            <a:r>
-              <a:rPr sz="800" dirty="0" err="1">
-                <a:solidFill>
-                  <a:srgbClr val="3D3C3A"/>
-                </a:solidFill>
-                <a:latin typeface="Microsoft YaHei"/>
-                <a:ea typeface="Microsoft YaHei"/>
-              </a:rPr>
-              <a:t>天，均为四象限最高</a:t>
-            </a:r>
-            <a:endParaRPr sz="800" dirty="0">
-              <a:solidFill>
-                <a:srgbClr val="3D3C3A"/>
-              </a:solidFill>
-              <a:latin typeface="Microsoft YaHei"/>
-              <a:ea typeface="Microsoft YaHei"/>
-            </a:endParaRPr>
-          </a:p>
-          <a:p>
-            <a:pPr marL="171450" indent="-171450">
-              <a:lnSpc>
-                <a:spcPct val="200000"/>
-              </a:lnSpc>
-              <a:spcAft>
-                <a:spcPts val="100"/>
-              </a:spcAft>
-              <a:buFont typeface="Arial" panose="020B0604020202020204" pitchFamily="34" charset="0"/>
-              <a:buChar char="•"/>
-              <a:defRPr/>
-            </a:pPr>
-            <a:r>
-              <a:rPr sz="800" dirty="0" err="1">
-                <a:solidFill>
-                  <a:srgbClr val="3D3C3A"/>
-                </a:solidFill>
-                <a:latin typeface="Microsoft YaHei"/>
-                <a:ea typeface="Microsoft YaHei"/>
-              </a:rPr>
-              <a:t>还款</a:t>
-            </a:r>
-            <a:r>
-              <a:rPr sz="800" dirty="0">
-                <a:solidFill>
-                  <a:srgbClr val="3D3C3A"/>
-                </a:solidFill>
-                <a:latin typeface="Microsoft YaHei"/>
-                <a:ea typeface="Microsoft YaHei"/>
-              </a:rPr>
-              <a:t> 4,133 元 / 10.8 </a:t>
-            </a:r>
-            <a:r>
-              <a:rPr sz="800" dirty="0" err="1">
-                <a:solidFill>
-                  <a:srgbClr val="3D3C3A"/>
-                </a:solidFill>
-                <a:latin typeface="Microsoft YaHei"/>
-                <a:ea typeface="Microsoft YaHei"/>
-              </a:rPr>
-              <a:t>次，均低于价值差×风险好与价值好×风险好</a:t>
-            </a:r>
-            <a:endParaRPr sz="800" dirty="0">
-              <a:solidFill>
-                <a:srgbClr val="3D3C3A"/>
-              </a:solidFill>
-              <a:latin typeface="Microsoft YaHei"/>
-              <a:ea typeface="Microsoft YaHei"/>
-            </a:endParaRPr>
-          </a:p>
-          <a:p>
-            <a:pPr marL="171450" indent="-171450">
-              <a:lnSpc>
-                <a:spcPct val="200000"/>
-              </a:lnSpc>
-              <a:spcAft>
-                <a:spcPts val="100"/>
-              </a:spcAft>
-              <a:buFont typeface="Arial" panose="020B0604020202020204" pitchFamily="34" charset="0"/>
-              <a:buChar char="•"/>
-              <a:defRPr/>
-            </a:pPr>
-            <a:r>
-              <a:rPr sz="800" dirty="0">
-                <a:solidFill>
-                  <a:srgbClr val="3D3C3A"/>
-                </a:solidFill>
-                <a:latin typeface="Microsoft YaHei"/>
-                <a:ea typeface="Microsoft YaHei"/>
-              </a:rPr>
-              <a:t>3M30 </a:t>
-            </a:r>
-            <a:r>
-              <a:rPr sz="800" dirty="0" err="1">
-                <a:solidFill>
-                  <a:srgbClr val="3D3C3A"/>
-                </a:solidFill>
-                <a:latin typeface="Microsoft YaHei"/>
-                <a:ea typeface="Microsoft YaHei"/>
-              </a:rPr>
-              <a:t>人数逾期率</a:t>
-            </a:r>
-            <a:r>
-              <a:rPr sz="800" dirty="0">
-                <a:solidFill>
-                  <a:srgbClr val="3D3C3A"/>
-                </a:solidFill>
-                <a:latin typeface="Microsoft YaHei"/>
-                <a:ea typeface="Microsoft YaHei"/>
-              </a:rPr>
-              <a:t> 27.05%</a:t>
+              <a:t>3M30人数逾期率 27.05%</a:t>
             </a:r>
           </a:p>
         </p:txBody>
@@ -13308,21 +12538,8 @@
               <a:defRPr/>
             </a:pPr>
             <a:r>
-              <a:rPr kumimoji="0" sz="800" b="1" i="0" u="none" strike="noStrike" kern="1200" cap="none" spc="0" normalizeH="0" baseline="0" noProof="0" dirty="0" err="1">
-                <a:ln>
-                  <a:noFill/>
-                </a:ln>
-                <a:solidFill>
-                  <a:srgbClr val="FFFFFF"/>
-                </a:solidFill>
-                <a:effectLst/>
-                <a:uLnTx/>
-                <a:uFillTx/>
-                <a:latin typeface="Microsoft YaHei"/>
-                <a:ea typeface="Microsoft YaHei"/>
-                <a:cs typeface="Microsoft YaHei"/>
-              </a:rPr>
-              <a:t>成熟信贷客</a:t>
+              <a:rPr lang="zh-CN" altLang="en-US" sz="800" dirty="0"/>
+              <a:t>用信成熟</a:t>
             </a:r>
             <a:endParaRPr kumimoji="0" sz="800" b="1" i="0" u="none" strike="noStrike" kern="1200" cap="none" spc="0" normalizeH="0" baseline="0" noProof="0" dirty="0">
               <a:ln>
@@ -13407,22 +12624,23 @@
               <a:defRPr/>
             </a:pPr>
             <a:r>
-              <a:rPr kumimoji="0" sz="800" b="1" i="0" u="none" strike="noStrike" kern="1200" cap="none" spc="0" normalizeH="0" baseline="0" noProof="0">
-                <a:ln>
-                  <a:noFill/>
-                </a:ln>
-                <a:solidFill>
-                  <a:srgbClr val="FFFFFF"/>
-                </a:solidFill>
-                <a:effectLst/>
-                <a:uLnTx/>
-                <a:uFillTx/>
-                <a:latin typeface="Microsoft YaHei"/>
-                <a:ea typeface="Microsoft YaHei"/>
-                <a:cs typeface="Microsoft YaHei"/>
-              </a:rPr>
-              <a:t>低风险行为</a:t>
-            </a:r>
+              <a:rPr lang="zh-CN" altLang="en-US" sz="800" dirty="0"/>
+              <a:t>履约稳健</a:t>
+            </a:r>
+            <a:endParaRPr kumimoji="0" sz="800" b="1" i="0" u="none" strike="noStrike" kern="1200" cap="none" spc="0" normalizeH="0" baseline="0" noProof="0" dirty="0">
+              <a:ln>
+                <a:noFill/>
+              </a:ln>
+              <a:solidFill>
+                <a:srgbClr val="FFFFFF"/>
+              </a:solidFill>
+              <a:effectLst/>
+              <a:uLnTx/>
+              <a:uFillTx/>
+              <a:latin typeface="Microsoft YaHei"/>
+              <a:ea typeface="Microsoft YaHei"/>
+              <a:cs typeface="Microsoft YaHei"/>
+            </a:endParaRPr>
           </a:p>
         </p:txBody>
       </p:sp>
@@ -13492,7 +12710,7 @@
               <a:defRPr/>
             </a:pPr>
             <a:r>
-              <a:rPr kumimoji="0" sz="800" b="1" i="0" u="none" strike="noStrike" kern="1200" cap="none" spc="0" normalizeH="0" baseline="0" noProof="0">
+              <a:rPr kumimoji="0" sz="800" b="1" i="0" u="none" strike="noStrike" kern="1200" cap="none" spc="0" normalizeH="0" baseline="0" noProof="0" dirty="0" err="1">
                 <a:ln>
                   <a:noFill/>
                 </a:ln>
@@ -13508,6 +12726,20 @@
               </a:rPr>
               <a:t>高额度诉求</a:t>
             </a:r>
+            <a:endParaRPr kumimoji="0" sz="800" b="1" i="0" u="none" strike="noStrike" kern="1200" cap="none" spc="0" normalizeH="0" baseline="0" noProof="0" dirty="0">
+              <a:ln>
+                <a:noFill/>
+              </a:ln>
+              <a:solidFill>
+                <a:srgbClr val="FFFFFF"/>
+              </a:solidFill>
+              <a:effectLst/>
+              <a:uLnTx/>
+              <a:uFillTx/>
+              <a:latin typeface="Microsoft YaHei"/>
+              <a:ea typeface="Microsoft YaHei"/>
+              <a:cs typeface="Microsoft YaHei"/>
+            </a:endParaRPr>
           </a:p>
         </p:txBody>
       </p:sp>
@@ -13662,22 +12894,23 @@
               <a:defRPr/>
             </a:pPr>
             <a:r>
-              <a:rPr kumimoji="0" sz="800" b="1" i="0" u="none" strike="noStrike" kern="1200" cap="none" spc="0" normalizeH="0" baseline="0" noProof="0">
-                <a:ln>
-                  <a:noFill/>
-                </a:ln>
-                <a:solidFill>
-                  <a:srgbClr val="FFFFFF"/>
-                </a:solidFill>
-                <a:effectLst/>
-                <a:uLnTx/>
-                <a:uFillTx/>
-                <a:latin typeface="Microsoft YaHei"/>
-                <a:ea typeface="Microsoft YaHei"/>
-                <a:cs typeface="Microsoft YaHei"/>
-              </a:rPr>
-              <a:t>动态脆弱</a:t>
-            </a:r>
+              <a:rPr lang="zh-CN" altLang="en-US" sz="800" dirty="0"/>
+              <a:t>现金过山车</a:t>
+            </a:r>
+            <a:endParaRPr kumimoji="0" lang="zh-CN" altLang="en-US" sz="800" b="1" i="0" u="none" strike="noStrike" kern="1200" cap="none" spc="0" normalizeH="0" baseline="0" noProof="0" dirty="0">
+              <a:ln>
+                <a:noFill/>
+              </a:ln>
+              <a:solidFill>
+                <a:srgbClr val="FFFFFF"/>
+              </a:solidFill>
+              <a:effectLst/>
+              <a:uLnTx/>
+              <a:uFillTx/>
+              <a:latin typeface="Microsoft YaHei"/>
+              <a:ea typeface="Microsoft YaHei"/>
+              <a:cs typeface="Microsoft YaHei"/>
+            </a:endParaRPr>
           </a:p>
         </p:txBody>
       </p:sp>
@@ -13747,7 +12980,7 @@
               <a:defRPr/>
             </a:pPr>
             <a:r>
-              <a:rPr kumimoji="0" sz="800" b="1" i="0" u="none" strike="noStrike" kern="1200" cap="none" spc="0" normalizeH="0" baseline="0" noProof="0">
+              <a:rPr kumimoji="0" sz="800" b="1" i="0" u="none" strike="noStrike" kern="1200" cap="none" spc="0" normalizeH="0" baseline="0" noProof="0" dirty="0" err="1">
                 <a:ln>
                   <a:noFill/>
                 </a:ln>
@@ -13763,6 +12996,20 @@
               </a:rPr>
               <a:t>高支出高波动</a:t>
             </a:r>
+            <a:endParaRPr kumimoji="0" sz="800" b="1" i="0" u="none" strike="noStrike" kern="1200" cap="none" spc="0" normalizeH="0" baseline="0" noProof="0" dirty="0">
+              <a:ln>
+                <a:noFill/>
+              </a:ln>
+              <a:solidFill>
+                <a:srgbClr val="FFFFFF"/>
+              </a:solidFill>
+              <a:effectLst/>
+              <a:uLnTx/>
+              <a:uFillTx/>
+              <a:latin typeface="Microsoft YaHei"/>
+              <a:ea typeface="Microsoft YaHei"/>
+              <a:cs typeface="Microsoft YaHei"/>
+            </a:endParaRPr>
           </a:p>
         </p:txBody>
       </p:sp>
@@ -13832,22 +13079,23 @@
               <a:defRPr/>
             </a:pPr>
             <a:r>
-              <a:rPr kumimoji="0" sz="800" b="1" i="0" u="none" strike="noStrike" kern="1200" cap="none" spc="0" normalizeH="0" baseline="0" noProof="0">
-                <a:ln>
-                  <a:noFill/>
-                </a:ln>
-                <a:solidFill>
-                  <a:srgbClr val="FFFFFF"/>
-                </a:solidFill>
-                <a:effectLst/>
-                <a:uLnTx/>
-                <a:uFillTx/>
-                <a:latin typeface="Microsoft YaHei"/>
-                <a:ea typeface="Microsoft YaHei"/>
-                <a:cs typeface="Microsoft YaHei"/>
-              </a:rPr>
-              <a:t>风险消费偏高</a:t>
-            </a:r>
+              <a:rPr lang="zh-CN" altLang="en-US" sz="800" dirty="0"/>
+              <a:t>周转需求强</a:t>
+            </a:r>
+            <a:endParaRPr kumimoji="0" sz="800" b="1" i="0" u="none" strike="noStrike" kern="1200" cap="none" spc="0" normalizeH="0" baseline="0" noProof="0" dirty="0">
+              <a:ln>
+                <a:noFill/>
+              </a:ln>
+              <a:solidFill>
+                <a:srgbClr val="FFFFFF"/>
+              </a:solidFill>
+              <a:effectLst/>
+              <a:uLnTx/>
+              <a:uFillTx/>
+              <a:latin typeface="Microsoft YaHei"/>
+              <a:ea typeface="Microsoft YaHei"/>
+              <a:cs typeface="Microsoft YaHei"/>
+            </a:endParaRPr>
           </a:p>
         </p:txBody>
       </p:sp>
@@ -13917,7 +13165,7 @@
               <a:defRPr/>
             </a:pPr>
             <a:r>
-              <a:rPr kumimoji="0" sz="800" b="1" i="0" u="none" strike="noStrike" kern="1200" cap="none" spc="0" normalizeH="0" baseline="0" noProof="0">
+              <a:rPr kumimoji="0" lang="zh-CN" altLang="en-US" sz="800" b="1" i="0" u="none" strike="noStrike" kern="1200" cap="none" spc="0" normalizeH="0" baseline="0" noProof="0" dirty="0">
                 <a:ln>
                   <a:noFill/>
                 </a:ln>
@@ -13931,7 +13179,7 @@
                 <a:ea typeface="Microsoft YaHei"/>
                 <a:cs typeface="Microsoft YaHei"/>
               </a:rPr>
-              <a:t>额度诉求强</a:t>
+              <a:t>高额度诉求</a:t>
             </a:r>
           </a:p>
         </p:txBody>
@@ -14002,22 +13250,23 @@
               <a:defRPr/>
             </a:pPr>
             <a:r>
-              <a:rPr kumimoji="0" sz="800" b="1" i="0" u="none" strike="noStrike" kern="1200" cap="none" spc="0" normalizeH="0" baseline="0" noProof="0">
-                <a:ln>
-                  <a:noFill/>
-                </a:ln>
-                <a:solidFill>
-                  <a:srgbClr val="FFFFFF"/>
-                </a:solidFill>
-                <a:effectLst/>
-                <a:uLnTx/>
-                <a:uFillTx/>
-                <a:latin typeface="Microsoft YaHei"/>
-                <a:ea typeface="Microsoft YaHei"/>
-                <a:cs typeface="Microsoft YaHei"/>
-              </a:rPr>
-              <a:t>收入偏低</a:t>
-            </a:r>
+              <a:rPr lang="zh-CN" altLang="en-US" sz="800" dirty="0"/>
+              <a:t>紧预算人群</a:t>
+            </a:r>
+            <a:endParaRPr kumimoji="0" sz="800" b="1" i="0" u="none" strike="noStrike" kern="1200" cap="none" spc="0" normalizeH="0" baseline="0" noProof="0" dirty="0">
+              <a:ln>
+                <a:noFill/>
+              </a:ln>
+              <a:solidFill>
+                <a:srgbClr val="FFFFFF"/>
+              </a:solidFill>
+              <a:effectLst/>
+              <a:uLnTx/>
+              <a:uFillTx/>
+              <a:latin typeface="Microsoft YaHei"/>
+              <a:ea typeface="Microsoft YaHei"/>
+              <a:cs typeface="Microsoft YaHei"/>
+            </a:endParaRPr>
           </a:p>
         </p:txBody>
       </p:sp>
@@ -14087,22 +13336,23 @@
               <a:defRPr/>
             </a:pPr>
             <a:r>
-              <a:rPr kumimoji="0" sz="800" b="1" i="0" u="none" strike="noStrike" kern="1200" cap="none" spc="0" normalizeH="0" baseline="0" noProof="0">
-                <a:ln>
-                  <a:noFill/>
-                </a:ln>
-                <a:solidFill>
-                  <a:srgbClr val="FFFFFF"/>
-                </a:solidFill>
-                <a:effectLst/>
-                <a:uLnTx/>
-                <a:uFillTx/>
-                <a:latin typeface="Microsoft YaHei"/>
-                <a:ea typeface="Microsoft YaHei"/>
-                <a:cs typeface="Microsoft YaHei"/>
-              </a:rPr>
-              <a:t>福利依赖较高</a:t>
-            </a:r>
+              <a:rPr lang="zh-CN" altLang="en-US" sz="800" dirty="0"/>
+              <a:t>福利依赖型</a:t>
+            </a:r>
+            <a:endParaRPr kumimoji="0" sz="800" b="1" i="0" u="none" strike="noStrike" kern="1200" cap="none" spc="0" normalizeH="0" baseline="0" noProof="0" dirty="0">
+              <a:ln>
+                <a:noFill/>
+              </a:ln>
+              <a:solidFill>
+                <a:srgbClr val="FFFFFF"/>
+              </a:solidFill>
+              <a:effectLst/>
+              <a:uLnTx/>
+              <a:uFillTx/>
+              <a:latin typeface="Microsoft YaHei"/>
+              <a:ea typeface="Microsoft YaHei"/>
+              <a:cs typeface="Microsoft YaHei"/>
+            </a:endParaRPr>
           </a:p>
         </p:txBody>
       </p:sp>
@@ -14172,22 +13422,23 @@
               <a:defRPr/>
             </a:pPr>
             <a:r>
-              <a:rPr kumimoji="0" sz="800" b="1" i="0" u="none" strike="noStrike" kern="1200" cap="none" spc="0" normalizeH="0" baseline="0" noProof="0">
-                <a:ln>
-                  <a:noFill/>
-                </a:ln>
-                <a:solidFill>
-                  <a:srgbClr val="FFFFFF"/>
-                </a:solidFill>
-                <a:effectLst/>
-                <a:uLnTx/>
-                <a:uFillTx/>
-                <a:latin typeface="Microsoft YaHei"/>
-                <a:ea typeface="Microsoft YaHei"/>
-                <a:cs typeface="Microsoft YaHei"/>
-              </a:rPr>
-              <a:t>量入为出</a:t>
-            </a:r>
+              <a:rPr lang="zh-CN" altLang="en-US" sz="800" dirty="0"/>
+              <a:t>克制过日子</a:t>
+            </a:r>
+            <a:endParaRPr kumimoji="0" sz="800" b="1" i="0" u="none" strike="noStrike" kern="1200" cap="none" spc="0" normalizeH="0" baseline="0" noProof="0" dirty="0">
+              <a:ln>
+                <a:noFill/>
+              </a:ln>
+              <a:solidFill>
+                <a:srgbClr val="FFFFFF"/>
+              </a:solidFill>
+              <a:effectLst/>
+              <a:uLnTx/>
+              <a:uFillTx/>
+              <a:latin typeface="Microsoft YaHei"/>
+              <a:ea typeface="Microsoft YaHei"/>
+              <a:cs typeface="Microsoft YaHei"/>
+            </a:endParaRPr>
           </a:p>
         </p:txBody>
       </p:sp>
@@ -14257,107 +13508,23 @@
               <a:defRPr/>
             </a:pPr>
             <a:r>
-              <a:rPr kumimoji="0" sz="800" b="1" i="0" u="none" strike="noStrike" kern="1200" cap="none" spc="0" normalizeH="0" baseline="0" noProof="0">
-                <a:ln>
-                  <a:noFill/>
-                </a:ln>
-                <a:solidFill>
-                  <a:srgbClr val="FFFFFF"/>
-                </a:solidFill>
-                <a:effectLst/>
-                <a:uLnTx/>
-                <a:uFillTx/>
-                <a:latin typeface="Microsoft YaHei"/>
-                <a:ea typeface="Microsoft YaHei"/>
-                <a:cs typeface="Microsoft YaHei"/>
-              </a:rPr>
-              <a:t>低风险行为</a:t>
-            </a:r>
-          </a:p>
-        </p:txBody>
-      </p:sp>
-      <p:sp>
-        <p:nvSpPr>
-          <p:cNvPr id="134" name="Rounded Rectangle 66">
-            <a:extLst>
-              <a:ext uri="{FF2B5EF4-FFF2-40B4-BE49-F238E27FC236}">
-                <a16:creationId xmlns:a16="http://schemas.microsoft.com/office/drawing/2014/main" id="{19FB5484-27D3-4E5E-BFB8-4FB7567E1FF1}"/>
-              </a:ext>
-            </a:extLst>
-          </p:cNvPr>
-          <p:cNvSpPr/>
-          <p:nvPr/>
-        </p:nvSpPr>
-        <p:spPr>
-          <a:xfrm>
-            <a:off x="3306109" y="4253453"/>
-            <a:ext cx="630936" cy="201168"/>
-          </a:xfrm>
-          <a:prstGeom prst="roundRect">
-            <a:avLst>
-              <a:gd name="adj" fmla="val 50000"/>
-            </a:avLst>
-          </a:prstGeom>
-          <a:solidFill>
-            <a:srgbClr val="1F4E79"/>
-          </a:solidFill>
-          <a:ln>
-            <a:noFill/>
-          </a:ln>
-          <a:effectLst/>
-        </p:spPr>
-        <p:style>
-          <a:lnRef idx="1">
-            <a:schemeClr val="accent1"/>
-          </a:lnRef>
-          <a:fillRef idx="3">
-            <a:schemeClr val="accent1"/>
-          </a:fillRef>
-          <a:effectRef idx="2">
-            <a:schemeClr val="accent1"/>
-          </a:effectRef>
-          <a:fontRef idx="minor">
-            <a:schemeClr val="lt1"/>
-          </a:fontRef>
-        </p:style>
-        <p:txBody>
-          <a:bodyPr wrap="none" lIns="27432" tIns="0" rIns="27432" bIns="0" rtlCol="0" anchor="ctr"/>
-          <a:lstStyle/>
-          <a:p>
-            <a:pPr marL="0" marR="0" lvl="0" indent="0" algn="ctr" defTabSz="914400" rtl="0" eaLnBrk="1" fontAlgn="auto" latinLnBrk="0" hangingPunct="1">
-              <a:lnSpc>
-                <a:spcPct val="100000"/>
-              </a:lnSpc>
-              <a:spcBef>
-                <a:spcPts val="0"/>
-              </a:spcBef>
-              <a:spcAft>
-                <a:spcPts val="0"/>
-              </a:spcAft>
-              <a:buClrTx/>
-              <a:buSzTx/>
-              <a:buFontTx/>
-              <a:buNone/>
-              <a:tabLst/>
-              <a:defRPr/>
-            </a:pPr>
-            <a:r>
-              <a:rPr kumimoji="0" sz="800" b="1" i="0" u="none" strike="noStrike" kern="1200" cap="none" spc="0" normalizeH="0" baseline="0" noProof="0">
-                <a:ln>
-                  <a:noFill/>
-                </a:ln>
-                <a:solidFill>
-                  <a:srgbClr val="FFFFFF"/>
-                </a:solidFill>
-                <a:effectLst/>
-                <a:uLnTx/>
-                <a:uFillTx/>
-                <a:latin typeface="Microsoft YaHei"/>
-                <a:ea typeface="Microsoft YaHei"/>
-                <a:cs typeface="Microsoft YaHei"/>
-              </a:rPr>
-              <a:t>小额强承接</a:t>
-            </a:r>
+              <a:rPr lang="zh-CN" altLang="en-US" sz="800" dirty="0"/>
+              <a:t>小额刚需党</a:t>
+            </a:r>
+            <a:endParaRPr kumimoji="0" sz="800" b="1" i="0" u="none" strike="noStrike" kern="1200" cap="none" spc="0" normalizeH="0" baseline="0" noProof="0" dirty="0">
+              <a:ln>
+                <a:noFill/>
+              </a:ln>
+              <a:solidFill>
+                <a:srgbClr val="FFFFFF"/>
+              </a:solidFill>
+              <a:effectLst/>
+              <a:uLnTx/>
+              <a:uFillTx/>
+              <a:latin typeface="Microsoft YaHei"/>
+              <a:ea typeface="Microsoft YaHei"/>
+              <a:cs typeface="Microsoft YaHei"/>
+            </a:endParaRPr>
           </a:p>
         </p:txBody>
       </p:sp>
@@ -14427,21 +13594,8 @@
               <a:defRPr/>
             </a:pPr>
             <a:r>
-              <a:rPr kumimoji="0" sz="800" b="1" i="0" u="none" strike="noStrike" kern="1200" cap="none" spc="0" normalizeH="0" baseline="0" noProof="0" dirty="0" err="1">
-                <a:ln>
-                  <a:noFill/>
-                </a:ln>
-                <a:solidFill>
-                  <a:srgbClr val="FFFFFF"/>
-                </a:solidFill>
-                <a:effectLst/>
-                <a:uLnTx/>
-                <a:uFillTx/>
-                <a:latin typeface="Microsoft YaHei"/>
-                <a:ea typeface="Microsoft YaHei"/>
-                <a:cs typeface="Microsoft YaHei"/>
-              </a:rPr>
-              <a:t>小额迫切需求</a:t>
+              <a:rPr lang="zh-CN" altLang="en-US" sz="800" dirty="0"/>
+              <a:t>现金告急</a:t>
             </a:r>
             <a:endParaRPr kumimoji="0" sz="800" b="1" i="0" u="none" strike="noStrike" kern="1200" cap="none" spc="0" normalizeH="0" baseline="0" noProof="0" dirty="0">
               <a:ln>
@@ -14526,22 +13680,23 @@
               <a:defRPr/>
             </a:pPr>
             <a:r>
-              <a:rPr kumimoji="0" sz="800" b="1" i="0" u="none" strike="noStrike" kern="1200" cap="none" spc="0" normalizeH="0" baseline="0" noProof="0">
-                <a:ln>
-                  <a:noFill/>
-                </a:ln>
-                <a:solidFill>
-                  <a:srgbClr val="FFFFFF"/>
-                </a:solidFill>
-                <a:effectLst/>
-                <a:uLnTx/>
-                <a:uFillTx/>
-                <a:latin typeface="Microsoft YaHei"/>
-                <a:ea typeface="Microsoft YaHei"/>
-                <a:cs typeface="Microsoft YaHei"/>
-              </a:rPr>
-              <a:t>现金流不稳定</a:t>
-            </a:r>
+              <a:rPr lang="zh-CN" altLang="en-US" sz="800" dirty="0"/>
+              <a:t>收支失衡</a:t>
+            </a:r>
+            <a:endParaRPr kumimoji="0" sz="800" b="1" i="0" u="none" strike="noStrike" kern="1200" cap="none" spc="0" normalizeH="0" baseline="0" noProof="0" dirty="0">
+              <a:ln>
+                <a:noFill/>
+              </a:ln>
+              <a:solidFill>
+                <a:srgbClr val="FFFFFF"/>
+              </a:solidFill>
+              <a:effectLst/>
+              <a:uLnTx/>
+              <a:uFillTx/>
+              <a:latin typeface="Microsoft YaHei"/>
+              <a:ea typeface="Microsoft YaHei"/>
+              <a:cs typeface="Microsoft YaHei"/>
+            </a:endParaRPr>
           </a:p>
         </p:txBody>
       </p:sp>
@@ -14611,22 +13766,23 @@
               <a:defRPr/>
             </a:pPr>
             <a:r>
-              <a:rPr kumimoji="0" sz="800" b="1" i="0" u="none" strike="noStrike" kern="1200" cap="none" spc="0" normalizeH="0" baseline="0" noProof="0">
-                <a:ln>
-                  <a:noFill/>
-                </a:ln>
-                <a:solidFill>
-                  <a:srgbClr val="FFFFFF"/>
-                </a:solidFill>
-                <a:effectLst/>
-                <a:uLnTx/>
-                <a:uFillTx/>
-                <a:latin typeface="Microsoft YaHei"/>
-                <a:ea typeface="Microsoft YaHei"/>
-                <a:cs typeface="Microsoft YaHei"/>
-              </a:rPr>
-              <a:t>还款活动弱</a:t>
-            </a:r>
+              <a:rPr lang="zh-CN" altLang="en-US" sz="800" dirty="0"/>
+              <a:t>还款乏力</a:t>
+            </a:r>
+            <a:endParaRPr kumimoji="0" sz="800" b="1" i="0" u="none" strike="noStrike" kern="1200" cap="none" spc="0" normalizeH="0" baseline="0" noProof="0" dirty="0">
+              <a:ln>
+                <a:noFill/>
+              </a:ln>
+              <a:solidFill>
+                <a:srgbClr val="FFFFFF"/>
+              </a:solidFill>
+              <a:effectLst/>
+              <a:uLnTx/>
+              <a:uFillTx/>
+              <a:latin typeface="Microsoft YaHei"/>
+              <a:ea typeface="Microsoft YaHei"/>
+              <a:cs typeface="Microsoft YaHei"/>
+            </a:endParaRPr>
           </a:p>
         </p:txBody>
       </p:sp>
@@ -14696,21 +13852,8 @@
               <a:defRPr/>
             </a:pPr>
             <a:r>
-              <a:rPr kumimoji="0" sz="800" b="1" i="0" u="none" strike="noStrike" kern="1200" cap="none" spc="0" normalizeH="0" baseline="0" noProof="0" dirty="0" err="1">
-                <a:ln>
-                  <a:noFill/>
-                </a:ln>
-                <a:solidFill>
-                  <a:srgbClr val="FFFFFF"/>
-                </a:solidFill>
-                <a:effectLst/>
-                <a:uLnTx/>
-                <a:uFillTx/>
-                <a:latin typeface="Microsoft YaHei"/>
-                <a:ea typeface="Microsoft YaHei"/>
-                <a:cs typeface="Microsoft YaHei"/>
-              </a:rPr>
-              <a:t>高逾期风险</a:t>
+              <a:rPr lang="zh-CN" altLang="en-US" sz="800" dirty="0"/>
+              <a:t>高危边缘客</a:t>
             </a:r>
             <a:endParaRPr kumimoji="0" sz="800" b="1" i="0" u="none" strike="noStrike" kern="1200" cap="none" spc="0" normalizeH="0" baseline="0" noProof="0" dirty="0">
               <a:ln>

--- a/四类客群矩阵.pptx
+++ b/四类客群矩阵.pptx
@@ -7788,7 +7788,7 @@
               </a:defRPr>
             </a:pPr>
             <a:r>
-              <a:rPr kumimoji="0" sz="1300" b="1" i="0" u="none" strike="noStrike" kern="1200" cap="none" spc="0" normalizeH="0" baseline="0" noProof="0">
+              <a:rPr kumimoji="0" sz="1300" b="1" i="0" u="none" strike="noStrike" kern="1200" cap="none" spc="0" normalizeH="0" baseline="0" noProof="0" dirty="0" err="1">
                 <a:ln>
                   <a:noFill/>
                 </a:ln>
@@ -7804,6 +7804,20 @@
               </a:rPr>
               <a:t>稳健经营型优质客</a:t>
             </a:r>
+            <a:endParaRPr kumimoji="0" sz="1300" b="1" i="0" u="none" strike="noStrike" kern="1200" cap="none" spc="0" normalizeH="0" baseline="0" noProof="0" dirty="0">
+              <a:ln>
+                <a:noFill/>
+              </a:ln>
+              <a:solidFill>
+                <a:srgbClr val="268343"/>
+              </a:solidFill>
+              <a:effectLst/>
+              <a:uLnTx/>
+              <a:uFillTx/>
+              <a:latin typeface="Microsoft YaHei"/>
+              <a:ea typeface="+mn-ea"/>
+              <a:cs typeface="+mn-cs"/>
+            </a:endParaRPr>
           </a:p>
         </p:txBody>
       </p:sp>
@@ -9921,7 +9935,7 @@
               </a:defRPr>
             </a:pPr>
             <a:r>
-              <a:rPr kumimoji="0" sz="1300" b="1" i="0" u="none" strike="noStrike" kern="1200" cap="none" spc="0" normalizeH="0" baseline="0" noProof="0">
+              <a:rPr kumimoji="0" sz="1300" b="1" i="0" u="none" strike="noStrike" kern="1200" cap="none" spc="0" normalizeH="0" baseline="0" noProof="0" dirty="0" err="1">
                 <a:ln>
                   <a:noFill/>
                 </a:ln>
@@ -9937,6 +9951,20 @@
               </a:rPr>
               <a:t>低收入克制型刚需客</a:t>
             </a:r>
+            <a:endParaRPr kumimoji="0" sz="1300" b="1" i="0" u="none" strike="noStrike" kern="1200" cap="none" spc="0" normalizeH="0" baseline="0" noProof="0" dirty="0">
+              <a:ln>
+                <a:noFill/>
+              </a:ln>
+              <a:solidFill>
+                <a:srgbClr val="1B5380"/>
+              </a:solidFill>
+              <a:effectLst/>
+              <a:uLnTx/>
+              <a:uFillTx/>
+              <a:latin typeface="Microsoft YaHei"/>
+              <a:ea typeface="+mn-ea"/>
+              <a:cs typeface="+mn-cs"/>
+            </a:endParaRPr>
           </a:p>
         </p:txBody>
       </p:sp>
@@ -11928,8 +11956,8 @@
         </p:nvSpPr>
         <p:spPr>
           <a:xfrm>
-            <a:off x="685980" y="2539315"/>
-            <a:ext cx="5065776" cy="594360"/>
+            <a:off x="657721" y="2549292"/>
+            <a:ext cx="5065776" cy="530915"/>
           </a:xfrm>
           <a:prstGeom prst="rect">
             <a:avLst/>
@@ -11951,7 +11979,7 @@
               </a:spcAft>
             </a:pPr>
             <a:r>
-              <a:rPr sz="800">
+              <a:rPr sz="800" dirty="0" err="1">
                 <a:solidFill>
                   <a:srgbClr val="3D3C3A"/>
                 </a:solidFill>
@@ -11959,7 +11987,73 @@
                 <a:ea typeface="Microsoft YaHei"/>
                 <a:cs typeface="Microsoft YaHei"/>
               </a:rPr>
-              <a:t>总收入 96,943 / 总支出 92,348；发薪最稳（std 2.50），福利依赖低（2.7%）</a:t>
+              <a:t>总收入</a:t>
+            </a:r>
+            <a:r>
+              <a:rPr sz="800" dirty="0">
+                <a:solidFill>
+                  <a:srgbClr val="3D3C3A"/>
+                </a:solidFill>
+                <a:latin typeface="Microsoft YaHei"/>
+                <a:ea typeface="Microsoft YaHei"/>
+                <a:cs typeface="Microsoft YaHei"/>
+              </a:rPr>
+              <a:t> 96,943 / </a:t>
+            </a:r>
+            <a:r>
+              <a:rPr sz="800" dirty="0" err="1">
+                <a:solidFill>
+                  <a:srgbClr val="3D3C3A"/>
+                </a:solidFill>
+                <a:latin typeface="Microsoft YaHei"/>
+                <a:ea typeface="Microsoft YaHei"/>
+                <a:cs typeface="Microsoft YaHei"/>
+              </a:rPr>
+              <a:t>总支出</a:t>
+            </a:r>
+            <a:r>
+              <a:rPr sz="800" dirty="0">
+                <a:solidFill>
+                  <a:srgbClr val="3D3C3A"/>
+                </a:solidFill>
+                <a:latin typeface="Microsoft YaHei"/>
+                <a:ea typeface="Microsoft YaHei"/>
+                <a:cs typeface="Microsoft YaHei"/>
+              </a:rPr>
+              <a:t> 92,348；发薪最稳（std 2.50），</a:t>
+            </a:r>
+            <a:r>
+              <a:rPr sz="800" dirty="0" err="1">
+                <a:solidFill>
+                  <a:srgbClr val="3D3C3A"/>
+                </a:solidFill>
+                <a:latin typeface="Microsoft YaHei"/>
+                <a:ea typeface="Microsoft YaHei"/>
+                <a:cs typeface="Microsoft YaHei"/>
+              </a:rPr>
+              <a:t>福利依赖</a:t>
+            </a:r>
+            <a:r>
+              <a:rPr lang="zh-CN" altLang="en-US" sz="800" dirty="0">
+                <a:solidFill>
+                  <a:srgbClr val="3D3C3A"/>
+                </a:solidFill>
+                <a:latin typeface="Microsoft YaHei"/>
+                <a:ea typeface="Microsoft YaHei"/>
+                <a:cs typeface="Microsoft YaHei"/>
+              </a:rPr>
+              <a:t>最</a:t>
+            </a:r>
+            <a:r>
+              <a:rPr sz="800" dirty="0">
+                <a:solidFill>
+                  <a:srgbClr val="3D3C3A"/>
+                </a:solidFill>
+                <a:latin typeface="Microsoft YaHei"/>
+                <a:ea typeface="Microsoft YaHei"/>
+                <a:cs typeface="Microsoft YaHei"/>
+              </a:rPr>
+              <a:t>低（2.7%）</a:t>
             </a:r>
           </a:p>
           <a:p>
@@ -11972,7 +12066,7 @@
               </a:spcAft>
             </a:pPr>
             <a:r>
-              <a:rPr sz="800">
+              <a:rPr sz="800" dirty="0" err="1">
                 <a:solidFill>
                   <a:srgbClr val="3D3C3A"/>
                 </a:solidFill>
@@ -11980,7 +12074,18 @@
                 <a:ea typeface="Microsoft YaHei"/>
                 <a:cs typeface="Microsoft YaHei"/>
               </a:rPr>
-              <a:t>还款 24,276元 / 34.0次，履约最积极，显著高于低价值两组</a:t>
+              <a:t>还款</a:t>
+            </a:r>
+            <a:r>
+              <a:rPr sz="800" dirty="0">
+                <a:solidFill>
+                  <a:srgbClr val="3D3C3A"/>
+                </a:solidFill>
+                <a:latin typeface="Microsoft YaHei"/>
+                <a:ea typeface="Microsoft YaHei"/>
+                <a:cs typeface="Microsoft YaHei"/>
+              </a:rPr>
+              <a:t> 24,276元 / 34.0次，履约最积极，显著高于低价值两组</a:t>
             </a:r>
           </a:p>
           <a:p>
@@ -11993,7 +12098,7 @@
               </a:spcAft>
             </a:pPr>
             <a:r>
-              <a:rPr sz="800">
+              <a:rPr sz="800" dirty="0" err="1">
                 <a:solidFill>
                   <a:srgbClr val="3D3C3A"/>
                 </a:solidFill>
@@ -12001,7 +12106,29 @@
                 <a:ea typeface="Microsoft YaHei"/>
                 <a:cs typeface="Microsoft YaHei"/>
               </a:rPr>
-              <a:t>赌博占比 2.5%，余额异常 3.82天；3M30余额逾期率 2.62%</a:t>
+              <a:t>赌博</a:t>
+            </a:r>
+            <a:r>
+              <a:rPr lang="zh-CN" altLang="en-US" sz="800" dirty="0">
+                <a:solidFill>
+                  <a:srgbClr val="3D3C3A"/>
+                </a:solidFill>
+                <a:latin typeface="Microsoft YaHei"/>
+                <a:ea typeface="Microsoft YaHei"/>
+                <a:cs typeface="Microsoft YaHei"/>
+              </a:rPr>
+              <a:t>支出占比</a:t>
+            </a:r>
+            <a:r>
+              <a:rPr sz="800" dirty="0">
+                <a:solidFill>
+                  <a:srgbClr val="3D3C3A"/>
+                </a:solidFill>
+                <a:latin typeface="Microsoft YaHei"/>
+                <a:ea typeface="Microsoft YaHei"/>
+                <a:cs typeface="Microsoft YaHei"/>
+              </a:rPr>
+              <a:t> 2.5%；3M30余额逾期率 2.62%</a:t>
             </a:r>
           </a:p>
           <a:p>
@@ -12014,7 +12141,7 @@
               </a:spcAft>
             </a:pPr>
             <a:r>
-              <a:rPr sz="800">
+              <a:rPr sz="800" dirty="0" err="1">
                 <a:solidFill>
                   <a:srgbClr val="3D3C3A"/>
                 </a:solidFill>
@@ -12022,7 +12149,18 @@
                 <a:ea typeface="Microsoft YaHei"/>
                 <a:cs typeface="Microsoft YaHei"/>
               </a:rPr>
-              <a:t>平均申请 2,589，件均额度 1,627，均处高位；额度满足率 62.8%</a:t>
+              <a:t>平均申请</a:t>
+            </a:r>
+            <a:r>
+              <a:rPr sz="800" dirty="0">
+                <a:solidFill>
+                  <a:srgbClr val="3D3C3A"/>
+                </a:solidFill>
+                <a:latin typeface="Microsoft YaHei"/>
+                <a:ea typeface="Microsoft YaHei"/>
+                <a:cs typeface="Microsoft YaHei"/>
+              </a:rPr>
+              <a:t> 2,589，件均额度 1,627，均处高位；额度满足率 62.8%</a:t>
             </a:r>
           </a:p>
         </p:txBody>
@@ -12041,8 +12179,8 @@
         </p:nvSpPr>
         <p:spPr>
           <a:xfrm>
-            <a:off x="6283090" y="2454638"/>
-            <a:ext cx="5659077" cy="731520"/>
+            <a:off x="6395904" y="2535605"/>
+            <a:ext cx="5659077" cy="666849"/>
           </a:xfrm>
           <a:prstGeom prst="rect">
             <a:avLst/>
@@ -12064,7 +12202,7 @@
               </a:spcAft>
             </a:pPr>
             <a:r>
-              <a:rPr sz="800">
+              <a:rPr sz="800" dirty="0" err="1">
                 <a:solidFill>
                   <a:srgbClr val="3D3C3A"/>
                 </a:solidFill>
@@ -12072,7 +12210,18 @@
                 <a:ea typeface="Microsoft YaHei"/>
                 <a:cs typeface="Microsoft YaHei"/>
               </a:rPr>
-              <a:t>平均收入 19,425，net surplus 10,620，静态偿付能力最佳</a:t>
+              <a:t>平均收入</a:t>
+            </a:r>
+            <a:r>
+              <a:rPr sz="800" dirty="0">
+                <a:solidFill>
+                  <a:srgbClr val="3D3C3A"/>
+                </a:solidFill>
+                <a:latin typeface="Microsoft YaHei"/>
+                <a:ea typeface="Microsoft YaHei"/>
+                <a:cs typeface="Microsoft YaHei"/>
+              </a:rPr>
+              <a:t> 19,425，net surplus 10,620，静态偿付能力最佳</a:t>
             </a:r>
           </a:p>
           <a:p>
@@ -12085,7 +12234,7 @@
               </a:spcAft>
             </a:pPr>
             <a:r>
-              <a:rPr sz="800">
+              <a:rPr sz="800" dirty="0">
                 <a:solidFill>
                   <a:srgbClr val="3D3C3A"/>
                 </a:solidFill>
@@ -12093,7 +12242,51 @@
                 <a:ea typeface="Microsoft YaHei"/>
                 <a:cs typeface="Microsoft YaHei"/>
               </a:rPr>
-              <a:t>3M30人数 / 余额逾期率 10.42% / 7.96%，余额逾期率约为人数的 76.4%</a:t>
+              <a:t>3M30人数 / </a:t>
+            </a:r>
+            <a:r>
+              <a:rPr sz="800" dirty="0" err="1">
+                <a:solidFill>
+                  <a:srgbClr val="3D3C3A"/>
+                </a:solidFill>
+                <a:latin typeface="Microsoft YaHei"/>
+                <a:ea typeface="Microsoft YaHei"/>
+                <a:cs typeface="Microsoft YaHei"/>
+              </a:rPr>
+              <a:t>余额逾期率</a:t>
+            </a:r>
+            <a:r>
+              <a:rPr sz="800" dirty="0">
+                <a:solidFill>
+                  <a:srgbClr val="3D3C3A"/>
+                </a:solidFill>
+                <a:latin typeface="Microsoft YaHei"/>
+                <a:ea typeface="Microsoft YaHei"/>
+                <a:cs typeface="Microsoft YaHei"/>
+              </a:rPr>
+              <a:t> 10.42% / 7.96%，</a:t>
+            </a:r>
+            <a:r>
+              <a:rPr sz="800" dirty="0" err="1">
+                <a:solidFill>
+                  <a:srgbClr val="3D3C3A"/>
+                </a:solidFill>
+                <a:latin typeface="Microsoft YaHei"/>
+                <a:ea typeface="Microsoft YaHei"/>
+                <a:cs typeface="Microsoft YaHei"/>
+              </a:rPr>
+              <a:t>余额逾期率约为人数的</a:t>
+            </a:r>
+            <a:r>
+              <a:rPr sz="800" dirty="0">
+                <a:solidFill>
+                  <a:srgbClr val="3D3C3A"/>
+                </a:solidFill>
+                <a:latin typeface="Microsoft YaHei"/>
+                <a:ea typeface="Microsoft YaHei"/>
+                <a:cs typeface="Microsoft YaHei"/>
+              </a:rPr>
+              <a:t> 76.4%</a:t>
             </a:r>
           </a:p>
           <a:p>
@@ -12106,7 +12299,7 @@
               </a:spcAft>
             </a:pPr>
             <a:r>
-              <a:rPr sz="800">
+              <a:rPr sz="800" dirty="0" err="1">
                 <a:solidFill>
                   <a:srgbClr val="3D3C3A"/>
                 </a:solidFill>
@@ -12114,7 +12307,40 @@
                 <a:ea typeface="Microsoft YaHei"/>
                 <a:cs typeface="Microsoft YaHei"/>
               </a:rPr>
-              <a:t>总收入 191,383、工资 50,253，均最高；总支出 193,711 已超收入，金额波动 std 8,442，处高位</a:t>
+              <a:t>总收入</a:t>
+            </a:r>
+            <a:r>
+              <a:rPr sz="800" dirty="0">
+                <a:solidFill>
+                  <a:srgbClr val="3D3C3A"/>
+                </a:solidFill>
+                <a:latin typeface="Microsoft YaHei"/>
+                <a:ea typeface="Microsoft YaHei"/>
+                <a:cs typeface="Microsoft YaHei"/>
+              </a:rPr>
+              <a:t> 191,383、工资 50,253，均最高；总支出 193,711 </a:t>
+            </a:r>
+            <a:r>
+              <a:rPr sz="800" dirty="0" err="1">
+                <a:solidFill>
+                  <a:srgbClr val="3D3C3A"/>
+                </a:solidFill>
+                <a:latin typeface="Microsoft YaHei"/>
+                <a:ea typeface="Microsoft YaHei"/>
+                <a:cs typeface="Microsoft YaHei"/>
+              </a:rPr>
+              <a:t>已超收入，金额波动</a:t>
+            </a:r>
+            <a:r>
+              <a:rPr sz="800" dirty="0">
+                <a:solidFill>
+                  <a:srgbClr val="3D3C3A"/>
+                </a:solidFill>
+                <a:latin typeface="Microsoft YaHei"/>
+                <a:ea typeface="Microsoft YaHei"/>
+                <a:cs typeface="Microsoft YaHei"/>
+              </a:rPr>
+              <a:t> std 8,442，处高位</a:t>
             </a:r>
           </a:p>
           <a:p>
@@ -12127,7 +12353,7 @@
               </a:spcAft>
             </a:pPr>
             <a:r>
-              <a:rPr sz="800">
+              <a:rPr sz="800" dirty="0" err="1">
                 <a:solidFill>
                   <a:srgbClr val="3D3C3A"/>
                 </a:solidFill>
@@ -12135,7 +12361,29 @@
                 <a:ea typeface="Microsoft YaHei"/>
                 <a:cs typeface="Microsoft YaHei"/>
               </a:rPr>
-              <a:t>赌博支出 7,416（5.2%）</a:t>
+              <a:t>赌博支出</a:t>
+            </a:r>
+            <a:r>
+              <a:rPr lang="zh-CN" altLang="en-US" sz="800" dirty="0">
+                <a:solidFill>
+                  <a:srgbClr val="3D3C3A"/>
+                </a:solidFill>
+                <a:latin typeface="Microsoft YaHei"/>
+                <a:ea typeface="Microsoft YaHei"/>
+                <a:cs typeface="Microsoft YaHei"/>
+              </a:rPr>
+              <a:t>占比</a:t>
+            </a:r>
+            <a:r>
+              <a:rPr sz="800" dirty="0">
+                <a:solidFill>
+                  <a:srgbClr val="3D3C3A"/>
+                </a:solidFill>
+                <a:latin typeface="Microsoft YaHei"/>
+                <a:ea typeface="Microsoft YaHei"/>
+                <a:cs typeface="Microsoft YaHei"/>
+              </a:rPr>
+              <a:t> 5.2%</a:t>
             </a:r>
           </a:p>
           <a:p>
@@ -12148,7 +12396,7 @@
               </a:spcAft>
             </a:pPr>
             <a:r>
-              <a:rPr sz="800">
+              <a:rPr sz="800" dirty="0" err="1">
                 <a:solidFill>
                   <a:srgbClr val="3D3C3A"/>
                 </a:solidFill>
@@ -12156,7 +12404,18 @@
                 <a:ea typeface="Microsoft YaHei"/>
                 <a:cs typeface="Microsoft YaHei"/>
               </a:rPr>
-              <a:t>平均申请 2,625，最高；件均额度 1,449，额度满足率 55.2%</a:t>
+              <a:t>平均申请</a:t>
+            </a:r>
+            <a:r>
+              <a:rPr sz="800" dirty="0">
+                <a:solidFill>
+                  <a:srgbClr val="3D3C3A"/>
+                </a:solidFill>
+                <a:latin typeface="Microsoft YaHei"/>
+                <a:ea typeface="Microsoft YaHei"/>
+                <a:cs typeface="Microsoft YaHei"/>
+              </a:rPr>
+              <a:t> 2,625，最高；件均额度 1,449，额度满足率 55.2%</a:t>
             </a:r>
           </a:p>
         </p:txBody>
@@ -12176,7 +12435,7 @@
         <p:spPr>
           <a:xfrm>
             <a:off x="708498" y="5376281"/>
-            <a:ext cx="5065776" cy="594360"/>
+            <a:ext cx="5065776" cy="530915"/>
           </a:xfrm>
           <a:prstGeom prst="rect">
             <a:avLst/>
@@ -12198,7 +12457,7 @@
               </a:spcAft>
             </a:pPr>
             <a:r>
-              <a:rPr sz="800">
+              <a:rPr sz="800" dirty="0" err="1">
                 <a:solidFill>
                   <a:srgbClr val="3D3C3A"/>
                 </a:solidFill>
@@ -12206,7 +12465,18 @@
                 <a:ea typeface="Microsoft YaHei"/>
                 <a:cs typeface="Microsoft YaHei"/>
               </a:rPr>
-              <a:t>总收入 45,568、工资 8,750，均最低</a:t>
+              <a:t>总收入</a:t>
+            </a:r>
+            <a:r>
+              <a:rPr sz="800" dirty="0">
+                <a:solidFill>
+                  <a:srgbClr val="3D3C3A"/>
+                </a:solidFill>
+                <a:latin typeface="Microsoft YaHei"/>
+                <a:ea typeface="Microsoft YaHei"/>
+                <a:cs typeface="Microsoft YaHei"/>
+              </a:rPr>
+              <a:t> 45,568、工资 8,750，均最低</a:t>
             </a:r>
           </a:p>
           <a:p>
@@ -12219,7 +12489,7 @@
               </a:spcAft>
             </a:pPr>
             <a:r>
-              <a:rPr sz="800">
+              <a:rPr sz="800" dirty="0">
                 <a:solidFill>
                   <a:srgbClr val="3D3C3A"/>
                 </a:solidFill>
@@ -12227,7 +12497,29 @@
                 <a:ea typeface="Microsoft YaHei"/>
                 <a:cs typeface="Microsoft YaHei"/>
               </a:rPr>
-              <a:t>Centrelink 占比 22.1%</a:t>
+              <a:t>Centrelink </a:t>
+            </a:r>
+            <a:r>
+              <a:rPr sz="800" dirty="0" err="1">
+                <a:solidFill>
+                  <a:srgbClr val="3D3C3A"/>
+                </a:solidFill>
+                <a:latin typeface="Microsoft YaHei"/>
+                <a:ea typeface="Microsoft YaHei"/>
+                <a:cs typeface="Microsoft YaHei"/>
+              </a:rPr>
+              <a:t>占比</a:t>
+            </a:r>
+            <a:r>
+              <a:rPr sz="800" dirty="0">
+                <a:solidFill>
+                  <a:srgbClr val="3D3C3A"/>
+                </a:solidFill>
+                <a:latin typeface="Microsoft YaHei"/>
+                <a:ea typeface="Microsoft YaHei"/>
+                <a:cs typeface="Microsoft YaHei"/>
+              </a:rPr>
+              <a:t> 22.1%</a:t>
             </a:r>
           </a:p>
           <a:p>
@@ -12240,7 +12532,7 @@
               </a:spcAft>
             </a:pPr>
             <a:r>
-              <a:rPr sz="800">
+              <a:rPr sz="800" dirty="0" err="1">
                 <a:solidFill>
                   <a:srgbClr val="3D3C3A"/>
                 </a:solidFill>
@@ -12248,7 +12540,40 @@
                 <a:ea typeface="Microsoft YaHei"/>
                 <a:cs typeface="Microsoft YaHei"/>
               </a:rPr>
-              <a:t>赌博占比 1.3%、余额波动 std 478.1、余额异常 3.45天，均最低</a:t>
+              <a:t>赌博占比</a:t>
+            </a:r>
+            <a:r>
+              <a:rPr sz="800" dirty="0">
+                <a:solidFill>
+                  <a:srgbClr val="3D3C3A"/>
+                </a:solidFill>
+                <a:latin typeface="Microsoft YaHei"/>
+                <a:ea typeface="Microsoft YaHei"/>
+                <a:cs typeface="Microsoft YaHei"/>
+              </a:rPr>
+              <a:t> 1.3%、</a:t>
+            </a:r>
+            <a:r>
+              <a:rPr sz="800" dirty="0" err="1">
+                <a:solidFill>
+                  <a:srgbClr val="3D3C3A"/>
+                </a:solidFill>
+                <a:latin typeface="Microsoft YaHei"/>
+                <a:ea typeface="Microsoft YaHei"/>
+                <a:cs typeface="Microsoft YaHei"/>
+              </a:rPr>
+              <a:t>余额波动</a:t>
+            </a:r>
+            <a:r>
+              <a:rPr sz="800" dirty="0">
+                <a:solidFill>
+                  <a:srgbClr val="3D3C3A"/>
+                </a:solidFill>
+                <a:latin typeface="Microsoft YaHei"/>
+                <a:ea typeface="Microsoft YaHei"/>
+                <a:cs typeface="Microsoft YaHei"/>
+              </a:rPr>
+              <a:t> std 478.1、余额异常 3.45天，均最低</a:t>
             </a:r>
           </a:p>
           <a:p>
@@ -12261,7 +12586,7 @@
               </a:spcAft>
             </a:pPr>
             <a:r>
-              <a:rPr sz="800">
+              <a:rPr sz="800" dirty="0" err="1">
                 <a:solidFill>
                   <a:srgbClr val="3D3C3A"/>
                 </a:solidFill>
@@ -12269,8 +12594,64 @@
                 <a:ea typeface="Microsoft YaHei"/>
                 <a:cs typeface="Microsoft YaHei"/>
               </a:rPr>
-              <a:t>平均申请仅 1,763、件均 973；通过后成交率 89.86%，最高</a:t>
-            </a:r>
+              <a:t>平均申请仅</a:t>
+            </a:r>
+            <a:r>
+              <a:rPr sz="800" dirty="0">
+                <a:solidFill>
+                  <a:srgbClr val="3D3C3A"/>
+                </a:solidFill>
+                <a:latin typeface="Microsoft YaHei"/>
+                <a:ea typeface="Microsoft YaHei"/>
+                <a:cs typeface="Microsoft YaHei"/>
+              </a:rPr>
+              <a:t> 1,763、件均 973</a:t>
+            </a:r>
+            <a:r>
+              <a:rPr lang="zh-CN" altLang="en-US" sz="800" dirty="0">
+                <a:solidFill>
+                  <a:srgbClr val="3D3C3A"/>
+                </a:solidFill>
+                <a:latin typeface="Microsoft YaHei"/>
+                <a:ea typeface="Microsoft YaHei"/>
+                <a:cs typeface="Microsoft YaHei"/>
+              </a:rPr>
+              <a:t>，额度满足率</a:t>
+            </a:r>
+            <a:r>
+              <a:rPr lang="en-US" altLang="zh-CN" sz="800" dirty="0"/>
+              <a:t>55.2% </a:t>
+            </a:r>
+            <a:r>
+              <a:rPr sz="800" dirty="0">
+                <a:solidFill>
+                  <a:srgbClr val="3D3C3A"/>
+                </a:solidFill>
+                <a:latin typeface="Microsoft YaHei"/>
+                <a:ea typeface="Microsoft YaHei"/>
+                <a:cs typeface="Microsoft YaHei"/>
+              </a:rPr>
+              <a:t>；通过后成交率 89.86%</a:t>
+            </a:r>
+            <a:r>
+              <a:rPr lang="zh-CN" altLang="en-US" sz="800" dirty="0">
+                <a:solidFill>
+                  <a:srgbClr val="3D3C3A"/>
+                </a:solidFill>
+                <a:latin typeface="Microsoft YaHei"/>
+                <a:ea typeface="Microsoft YaHei"/>
+                <a:cs typeface="Microsoft YaHei"/>
+              </a:rPr>
+              <a:t>。</a:t>
+            </a:r>
+            <a:endParaRPr sz="800" dirty="0">
+              <a:solidFill>
+                <a:srgbClr val="3D3C3A"/>
+              </a:solidFill>
+              <a:latin typeface="Microsoft YaHei"/>
+              <a:ea typeface="Microsoft YaHei"/>
+              <a:cs typeface="Microsoft YaHei"/>
+            </a:endParaRPr>
           </a:p>
         </p:txBody>
       </p:sp>
@@ -12289,7 +12670,7 @@
         <p:spPr>
           <a:xfrm>
             <a:off x="6373368" y="5376994"/>
-            <a:ext cx="5065776" cy="594360"/>
+            <a:ext cx="5065776" cy="394980"/>
           </a:xfrm>
           <a:prstGeom prst="rect">
             <a:avLst/>
@@ -12311,7 +12692,7 @@
               </a:spcAft>
             </a:pPr>
             <a:r>
-              <a:rPr sz="800">
+              <a:rPr sz="800" dirty="0" err="1">
                 <a:solidFill>
                   <a:srgbClr val="3D3C3A"/>
                 </a:solidFill>
@@ -12319,8 +12700,38 @@
                 <a:ea typeface="Microsoft YaHei"/>
                 <a:cs typeface="Microsoft YaHei"/>
               </a:rPr>
-              <a:t>平均申请 1,678、件均额度仅 760，额度覆盖率约 45.3%，均最低</a:t>
-            </a:r>
+              <a:t>平均申请</a:t>
+            </a:r>
+            <a:r>
+              <a:rPr sz="800" dirty="0">
+                <a:solidFill>
+                  <a:srgbClr val="3D3C3A"/>
+                </a:solidFill>
+                <a:latin typeface="Microsoft YaHei"/>
+                <a:ea typeface="Microsoft YaHei"/>
+                <a:cs typeface="Microsoft YaHei"/>
+              </a:rPr>
+              <a:t> 1,678、件均额度仅 760，额度覆盖率约 45.3%，</a:t>
+            </a:r>
+            <a:r>
+              <a:rPr sz="800" dirty="0" err="1">
+                <a:solidFill>
+                  <a:srgbClr val="3D3C3A"/>
+                </a:solidFill>
+                <a:latin typeface="Microsoft YaHei"/>
+                <a:ea typeface="Microsoft YaHei"/>
+                <a:cs typeface="Microsoft YaHei"/>
+              </a:rPr>
+              <a:t>均最低</a:t>
+            </a:r>
+            <a:endParaRPr sz="800" dirty="0">
+              <a:solidFill>
+                <a:srgbClr val="3D3C3A"/>
+              </a:solidFill>
+              <a:latin typeface="Microsoft YaHei"/>
+              <a:ea typeface="Microsoft YaHei"/>
+              <a:cs typeface="Microsoft YaHei"/>
+            </a:endParaRPr>
           </a:p>
           <a:p>
             <a:pPr algn="l">
@@ -12332,7 +12743,7 @@
               </a:spcAft>
             </a:pPr>
             <a:r>
-              <a:rPr sz="800">
+              <a:rPr sz="800" dirty="0" err="1">
                 <a:solidFill>
                   <a:srgbClr val="3D3C3A"/>
                 </a:solidFill>
@@ -12340,20 +12751,28 @@
                 <a:ea typeface="Microsoft YaHei"/>
                 <a:cs typeface="Microsoft YaHei"/>
               </a:rPr>
-              <a:t>发薪周期 std 4.01、余额异常 5.22天，均最高</a:t>
-            </a:r>
-          </a:p>
-          <a:p>
-            <a:pPr algn="l">
-              <a:lnSpc>
-                <a:spcPct val="100000"/>
-              </a:lnSpc>
+              <a:t>发薪周期</a:t>
+            </a:r>
+            <a:r>
+              <a:rPr sz="800" dirty="0">
+                <a:solidFill>
+                  <a:srgbClr val="3D3C3A"/>
+                </a:solidFill>
+                <a:latin typeface="Microsoft YaHei"/>
+                <a:ea typeface="Microsoft YaHei"/>
+                <a:cs typeface="Microsoft YaHei"/>
+              </a:rPr>
+              <a:t> std 4.01、余额异常 5.22天，均最高</a:t>
+            </a:r>
+          </a:p>
+          <a:p>
+            <a:pPr>
               <a:spcAft>
                 <a:spcPts val="100"/>
               </a:spcAft>
             </a:pPr>
             <a:r>
-              <a:rPr sz="800">
+              <a:rPr sz="800" dirty="0" err="1">
                 <a:solidFill>
                   <a:srgbClr val="3D3C3A"/>
                 </a:solidFill>
@@ -12361,20 +12780,10 @@
                 <a:ea typeface="Microsoft YaHei"/>
                 <a:cs typeface="Microsoft YaHei"/>
               </a:rPr>
-              <a:t>还款 4,133元 / 10.8次，均低于“价值差×风险好”与“价值好×风险好”</a:t>
-            </a:r>
-          </a:p>
-          <a:p>
-            <a:pPr algn="l">
-              <a:lnSpc>
-                <a:spcPct val="100000"/>
-              </a:lnSpc>
-              <a:spcAft>
-                <a:spcPts val="100"/>
-              </a:spcAft>
-            </a:pPr>
-            <a:r>
-              <a:rPr sz="800">
+              <a:t>还款</a:t>
+            </a:r>
+            <a:r>
+              <a:rPr sz="800" dirty="0">
                 <a:solidFill>
                   <a:srgbClr val="3D3C3A"/>
                 </a:solidFill>
@@ -12382,7 +12791,52 @@
                 <a:ea typeface="Microsoft YaHei"/>
                 <a:cs typeface="Microsoft YaHei"/>
               </a:rPr>
-              <a:t>3M30人数逾期率 27.05%</a:t>
+              <a:t> 4,133元 / 10.8次，均低于“</a:t>
+            </a:r>
+            <a:r>
+              <a:rPr kumimoji="0" lang="zh-CN" altLang="en-US" sz="800" b="1" i="0" u="none" strike="noStrike" kern="1200" cap="none" spc="0" normalizeH="0" baseline="0" noProof="0" dirty="0">
+                <a:ln>
+                  <a:noFill/>
+                </a:ln>
+                <a:solidFill>
+                  <a:srgbClr val="1B5380"/>
+                </a:solidFill>
+                <a:effectLst/>
+                <a:uLnTx/>
+                <a:uFillTx/>
+                <a:latin typeface="Microsoft YaHei"/>
+                <a:ea typeface="+mn-ea"/>
+                <a:cs typeface="+mn-cs"/>
+              </a:rPr>
+              <a:t>低收入克制型刚需客</a:t>
+            </a:r>
+            <a:r>
+              <a:rPr sz="800" dirty="0">
+                <a:solidFill>
+                  <a:srgbClr val="3D3C3A"/>
+                </a:solidFill>
+                <a:latin typeface="Microsoft YaHei"/>
+                <a:ea typeface="Microsoft YaHei"/>
+                <a:cs typeface="Microsoft YaHei"/>
+              </a:rPr>
+              <a:t>”与“</a:t>
+            </a:r>
+            <a:r>
+              <a:rPr kumimoji="0" lang="zh-CN" altLang="en-US" sz="800" b="1" i="0" u="none" strike="noStrike" kern="1200" cap="none" spc="0" normalizeH="0" baseline="0" noProof="0" dirty="0">
+                <a:ln>
+                  <a:noFill/>
+                </a:ln>
+                <a:solidFill>
+                  <a:srgbClr val="268343"/>
+                </a:solidFill>
+                <a:effectLst/>
+                <a:uLnTx/>
+                <a:uFillTx/>
+                <a:latin typeface="Microsoft YaHei"/>
+                <a:ea typeface="+mn-ea"/>
+                <a:cs typeface="+mn-cs"/>
+              </a:rPr>
+              <a:t>稳健经营型优质客</a:t>
             </a:r>
           </a:p>
         </p:txBody>

--- a/四类客群矩阵.pptx
+++ b/四类客群矩阵.pptx
@@ -10,6 +10,7 @@
   </p:notesMasterIdLst>
   <p:sldIdLst>
     <p:sldId id="292" r:id="rId3"/>
+    <p:sldId id="293" r:id="rId9"/>
   </p:sldIdLst>
   <p:sldSz cx="12192000" cy="6858000"/>
   <p:notesSz cx="6858000" cy="9144000"/>
@@ -23209,6 +23210,2580 @@
         <p14:creationId xmlns:p14="http://schemas.microsoft.com/office/powerpoint/2010/main" val="2286103815"/>
       </p:ext>
     </p:extLst>
+  </p:cSld>
+  <p:clrMapOvr>
+    <a:masterClrMapping/>
+  </p:clrMapOvr>
+</p:sld>
+</file>
+
+<file path=ppt/slides/slide2.xml><?xml version="1.0" encoding="utf-8"?>
+<p:sld xmlns:a="http://schemas.openxmlformats.org/drawingml/2006/main" xmlns:p="http://schemas.openxmlformats.org/presentationml/2006/main" xmlns:r="http://schemas.openxmlformats.org/officeDocument/2006/relationships">
+  <p:cSld>
+    <p:spTree>
+      <p:nvGrpSpPr>
+        <p:cNvPr id="1" name=""/>
+        <p:cNvGrpSpPr/>
+        <p:nvPr/>
+      </p:nvGrpSpPr>
+      <p:grpSpPr/>
+      <p:sp>
+        <p:nvSpPr>
+          <p:cNvPr id="2" name="TextBox 1"/>
+          <p:cNvSpPr txBox="1"/>
+          <p:nvPr/>
+        </p:nvSpPr>
+        <p:spPr>
+          <a:xfrm>
+            <a:off x="640080" y="256032"/>
+            <a:ext cx="2377440" cy="292608"/>
+          </a:xfrm>
+          <a:prstGeom prst="rect">
+            <a:avLst/>
+          </a:prstGeom>
+          <a:noFill/>
+        </p:spPr>
+        <p:txBody>
+          <a:bodyPr wrap="square" lIns="0" rIns="0" tIns="0" bIns="0" anchor="t">
+            <a:spAutoFit/>
+          </a:bodyPr>
+          <a:lstStyle/>
+          <a:p>
+            <a:r>
+              <a:rPr sz="1850" b="1">
+                <a:solidFill>
+                  <a:srgbClr val="1F3A5B"/>
+                </a:solidFill>
+                <a:latin typeface="微软雅黑"/>
+                <a:ea typeface="微软雅黑"/>
+              </a:rPr>
+              <a:t>价值好与风险好的区别</a:t>
+            </a:r>
+          </a:p>
+        </p:txBody>
+      </p:sp>
+      <p:sp>
+        <p:nvSpPr>
+          <p:cNvPr id="3" name="TextBox 2"/>
+          <p:cNvSpPr txBox="1"/>
+          <p:nvPr/>
+        </p:nvSpPr>
+        <p:spPr>
+          <a:xfrm>
+            <a:off x="640080" y="566928"/>
+            <a:ext cx="10881360" cy="310896"/>
+          </a:xfrm>
+          <a:prstGeom prst="rect">
+            <a:avLst/>
+          </a:prstGeom>
+          <a:noFill/>
+        </p:spPr>
+        <p:txBody>
+          <a:bodyPr wrap="square" lIns="0" rIns="0" tIns="0" bIns="0" anchor="t">
+            <a:spAutoFit/>
+          </a:bodyPr>
+          <a:lstStyle/>
+          <a:p>
+            <a:r>
+              <a:rPr sz="1800" b="0">
+                <a:solidFill>
+                  <a:srgbClr val="606060"/>
+                </a:solidFill>
+                <a:latin typeface="微软雅黑"/>
+                <a:ea typeface="微软雅黑"/>
+              </a:rPr>
+              <a:t>两种“好”来自不同维度:风险好=支出与行为,价值好=收入与现金流</a:t>
+            </a:r>
+          </a:p>
+        </p:txBody>
+      </p:sp>
+      <p:sp>
+        <p:nvSpPr>
+          <p:cNvPr id="4" name="Rectangle 3"/>
+          <p:cNvSpPr/>
+          <p:nvPr/>
+        </p:nvSpPr>
+        <p:spPr>
+          <a:xfrm>
+            <a:off x="512064" y="969264"/>
+            <a:ext cx="11164824" cy="10972"/>
+          </a:xfrm>
+          <a:prstGeom prst="rect">
+            <a:avLst/>
+          </a:prstGeom>
+          <a:solidFill>
+            <a:srgbClr val="D6D6D6"/>
+          </a:solidFill>
+          <a:ln>
+            <a:noFill/>
+          </a:ln>
+          <a:effectLst/>
+        </p:spPr>
+        <p:style>
+          <a:lnRef idx="1">
+            <a:schemeClr val="accent1"/>
+          </a:lnRef>
+          <a:fillRef idx="3">
+            <a:schemeClr val="accent1"/>
+          </a:fillRef>
+          <a:effectRef idx="2">
+            <a:schemeClr val="accent1"/>
+          </a:effectRef>
+          <a:fontRef idx="minor">
+            <a:schemeClr val="lt1"/>
+          </a:fontRef>
+        </p:style>
+        <p:txBody>
+          <a:bodyPr rtlCol="0" anchor="ctr"/>
+          <a:lstStyle/>
+          <a:p>
+            <a:pPr algn="ctr"/>
+          </a:p>
+        </p:txBody>
+      </p:sp>
+      <p:sp>
+        <p:nvSpPr>
+          <p:cNvPr id="5" name="Rounded Rectangle 4"/>
+          <p:cNvSpPr/>
+          <p:nvPr/>
+        </p:nvSpPr>
+        <p:spPr>
+          <a:xfrm>
+            <a:off x="512064" y="1097280"/>
+            <a:ext cx="5413248" cy="4617720"/>
+          </a:xfrm>
+          <a:prstGeom prst="roundRect">
+            <a:avLst>
+              <a:gd name="adj" fmla="val 3000"/>
+            </a:avLst>
+          </a:prstGeom>
+          <a:solidFill>
+            <a:srgbClr val="FFFFFF"/>
+          </a:solidFill>
+          <a:ln w="19050">
+            <a:solidFill>
+              <a:srgbClr val="D6D6D6"/>
+            </a:solidFill>
+          </a:ln>
+          <a:effectLst/>
+        </p:spPr>
+        <p:style>
+          <a:lnRef idx="1">
+            <a:schemeClr val="accent1"/>
+          </a:lnRef>
+          <a:fillRef idx="3">
+            <a:schemeClr val="accent1"/>
+          </a:fillRef>
+          <a:effectRef idx="2">
+            <a:schemeClr val="accent1"/>
+          </a:effectRef>
+          <a:fontRef idx="minor">
+            <a:schemeClr val="lt1"/>
+          </a:fontRef>
+        </p:style>
+        <p:txBody>
+          <a:bodyPr rtlCol="0" anchor="ctr"/>
+          <a:lstStyle/>
+          <a:p>
+            <a:pPr algn="ctr"/>
+          </a:p>
+        </p:txBody>
+      </p:sp>
+      <p:sp>
+        <p:nvSpPr>
+          <p:cNvPr id="6" name="Rectangle 5"/>
+          <p:cNvSpPr/>
+          <p:nvPr/>
+        </p:nvSpPr>
+        <p:spPr>
+          <a:xfrm>
+            <a:off x="539496" y="1124712"/>
+            <a:ext cx="5358384" cy="54864"/>
+          </a:xfrm>
+          <a:prstGeom prst="rect">
+            <a:avLst/>
+          </a:prstGeom>
+          <a:solidFill>
+            <a:srgbClr val="D6A000"/>
+          </a:solidFill>
+          <a:ln>
+            <a:noFill/>
+          </a:ln>
+          <a:effectLst/>
+        </p:spPr>
+        <p:style>
+          <a:lnRef idx="1">
+            <a:schemeClr val="accent1"/>
+          </a:lnRef>
+          <a:fillRef idx="3">
+            <a:schemeClr val="accent1"/>
+          </a:fillRef>
+          <a:effectRef idx="2">
+            <a:schemeClr val="accent1"/>
+          </a:effectRef>
+          <a:fontRef idx="minor">
+            <a:schemeClr val="lt1"/>
+          </a:fontRef>
+        </p:style>
+        <p:txBody>
+          <a:bodyPr rtlCol="0" anchor="ctr"/>
+          <a:lstStyle/>
+          <a:p>
+            <a:pPr algn="ctr"/>
+          </a:p>
+        </p:txBody>
+      </p:sp>
+      <p:sp>
+        <p:nvSpPr>
+          <p:cNvPr id="7" name="TextBox 6"/>
+          <p:cNvSpPr txBox="1"/>
+          <p:nvPr/>
+        </p:nvSpPr>
+        <p:spPr>
+          <a:xfrm>
+            <a:off x="658368" y="1207007"/>
+            <a:ext cx="3108960" cy="292608"/>
+          </a:xfrm>
+          <a:prstGeom prst="rect">
+            <a:avLst/>
+          </a:prstGeom>
+          <a:noFill/>
+        </p:spPr>
+        <p:txBody>
+          <a:bodyPr wrap="square" lIns="0" rIns="0" tIns="0" bIns="0" anchor="ctr">
+            <a:spAutoFit/>
+          </a:bodyPr>
+          <a:lstStyle/>
+          <a:p>
+            <a:r>
+              <a:rPr sz="1400" b="1">
+                <a:solidFill>
+                  <a:srgbClr val="B57900"/>
+                </a:solidFill>
+                <a:latin typeface="微软雅黑"/>
+                <a:ea typeface="微软雅黑"/>
+              </a:rPr>
+              <a:t>风险好人群画像</a:t>
+            </a:r>
+          </a:p>
+        </p:txBody>
+      </p:sp>
+      <p:sp>
+        <p:nvSpPr>
+          <p:cNvPr id="8" name="Rounded Rectangle 7"/>
+          <p:cNvSpPr/>
+          <p:nvPr/>
+        </p:nvSpPr>
+        <p:spPr>
+          <a:xfrm>
+            <a:off x="3927348" y="1225295"/>
+            <a:ext cx="1869948" cy="237744"/>
+          </a:xfrm>
+          <a:prstGeom prst="roundRect">
+            <a:avLst>
+              <a:gd name="adj" fmla="val 50000"/>
+            </a:avLst>
+          </a:prstGeom>
+          <a:solidFill>
+            <a:srgbClr val="FAF3E0"/>
+          </a:solidFill>
+          <a:ln w="12700">
+            <a:solidFill>
+              <a:srgbClr val="D6A000"/>
+            </a:solidFill>
+          </a:ln>
+          <a:effectLst/>
+        </p:spPr>
+        <p:style>
+          <a:lnRef idx="1">
+            <a:schemeClr val="accent1"/>
+          </a:lnRef>
+          <a:fillRef idx="3">
+            <a:schemeClr val="accent1"/>
+          </a:fillRef>
+          <a:effectRef idx="2">
+            <a:schemeClr val="accent1"/>
+          </a:effectRef>
+          <a:fontRef idx="minor">
+            <a:schemeClr val="lt1"/>
+          </a:fontRef>
+        </p:style>
+        <p:txBody>
+          <a:bodyPr rtlCol="0" anchor="ctr" wrap="none" lIns="45720" rIns="45720" tIns="18288" bIns="18288"/>
+          <a:lstStyle/>
+          <a:p>
+            <a:pPr algn="ctr"/>
+            <a:r>
+              <a:rPr sz="900" b="1">
+                <a:solidFill>
+                  <a:srgbClr val="1F4E79"/>
+                </a:solidFill>
+                <a:latin typeface="微软雅黑"/>
+                <a:ea typeface="微软雅黑"/>
+              </a:rPr>
+              <a:t>低支出 · 低波动 · 还款更可控</a:t>
+            </a:r>
+          </a:p>
+        </p:txBody>
+      </p:sp>
+      <p:sp>
+        <p:nvSpPr>
+          <p:cNvPr id="9" name="Rectangle 8"/>
+          <p:cNvSpPr/>
+          <p:nvPr/>
+        </p:nvSpPr>
+        <p:spPr>
+          <a:xfrm>
+            <a:off x="658368" y="1627631"/>
+            <a:ext cx="64008" cy="182880"/>
+          </a:xfrm>
+          <a:prstGeom prst="rect">
+            <a:avLst/>
+          </a:prstGeom>
+          <a:solidFill>
+            <a:srgbClr val="D6A000"/>
+          </a:solidFill>
+          <a:ln>
+            <a:noFill/>
+          </a:ln>
+          <a:effectLst/>
+        </p:spPr>
+        <p:style>
+          <a:lnRef idx="1">
+            <a:schemeClr val="accent1"/>
+          </a:lnRef>
+          <a:fillRef idx="3">
+            <a:schemeClr val="accent1"/>
+          </a:fillRef>
+          <a:effectRef idx="2">
+            <a:schemeClr val="accent1"/>
+          </a:effectRef>
+          <a:fontRef idx="minor">
+            <a:schemeClr val="lt1"/>
+          </a:fontRef>
+        </p:style>
+        <p:txBody>
+          <a:bodyPr rtlCol="0" anchor="ctr"/>
+          <a:lstStyle/>
+          <a:p>
+            <a:pPr algn="ctr"/>
+          </a:p>
+        </p:txBody>
+      </p:sp>
+      <p:sp>
+        <p:nvSpPr>
+          <p:cNvPr id="10" name="TextBox 9"/>
+          <p:cNvSpPr txBox="1"/>
+          <p:nvPr/>
+        </p:nvSpPr>
+        <p:spPr>
+          <a:xfrm>
+            <a:off x="768096" y="1609343"/>
+            <a:ext cx="5029200" cy="219456"/>
+          </a:xfrm>
+          <a:prstGeom prst="rect">
+            <a:avLst/>
+          </a:prstGeom>
+          <a:noFill/>
+        </p:spPr>
+        <p:txBody>
+          <a:bodyPr wrap="square" lIns="0" rIns="0" tIns="0" bIns="0" anchor="t">
+            <a:spAutoFit/>
+          </a:bodyPr>
+          <a:lstStyle/>
+          <a:p>
+            <a:r>
+              <a:rPr sz="1000" b="1">
+                <a:solidFill>
+                  <a:srgbClr val="1F4E79"/>
+                </a:solidFill>
+                <a:latin typeface="微软雅黑"/>
+                <a:ea typeface="微软雅黑"/>
+              </a:rPr>
+              <a:t>收入端</a:t>
+            </a:r>
+          </a:p>
+        </p:txBody>
+      </p:sp>
+      <p:sp>
+        <p:nvSpPr>
+          <p:cNvPr id="11" name="TextBox 10"/>
+          <p:cNvSpPr txBox="1"/>
+          <p:nvPr/>
+        </p:nvSpPr>
+        <p:spPr>
+          <a:xfrm>
+            <a:off x="658368" y="1920239"/>
+            <a:ext cx="5138928" cy="219456"/>
+          </a:xfrm>
+          <a:prstGeom prst="rect">
+            <a:avLst/>
+          </a:prstGeom>
+          <a:noFill/>
+        </p:spPr>
+        <p:txBody>
+          <a:bodyPr wrap="square" lIns="0" rIns="0" tIns="0" bIns="0" anchor="ctr">
+            <a:spAutoFit/>
+          </a:bodyPr>
+          <a:lstStyle/>
+          <a:p>
+            <a:pPr>
+              <a:lnSpc>
+                <a:spcPct val="100000"/>
+              </a:lnSpc>
+            </a:pPr>
+            <a:r>
+              <a:rPr sz="1000" b="1">
+                <a:solidFill>
+                  <a:srgbClr val="0A0A0A"/>
+                </a:solidFill>
+                <a:latin typeface="微软雅黑"/>
+                <a:ea typeface="微软雅黑"/>
+              </a:rPr>
+              <a:t>总收入金额</a:t>
+            </a:r>
+            <a:r>
+              <a:rPr sz="1000" b="1">
+                <a:solidFill>
+                  <a:srgbClr val="0A0A0A"/>
+                </a:solidFill>
+                <a:latin typeface="微软雅黑"/>
+                <a:ea typeface="微软雅黑"/>
+              </a:rPr>
+              <a:t>  </a:t>
+            </a:r>
+            <a:r>
+              <a:rPr sz="800" b="0">
+                <a:solidFill>
+                  <a:srgbClr val="606060"/>
+                </a:solidFill>
+                <a:latin typeface="微软雅黑"/>
+                <a:ea typeface="微软雅黑"/>
+              </a:rPr>
+              <a:t>70,151</a:t>
+            </a:r>
+            <a:r>
+              <a:rPr sz="800" b="0">
+                <a:solidFill>
+                  <a:srgbClr val="606060"/>
+                </a:solidFill>
+                <a:latin typeface="微软雅黑"/>
+                <a:ea typeface="微软雅黑"/>
+              </a:rPr>
+              <a:t>  </a:t>
+            </a:r>
+            <a:r>
+              <a:rPr sz="700" b="0">
+                <a:solidFill>
+                  <a:srgbClr val="8A8A8A"/>
+                </a:solidFill>
+                <a:latin typeface="微软雅黑"/>
+                <a:ea typeface="微软雅黑"/>
+              </a:rPr>
+              <a:t>风险差 129,605</a:t>
+            </a:r>
+          </a:p>
+        </p:txBody>
+      </p:sp>
+      <p:sp>
+        <p:nvSpPr>
+          <p:cNvPr id="12" name="TextBox 11"/>
+          <p:cNvSpPr txBox="1"/>
+          <p:nvPr/>
+        </p:nvSpPr>
+        <p:spPr>
+          <a:xfrm>
+            <a:off x="658368" y="2249424"/>
+            <a:ext cx="5138928" cy="219456"/>
+          </a:xfrm>
+          <a:prstGeom prst="rect">
+            <a:avLst/>
+          </a:prstGeom>
+          <a:noFill/>
+        </p:spPr>
+        <p:txBody>
+          <a:bodyPr wrap="square" lIns="0" rIns="0" tIns="0" bIns="0" anchor="ctr">
+            <a:spAutoFit/>
+          </a:bodyPr>
+          <a:lstStyle/>
+          <a:p>
+            <a:pPr>
+              <a:lnSpc>
+                <a:spcPct val="100000"/>
+              </a:lnSpc>
+            </a:pPr>
+            <a:r>
+              <a:rPr sz="1000" b="1">
+                <a:solidFill>
+                  <a:srgbClr val="0A0A0A"/>
+                </a:solidFill>
+                <a:latin typeface="微软雅黑"/>
+                <a:ea typeface="微软雅黑"/>
+              </a:rPr>
+              <a:t>工资收入总额</a:t>
+            </a:r>
+            <a:r>
+              <a:rPr sz="1000" b="1">
+                <a:solidFill>
+                  <a:srgbClr val="0A0A0A"/>
+                </a:solidFill>
+                <a:latin typeface="微软雅黑"/>
+                <a:ea typeface="微软雅黑"/>
+              </a:rPr>
+              <a:t>  </a:t>
+            </a:r>
+            <a:r>
+              <a:rPr sz="800" b="0">
+                <a:solidFill>
+                  <a:srgbClr val="606060"/>
+                </a:solidFill>
+                <a:latin typeface="微软雅黑"/>
+                <a:ea typeface="微软雅黑"/>
+              </a:rPr>
+              <a:t>20,922</a:t>
+            </a:r>
+            <a:r>
+              <a:rPr sz="800" b="0">
+                <a:solidFill>
+                  <a:srgbClr val="606060"/>
+                </a:solidFill>
+                <a:latin typeface="微软雅黑"/>
+                <a:ea typeface="微软雅黑"/>
+              </a:rPr>
+              <a:t>  </a:t>
+            </a:r>
+            <a:r>
+              <a:rPr sz="700" b="0">
+                <a:solidFill>
+                  <a:srgbClr val="8A8A8A"/>
+                </a:solidFill>
+                <a:latin typeface="微软雅黑"/>
+                <a:ea typeface="微软雅黑"/>
+              </a:rPr>
+              <a:t>风险差 30,752</a:t>
+            </a:r>
+          </a:p>
+        </p:txBody>
+      </p:sp>
+      <p:sp>
+        <p:nvSpPr>
+          <p:cNvPr id="13" name="TextBox 12"/>
+          <p:cNvSpPr txBox="1"/>
+          <p:nvPr/>
+        </p:nvSpPr>
+        <p:spPr>
+          <a:xfrm>
+            <a:off x="658368" y="2578608"/>
+            <a:ext cx="5138928" cy="219456"/>
+          </a:xfrm>
+          <a:prstGeom prst="rect">
+            <a:avLst/>
+          </a:prstGeom>
+          <a:noFill/>
+        </p:spPr>
+        <p:txBody>
+          <a:bodyPr wrap="square" lIns="0" rIns="0" tIns="0" bIns="0" anchor="ctr">
+            <a:spAutoFit/>
+          </a:bodyPr>
+          <a:lstStyle/>
+          <a:p>
+            <a:pPr>
+              <a:lnSpc>
+                <a:spcPct val="100000"/>
+              </a:lnSpc>
+            </a:pPr>
+            <a:r>
+              <a:rPr sz="1000" b="1">
+                <a:solidFill>
+                  <a:srgbClr val="0A0A0A"/>
+                </a:solidFill>
+                <a:latin typeface="微软雅黑"/>
+                <a:ea typeface="微软雅黑"/>
+              </a:rPr>
+              <a:t>Centrelink收入占比</a:t>
+            </a:r>
+            <a:r>
+              <a:rPr sz="1000" b="1">
+                <a:solidFill>
+                  <a:srgbClr val="0A0A0A"/>
+                </a:solidFill>
+                <a:latin typeface="微软雅黑"/>
+                <a:ea typeface="微软雅黑"/>
+              </a:rPr>
+              <a:t>  </a:t>
+            </a:r>
+            <a:r>
+              <a:rPr sz="800" b="0">
+                <a:solidFill>
+                  <a:srgbClr val="606060"/>
+                </a:solidFill>
+                <a:latin typeface="微软雅黑"/>
+                <a:ea typeface="微软雅黑"/>
+              </a:rPr>
+              <a:t>10.2%</a:t>
+            </a:r>
+            <a:r>
+              <a:rPr sz="800" b="0">
+                <a:solidFill>
+                  <a:srgbClr val="606060"/>
+                </a:solidFill>
+                <a:latin typeface="微软雅黑"/>
+                <a:ea typeface="微软雅黑"/>
+              </a:rPr>
+              <a:t>  </a:t>
+            </a:r>
+            <a:r>
+              <a:rPr sz="700" b="0">
+                <a:solidFill>
+                  <a:srgbClr val="8A8A8A"/>
+                </a:solidFill>
+                <a:latin typeface="微软雅黑"/>
+                <a:ea typeface="微软雅黑"/>
+              </a:rPr>
+              <a:t>风险差 3.1%</a:t>
+            </a:r>
+          </a:p>
+        </p:txBody>
+      </p:sp>
+      <p:sp>
+        <p:nvSpPr>
+          <p:cNvPr id="14" name="TextBox 13"/>
+          <p:cNvSpPr txBox="1"/>
+          <p:nvPr/>
+        </p:nvSpPr>
+        <p:spPr>
+          <a:xfrm>
+            <a:off x="658368" y="2907791"/>
+            <a:ext cx="5138928" cy="219456"/>
+          </a:xfrm>
+          <a:prstGeom prst="rect">
+            <a:avLst/>
+          </a:prstGeom>
+          <a:noFill/>
+        </p:spPr>
+        <p:txBody>
+          <a:bodyPr wrap="square" lIns="0" rIns="0" tIns="0" bIns="0" anchor="ctr">
+            <a:spAutoFit/>
+          </a:bodyPr>
+          <a:lstStyle/>
+          <a:p>
+            <a:pPr>
+              <a:lnSpc>
+                <a:spcPct val="100000"/>
+              </a:lnSpc>
+            </a:pPr>
+            <a:r>
+              <a:rPr sz="1000" b="1">
+                <a:solidFill>
+                  <a:srgbClr val="0A0A0A"/>
+                </a:solidFill>
+                <a:latin typeface="微软雅黑"/>
+                <a:ea typeface="微软雅黑"/>
+              </a:rPr>
+              <a:t>发薪周期std</a:t>
+            </a:r>
+            <a:r>
+              <a:rPr sz="1000" b="1">
+                <a:solidFill>
+                  <a:srgbClr val="0A0A0A"/>
+                </a:solidFill>
+                <a:latin typeface="微软雅黑"/>
+                <a:ea typeface="微软雅黑"/>
+              </a:rPr>
+              <a:t>  </a:t>
+            </a:r>
+            <a:r>
+              <a:rPr sz="800" b="0">
+                <a:solidFill>
+                  <a:srgbClr val="606060"/>
+                </a:solidFill>
+                <a:latin typeface="微软雅黑"/>
+                <a:ea typeface="微软雅黑"/>
+              </a:rPr>
+              <a:t>2.99</a:t>
+            </a:r>
+            <a:r>
+              <a:rPr sz="800" b="0">
+                <a:solidFill>
+                  <a:srgbClr val="606060"/>
+                </a:solidFill>
+                <a:latin typeface="微软雅黑"/>
+                <a:ea typeface="微软雅黑"/>
+              </a:rPr>
+              <a:t>  </a:t>
+            </a:r>
+            <a:r>
+              <a:rPr sz="700" b="0">
+                <a:solidFill>
+                  <a:srgbClr val="8A8A8A"/>
+                </a:solidFill>
+                <a:latin typeface="微软雅黑"/>
+                <a:ea typeface="微软雅黑"/>
+              </a:rPr>
+              <a:t>风险差 3.35</a:t>
+            </a:r>
+          </a:p>
+        </p:txBody>
+      </p:sp>
+      <p:sp>
+        <p:nvSpPr>
+          <p:cNvPr id="15" name="Rectangle 14"/>
+          <p:cNvSpPr/>
+          <p:nvPr/>
+        </p:nvSpPr>
+        <p:spPr>
+          <a:xfrm>
+            <a:off x="658368" y="3383280"/>
+            <a:ext cx="64008" cy="182880"/>
+          </a:xfrm>
+          <a:prstGeom prst="rect">
+            <a:avLst/>
+          </a:prstGeom>
+          <a:solidFill>
+            <a:srgbClr val="D6A000"/>
+          </a:solidFill>
+          <a:ln>
+            <a:noFill/>
+          </a:ln>
+          <a:effectLst/>
+        </p:spPr>
+        <p:style>
+          <a:lnRef idx="1">
+            <a:schemeClr val="accent1"/>
+          </a:lnRef>
+          <a:fillRef idx="3">
+            <a:schemeClr val="accent1"/>
+          </a:fillRef>
+          <a:effectRef idx="2">
+            <a:schemeClr val="accent1"/>
+          </a:effectRef>
+          <a:fontRef idx="minor">
+            <a:schemeClr val="lt1"/>
+          </a:fontRef>
+        </p:style>
+        <p:txBody>
+          <a:bodyPr rtlCol="0" anchor="ctr"/>
+          <a:lstStyle/>
+          <a:p>
+            <a:pPr algn="ctr"/>
+          </a:p>
+        </p:txBody>
+      </p:sp>
+      <p:sp>
+        <p:nvSpPr>
+          <p:cNvPr id="16" name="TextBox 15"/>
+          <p:cNvSpPr txBox="1"/>
+          <p:nvPr/>
+        </p:nvSpPr>
+        <p:spPr>
+          <a:xfrm>
+            <a:off x="768096" y="3364992"/>
+            <a:ext cx="5029200" cy="219456"/>
+          </a:xfrm>
+          <a:prstGeom prst="rect">
+            <a:avLst/>
+          </a:prstGeom>
+          <a:noFill/>
+        </p:spPr>
+        <p:txBody>
+          <a:bodyPr wrap="square" lIns="0" rIns="0" tIns="0" bIns="0" anchor="t">
+            <a:spAutoFit/>
+          </a:bodyPr>
+          <a:lstStyle/>
+          <a:p>
+            <a:r>
+              <a:rPr sz="1000" b="1">
+                <a:solidFill>
+                  <a:srgbClr val="1F4E79"/>
+                </a:solidFill>
+                <a:latin typeface="微软雅黑"/>
+                <a:ea typeface="微软雅黑"/>
+              </a:rPr>
+              <a:t>行为端</a:t>
+            </a:r>
+          </a:p>
+        </p:txBody>
+      </p:sp>
+      <p:sp>
+        <p:nvSpPr>
+          <p:cNvPr id="17" name="TextBox 16"/>
+          <p:cNvSpPr txBox="1"/>
+          <p:nvPr/>
+        </p:nvSpPr>
+        <p:spPr>
+          <a:xfrm>
+            <a:off x="658368" y="3675887"/>
+            <a:ext cx="5138928" cy="219456"/>
+          </a:xfrm>
+          <a:prstGeom prst="rect">
+            <a:avLst/>
+          </a:prstGeom>
+          <a:noFill/>
+        </p:spPr>
+        <p:txBody>
+          <a:bodyPr wrap="square" lIns="0" rIns="0" tIns="0" bIns="0" anchor="ctr">
+            <a:spAutoFit/>
+          </a:bodyPr>
+          <a:lstStyle/>
+          <a:p>
+            <a:pPr>
+              <a:lnSpc>
+                <a:spcPct val="100000"/>
+              </a:lnSpc>
+            </a:pPr>
+            <a:r>
+              <a:rPr sz="1000" b="1">
+                <a:solidFill>
+                  <a:srgbClr val="0A0A0A"/>
+                </a:solidFill>
+                <a:latin typeface="微软雅黑"/>
+                <a:ea typeface="微软雅黑"/>
+              </a:rPr>
+              <a:t>总支出金额</a:t>
+            </a:r>
+            <a:r>
+              <a:rPr sz="1000" b="1">
+                <a:solidFill>
+                  <a:srgbClr val="0A0A0A"/>
+                </a:solidFill>
+                <a:latin typeface="微软雅黑"/>
+                <a:ea typeface="微软雅黑"/>
+              </a:rPr>
+              <a:t>  </a:t>
+            </a:r>
+            <a:r>
+              <a:rPr sz="800" b="1">
+                <a:solidFill>
+                  <a:srgbClr val="D6A000"/>
+                </a:solidFill>
+                <a:latin typeface="微软雅黑"/>
+                <a:ea typeface="微软雅黑"/>
+              </a:rPr>
+              <a:t>66,684</a:t>
+            </a:r>
+            <a:r>
+              <a:rPr sz="800" b="1">
+                <a:solidFill>
+                  <a:srgbClr val="D6A000"/>
+                </a:solidFill>
+                <a:latin typeface="微软雅黑"/>
+                <a:ea typeface="微软雅黑"/>
+              </a:rPr>
+              <a:t>  </a:t>
+            </a:r>
+            <a:r>
+              <a:rPr sz="700" b="0">
+                <a:solidFill>
+                  <a:srgbClr val="8A8A8A"/>
+                </a:solidFill>
+                <a:latin typeface="微软雅黑"/>
+                <a:ea typeface="微软雅黑"/>
+              </a:rPr>
+              <a:t>≈ 风险差一半</a:t>
+            </a:r>
+          </a:p>
+        </p:txBody>
+      </p:sp>
+      <p:sp>
+        <p:nvSpPr>
+          <p:cNvPr id="18" name="TextBox 17"/>
+          <p:cNvSpPr txBox="1"/>
+          <p:nvPr/>
+        </p:nvSpPr>
+        <p:spPr>
+          <a:xfrm>
+            <a:off x="658368" y="4005072"/>
+            <a:ext cx="5138928" cy="219456"/>
+          </a:xfrm>
+          <a:prstGeom prst="rect">
+            <a:avLst/>
+          </a:prstGeom>
+          <a:noFill/>
+        </p:spPr>
+        <p:txBody>
+          <a:bodyPr wrap="square" lIns="0" rIns="0" tIns="0" bIns="0" anchor="ctr">
+            <a:spAutoFit/>
+          </a:bodyPr>
+          <a:lstStyle/>
+          <a:p>
+            <a:pPr>
+              <a:lnSpc>
+                <a:spcPct val="100000"/>
+              </a:lnSpc>
+            </a:pPr>
+            <a:r>
+              <a:rPr sz="1000" b="1">
+                <a:solidFill>
+                  <a:srgbClr val="0A0A0A"/>
+                </a:solidFill>
+                <a:latin typeface="微软雅黑"/>
+                <a:ea typeface="微软雅黑"/>
+              </a:rPr>
+              <a:t>赌博支出占比</a:t>
+            </a:r>
+            <a:r>
+              <a:rPr sz="1000" b="1">
+                <a:solidFill>
+                  <a:srgbClr val="0A0A0A"/>
+                </a:solidFill>
+                <a:latin typeface="微软雅黑"/>
+                <a:ea typeface="微软雅黑"/>
+              </a:rPr>
+              <a:t>  </a:t>
+            </a:r>
+            <a:r>
+              <a:rPr sz="800" b="1">
+                <a:solidFill>
+                  <a:srgbClr val="D6A000"/>
+                </a:solidFill>
+                <a:latin typeface="微软雅黑"/>
+                <a:ea typeface="微软雅黑"/>
+              </a:rPr>
+              <a:t>2.0%</a:t>
+            </a:r>
+            <a:r>
+              <a:rPr sz="800" b="1">
+                <a:solidFill>
+                  <a:srgbClr val="D6A000"/>
+                </a:solidFill>
+                <a:latin typeface="微软雅黑"/>
+                <a:ea typeface="微软雅黑"/>
+              </a:rPr>
+              <a:t>  </a:t>
+            </a:r>
+            <a:r>
+              <a:rPr sz="700" b="0">
+                <a:solidFill>
+                  <a:srgbClr val="8A8A8A"/>
+                </a:solidFill>
+                <a:latin typeface="微软雅黑"/>
+                <a:ea typeface="微软雅黑"/>
+              </a:rPr>
+              <a:t>风险差 4.7%</a:t>
+            </a:r>
+          </a:p>
+        </p:txBody>
+      </p:sp>
+      <p:sp>
+        <p:nvSpPr>
+          <p:cNvPr id="19" name="TextBox 18"/>
+          <p:cNvSpPr txBox="1"/>
+          <p:nvPr/>
+        </p:nvSpPr>
+        <p:spPr>
+          <a:xfrm>
+            <a:off x="658368" y="4334256"/>
+            <a:ext cx="5138928" cy="219456"/>
+          </a:xfrm>
+          <a:prstGeom prst="rect">
+            <a:avLst/>
+          </a:prstGeom>
+          <a:noFill/>
+        </p:spPr>
+        <p:txBody>
+          <a:bodyPr wrap="square" lIns="0" rIns="0" tIns="0" bIns="0" anchor="ctr">
+            <a:spAutoFit/>
+          </a:bodyPr>
+          <a:lstStyle/>
+          <a:p>
+            <a:pPr>
+              <a:lnSpc>
+                <a:spcPct val="100000"/>
+              </a:lnSpc>
+            </a:pPr>
+            <a:r>
+              <a:rPr sz="1000" b="1">
+                <a:solidFill>
+                  <a:srgbClr val="0A0A0A"/>
+                </a:solidFill>
+                <a:latin typeface="微软雅黑"/>
+                <a:ea typeface="微软雅黑"/>
+              </a:rPr>
+              <a:t>余额波动std</a:t>
+            </a:r>
+            <a:r>
+              <a:rPr sz="1000" b="1">
+                <a:solidFill>
+                  <a:srgbClr val="0A0A0A"/>
+                </a:solidFill>
+                <a:latin typeface="微软雅黑"/>
+                <a:ea typeface="微软雅黑"/>
+              </a:rPr>
+              <a:t>  </a:t>
+            </a:r>
+            <a:r>
+              <a:rPr sz="800" b="1">
+                <a:solidFill>
+                  <a:srgbClr val="D6A000"/>
+                </a:solidFill>
+                <a:latin typeface="微软雅黑"/>
+                <a:ea typeface="微软雅黑"/>
+              </a:rPr>
+              <a:t>2,688</a:t>
+            </a:r>
+            <a:r>
+              <a:rPr sz="800" b="1">
+                <a:solidFill>
+                  <a:srgbClr val="D6A000"/>
+                </a:solidFill>
+                <a:latin typeface="微软雅黑"/>
+                <a:ea typeface="微软雅黑"/>
+              </a:rPr>
+              <a:t>  </a:t>
+            </a:r>
+            <a:r>
+              <a:rPr sz="700" b="0">
+                <a:solidFill>
+                  <a:srgbClr val="8A8A8A"/>
+                </a:solidFill>
+                <a:latin typeface="微软雅黑"/>
+                <a:ea typeface="微软雅黑"/>
+              </a:rPr>
+              <a:t>风险差 4,757</a:t>
+            </a:r>
+          </a:p>
+        </p:txBody>
+      </p:sp>
+      <p:sp>
+        <p:nvSpPr>
+          <p:cNvPr id="20" name="Rectangle 19"/>
+          <p:cNvSpPr/>
+          <p:nvPr/>
+        </p:nvSpPr>
+        <p:spPr>
+          <a:xfrm>
+            <a:off x="658368" y="4809744"/>
+            <a:ext cx="64008" cy="182880"/>
+          </a:xfrm>
+          <a:prstGeom prst="rect">
+            <a:avLst/>
+          </a:prstGeom>
+          <a:solidFill>
+            <a:srgbClr val="D6A000"/>
+          </a:solidFill>
+          <a:ln>
+            <a:noFill/>
+          </a:ln>
+          <a:effectLst/>
+        </p:spPr>
+        <p:style>
+          <a:lnRef idx="1">
+            <a:schemeClr val="accent1"/>
+          </a:lnRef>
+          <a:fillRef idx="3">
+            <a:schemeClr val="accent1"/>
+          </a:fillRef>
+          <a:effectRef idx="2">
+            <a:schemeClr val="accent1"/>
+          </a:effectRef>
+          <a:fontRef idx="minor">
+            <a:schemeClr val="lt1"/>
+          </a:fontRef>
+        </p:style>
+        <p:txBody>
+          <a:bodyPr rtlCol="0" anchor="ctr"/>
+          <a:lstStyle/>
+          <a:p>
+            <a:pPr algn="ctr"/>
+          </a:p>
+        </p:txBody>
+      </p:sp>
+      <p:sp>
+        <p:nvSpPr>
+          <p:cNvPr id="21" name="TextBox 20"/>
+          <p:cNvSpPr txBox="1"/>
+          <p:nvPr/>
+        </p:nvSpPr>
+        <p:spPr>
+          <a:xfrm>
+            <a:off x="768096" y="4791456"/>
+            <a:ext cx="5029200" cy="219456"/>
+          </a:xfrm>
+          <a:prstGeom prst="rect">
+            <a:avLst/>
+          </a:prstGeom>
+          <a:noFill/>
+        </p:spPr>
+        <p:txBody>
+          <a:bodyPr wrap="square" lIns="0" rIns="0" tIns="0" bIns="0" anchor="t">
+            <a:spAutoFit/>
+          </a:bodyPr>
+          <a:lstStyle/>
+          <a:p>
+            <a:r>
+              <a:rPr sz="1000" b="1">
+                <a:solidFill>
+                  <a:srgbClr val="1F4E79"/>
+                </a:solidFill>
+                <a:latin typeface="微软雅黑"/>
+                <a:ea typeface="微软雅黑"/>
+              </a:rPr>
+              <a:t>还款端</a:t>
+            </a:r>
+          </a:p>
+        </p:txBody>
+      </p:sp>
+      <p:sp>
+        <p:nvSpPr>
+          <p:cNvPr id="22" name="TextBox 21"/>
+          <p:cNvSpPr txBox="1"/>
+          <p:nvPr/>
+        </p:nvSpPr>
+        <p:spPr>
+          <a:xfrm>
+            <a:off x="658368" y="5102352"/>
+            <a:ext cx="5138928" cy="219456"/>
+          </a:xfrm>
+          <a:prstGeom prst="rect">
+            <a:avLst/>
+          </a:prstGeom>
+          <a:noFill/>
+        </p:spPr>
+        <p:txBody>
+          <a:bodyPr wrap="square" lIns="0" rIns="0" tIns="0" bIns="0" anchor="ctr">
+            <a:spAutoFit/>
+          </a:bodyPr>
+          <a:lstStyle/>
+          <a:p>
+            <a:pPr>
+              <a:lnSpc>
+                <a:spcPct val="100000"/>
+              </a:lnSpc>
+            </a:pPr>
+            <a:r>
+              <a:rPr sz="1000" b="1">
+                <a:solidFill>
+                  <a:srgbClr val="0A0A0A"/>
+                </a:solidFill>
+                <a:latin typeface="微软雅黑"/>
+                <a:ea typeface="微软雅黑"/>
+              </a:rPr>
+              <a:t>信贷还款金额</a:t>
+            </a:r>
+            <a:r>
+              <a:rPr sz="1000" b="1">
+                <a:solidFill>
+                  <a:srgbClr val="0A0A0A"/>
+                </a:solidFill>
+                <a:latin typeface="微软雅黑"/>
+                <a:ea typeface="微软雅黑"/>
+              </a:rPr>
+              <a:t>  </a:t>
+            </a:r>
+            <a:r>
+              <a:rPr sz="800" b="0">
+                <a:solidFill>
+                  <a:srgbClr val="606060"/>
+                </a:solidFill>
+                <a:latin typeface="微软雅黑"/>
+                <a:ea typeface="微软雅黑"/>
+              </a:rPr>
+              <a:t>15,780</a:t>
+            </a:r>
+            <a:r>
+              <a:rPr sz="800" b="0">
+                <a:solidFill>
+                  <a:srgbClr val="606060"/>
+                </a:solidFill>
+                <a:latin typeface="微软雅黑"/>
+                <a:ea typeface="微软雅黑"/>
+              </a:rPr>
+              <a:t>  </a:t>
+            </a:r>
+            <a:r>
+              <a:rPr sz="700" b="0">
+                <a:solidFill>
+                  <a:srgbClr val="8A8A8A"/>
+                </a:solidFill>
+                <a:latin typeface="微软雅黑"/>
+                <a:ea typeface="微软雅黑"/>
+              </a:rPr>
+              <a:t>高于风险差 10,305</a:t>
+            </a:r>
+          </a:p>
+        </p:txBody>
+      </p:sp>
+      <p:sp>
+        <p:nvSpPr>
+          <p:cNvPr id="23" name="TextBox 22"/>
+          <p:cNvSpPr txBox="1"/>
+          <p:nvPr/>
+        </p:nvSpPr>
+        <p:spPr>
+          <a:xfrm>
+            <a:off x="658368" y="5431536"/>
+            <a:ext cx="5138928" cy="219456"/>
+          </a:xfrm>
+          <a:prstGeom prst="rect">
+            <a:avLst/>
+          </a:prstGeom>
+          <a:noFill/>
+        </p:spPr>
+        <p:txBody>
+          <a:bodyPr wrap="square" lIns="0" rIns="0" tIns="0" bIns="0" anchor="ctr">
+            <a:spAutoFit/>
+          </a:bodyPr>
+          <a:lstStyle/>
+          <a:p>
+            <a:pPr>
+              <a:lnSpc>
+                <a:spcPct val="100000"/>
+              </a:lnSpc>
+            </a:pPr>
+            <a:r>
+              <a:rPr sz="1000" b="1">
+                <a:solidFill>
+                  <a:srgbClr val="0A0A0A"/>
+                </a:solidFill>
+                <a:latin typeface="微软雅黑"/>
+                <a:ea typeface="微软雅黑"/>
+              </a:rPr>
+              <a:t>贷款还款次数</a:t>
+            </a:r>
+            <a:r>
+              <a:rPr sz="1000" b="1">
+                <a:solidFill>
+                  <a:srgbClr val="0A0A0A"/>
+                </a:solidFill>
+                <a:latin typeface="微软雅黑"/>
+                <a:ea typeface="微软雅黑"/>
+              </a:rPr>
+              <a:t>  </a:t>
+            </a:r>
+            <a:r>
+              <a:rPr sz="800" b="0">
+                <a:solidFill>
+                  <a:srgbClr val="606060"/>
+                </a:solidFill>
+                <a:latin typeface="微软雅黑"/>
+                <a:ea typeface="微软雅黑"/>
+              </a:rPr>
+              <a:t>25.3</a:t>
+            </a:r>
+            <a:r>
+              <a:rPr sz="800" b="0">
+                <a:solidFill>
+                  <a:srgbClr val="606060"/>
+                </a:solidFill>
+                <a:latin typeface="微软雅黑"/>
+                <a:ea typeface="微软雅黑"/>
+              </a:rPr>
+              <a:t>  </a:t>
+            </a:r>
+            <a:r>
+              <a:rPr sz="700" b="0">
+                <a:solidFill>
+                  <a:srgbClr val="8A8A8A"/>
+                </a:solidFill>
+                <a:latin typeface="微软雅黑"/>
+                <a:ea typeface="微软雅黑"/>
+              </a:rPr>
+              <a:t>高于风险差 18.2</a:t>
+            </a:r>
+          </a:p>
+        </p:txBody>
+      </p:sp>
+      <p:sp>
+        <p:nvSpPr>
+          <p:cNvPr id="24" name="Rounded Rectangle 23"/>
+          <p:cNvSpPr/>
+          <p:nvPr/>
+        </p:nvSpPr>
+        <p:spPr>
+          <a:xfrm>
+            <a:off x="6254496" y="1097280"/>
+            <a:ext cx="5413248" cy="4617720"/>
+          </a:xfrm>
+          <a:prstGeom prst="roundRect">
+            <a:avLst>
+              <a:gd name="adj" fmla="val 3000"/>
+            </a:avLst>
+          </a:prstGeom>
+          <a:solidFill>
+            <a:srgbClr val="FFFFFF"/>
+          </a:solidFill>
+          <a:ln w="19050">
+            <a:solidFill>
+              <a:srgbClr val="D6D6D6"/>
+            </a:solidFill>
+          </a:ln>
+          <a:effectLst/>
+        </p:spPr>
+        <p:style>
+          <a:lnRef idx="1">
+            <a:schemeClr val="accent1"/>
+          </a:lnRef>
+          <a:fillRef idx="3">
+            <a:schemeClr val="accent1"/>
+          </a:fillRef>
+          <a:effectRef idx="2">
+            <a:schemeClr val="accent1"/>
+          </a:effectRef>
+          <a:fontRef idx="minor">
+            <a:schemeClr val="lt1"/>
+          </a:fontRef>
+        </p:style>
+        <p:txBody>
+          <a:bodyPr rtlCol="0" anchor="ctr"/>
+          <a:lstStyle/>
+          <a:p>
+            <a:pPr algn="ctr"/>
+          </a:p>
+        </p:txBody>
+      </p:sp>
+      <p:sp>
+        <p:nvSpPr>
+          <p:cNvPr id="25" name="Rectangle 24"/>
+          <p:cNvSpPr/>
+          <p:nvPr/>
+        </p:nvSpPr>
+        <p:spPr>
+          <a:xfrm>
+            <a:off x="6281928" y="1124712"/>
+            <a:ext cx="5358384" cy="54864"/>
+          </a:xfrm>
+          <a:prstGeom prst="rect">
+            <a:avLst/>
+          </a:prstGeom>
+          <a:solidFill>
+            <a:srgbClr val="1F4E79"/>
+          </a:solidFill>
+          <a:ln>
+            <a:noFill/>
+          </a:ln>
+          <a:effectLst/>
+        </p:spPr>
+        <p:style>
+          <a:lnRef idx="1">
+            <a:schemeClr val="accent1"/>
+          </a:lnRef>
+          <a:fillRef idx="3">
+            <a:schemeClr val="accent1"/>
+          </a:fillRef>
+          <a:effectRef idx="2">
+            <a:schemeClr val="accent1"/>
+          </a:effectRef>
+          <a:fontRef idx="minor">
+            <a:schemeClr val="lt1"/>
+          </a:fontRef>
+        </p:style>
+        <p:txBody>
+          <a:bodyPr rtlCol="0" anchor="ctr"/>
+          <a:lstStyle/>
+          <a:p>
+            <a:pPr algn="ctr"/>
+          </a:p>
+        </p:txBody>
+      </p:sp>
+      <p:sp>
+        <p:nvSpPr>
+          <p:cNvPr id="26" name="TextBox 25"/>
+          <p:cNvSpPr txBox="1"/>
+          <p:nvPr/>
+        </p:nvSpPr>
+        <p:spPr>
+          <a:xfrm>
+            <a:off x="6400800" y="1207007"/>
+            <a:ext cx="3108960" cy="292608"/>
+          </a:xfrm>
+          <a:prstGeom prst="rect">
+            <a:avLst/>
+          </a:prstGeom>
+          <a:noFill/>
+        </p:spPr>
+        <p:txBody>
+          <a:bodyPr wrap="square" lIns="0" rIns="0" tIns="0" bIns="0" anchor="ctr">
+            <a:spAutoFit/>
+          </a:bodyPr>
+          <a:lstStyle/>
+          <a:p>
+            <a:r>
+              <a:rPr sz="1400" b="1">
+                <a:solidFill>
+                  <a:srgbClr val="1F4E79"/>
+                </a:solidFill>
+                <a:latin typeface="微软雅黑"/>
+                <a:ea typeface="微软雅黑"/>
+              </a:rPr>
+              <a:t>价值好人群画像</a:t>
+            </a:r>
+          </a:p>
+        </p:txBody>
+      </p:sp>
+      <p:sp>
+        <p:nvSpPr>
+          <p:cNvPr id="27" name="Rounded Rectangle 26"/>
+          <p:cNvSpPr/>
+          <p:nvPr/>
+        </p:nvSpPr>
+        <p:spPr>
+          <a:xfrm>
+            <a:off x="9555480" y="1225295"/>
+            <a:ext cx="1984248" cy="237744"/>
+          </a:xfrm>
+          <a:prstGeom prst="roundRect">
+            <a:avLst>
+              <a:gd name="adj" fmla="val 50000"/>
+            </a:avLst>
+          </a:prstGeom>
+          <a:solidFill>
+            <a:srgbClr val="FAF3E0"/>
+          </a:solidFill>
+          <a:ln w="12700">
+            <a:solidFill>
+              <a:srgbClr val="D6A000"/>
+            </a:solidFill>
+          </a:ln>
+          <a:effectLst/>
+        </p:spPr>
+        <p:style>
+          <a:lnRef idx="1">
+            <a:schemeClr val="accent1"/>
+          </a:lnRef>
+          <a:fillRef idx="3">
+            <a:schemeClr val="accent1"/>
+          </a:fillRef>
+          <a:effectRef idx="2">
+            <a:schemeClr val="accent1"/>
+          </a:effectRef>
+          <a:fontRef idx="minor">
+            <a:schemeClr val="lt1"/>
+          </a:fontRef>
+        </p:style>
+        <p:txBody>
+          <a:bodyPr rtlCol="0" anchor="ctr" wrap="none" lIns="45720" rIns="45720" tIns="18288" bIns="18288"/>
+          <a:lstStyle/>
+          <a:p>
+            <a:pPr algn="ctr"/>
+            <a:r>
+              <a:rPr sz="900" b="1">
+                <a:solidFill>
+                  <a:srgbClr val="1F4E79"/>
+                </a:solidFill>
+                <a:latin typeface="微软雅黑"/>
+                <a:ea typeface="微软雅黑"/>
+              </a:rPr>
+              <a:t>高收入 · 现金流连续 · 发薪稳定</a:t>
+            </a:r>
+          </a:p>
+        </p:txBody>
+      </p:sp>
+      <p:sp>
+        <p:nvSpPr>
+          <p:cNvPr id="28" name="Rectangle 27"/>
+          <p:cNvSpPr/>
+          <p:nvPr/>
+        </p:nvSpPr>
+        <p:spPr>
+          <a:xfrm>
+            <a:off x="6400800" y="1627631"/>
+            <a:ext cx="64008" cy="182880"/>
+          </a:xfrm>
+          <a:prstGeom prst="rect">
+            <a:avLst/>
+          </a:prstGeom>
+          <a:solidFill>
+            <a:srgbClr val="D6A000"/>
+          </a:solidFill>
+          <a:ln>
+            <a:noFill/>
+          </a:ln>
+          <a:effectLst/>
+        </p:spPr>
+        <p:style>
+          <a:lnRef idx="1">
+            <a:schemeClr val="accent1"/>
+          </a:lnRef>
+          <a:fillRef idx="3">
+            <a:schemeClr val="accent1"/>
+          </a:fillRef>
+          <a:effectRef idx="2">
+            <a:schemeClr val="accent1"/>
+          </a:effectRef>
+          <a:fontRef idx="minor">
+            <a:schemeClr val="lt1"/>
+          </a:fontRef>
+        </p:style>
+        <p:txBody>
+          <a:bodyPr rtlCol="0" anchor="ctr"/>
+          <a:lstStyle/>
+          <a:p>
+            <a:pPr algn="ctr"/>
+          </a:p>
+        </p:txBody>
+      </p:sp>
+      <p:sp>
+        <p:nvSpPr>
+          <p:cNvPr id="29" name="TextBox 28"/>
+          <p:cNvSpPr txBox="1"/>
+          <p:nvPr/>
+        </p:nvSpPr>
+        <p:spPr>
+          <a:xfrm>
+            <a:off x="6510528" y="1609343"/>
+            <a:ext cx="5029200" cy="219456"/>
+          </a:xfrm>
+          <a:prstGeom prst="rect">
+            <a:avLst/>
+          </a:prstGeom>
+          <a:noFill/>
+        </p:spPr>
+        <p:txBody>
+          <a:bodyPr wrap="square" lIns="0" rIns="0" tIns="0" bIns="0" anchor="t">
+            <a:spAutoFit/>
+          </a:bodyPr>
+          <a:lstStyle/>
+          <a:p>
+            <a:r>
+              <a:rPr sz="1000" b="1">
+                <a:solidFill>
+                  <a:srgbClr val="1F4E79"/>
+                </a:solidFill>
+                <a:latin typeface="微软雅黑"/>
+                <a:ea typeface="微软雅黑"/>
+              </a:rPr>
+              <a:t>收入体量</a:t>
+            </a:r>
+          </a:p>
+        </p:txBody>
+      </p:sp>
+      <p:sp>
+        <p:nvSpPr>
+          <p:cNvPr id="30" name="TextBox 29"/>
+          <p:cNvSpPr txBox="1"/>
+          <p:nvPr/>
+        </p:nvSpPr>
+        <p:spPr>
+          <a:xfrm>
+            <a:off x="6400800" y="1920239"/>
+            <a:ext cx="5138928" cy="219456"/>
+          </a:xfrm>
+          <a:prstGeom prst="rect">
+            <a:avLst/>
+          </a:prstGeom>
+          <a:noFill/>
+        </p:spPr>
+        <p:txBody>
+          <a:bodyPr wrap="square" lIns="0" rIns="0" tIns="0" bIns="0" anchor="ctr">
+            <a:spAutoFit/>
+          </a:bodyPr>
+          <a:lstStyle/>
+          <a:p>
+            <a:pPr>
+              <a:lnSpc>
+                <a:spcPct val="100000"/>
+              </a:lnSpc>
+            </a:pPr>
+            <a:r>
+              <a:rPr sz="1000" b="1">
+                <a:solidFill>
+                  <a:srgbClr val="0A0A0A"/>
+                </a:solidFill>
+                <a:latin typeface="微软雅黑"/>
+                <a:ea typeface="微软雅黑"/>
+              </a:rPr>
+              <a:t>总收入金额</a:t>
+            </a:r>
+            <a:r>
+              <a:rPr sz="1000" b="1">
+                <a:solidFill>
+                  <a:srgbClr val="0A0A0A"/>
+                </a:solidFill>
+                <a:latin typeface="微软雅黑"/>
+                <a:ea typeface="微软雅黑"/>
+              </a:rPr>
+              <a:t>  </a:t>
+            </a:r>
+            <a:r>
+              <a:rPr sz="800" b="1">
+                <a:solidFill>
+                  <a:srgbClr val="D6A000"/>
+                </a:solidFill>
+                <a:latin typeface="微软雅黑"/>
+                <a:ea typeface="微软雅黑"/>
+              </a:rPr>
+              <a:t>140,807</a:t>
+            </a:r>
+            <a:r>
+              <a:rPr sz="800" b="1">
+                <a:solidFill>
+                  <a:srgbClr val="D6A000"/>
+                </a:solidFill>
+                <a:latin typeface="微软雅黑"/>
+                <a:ea typeface="微软雅黑"/>
+              </a:rPr>
+              <a:t>  </a:t>
+            </a:r>
+            <a:r>
+              <a:rPr sz="700" b="0">
+                <a:solidFill>
+                  <a:srgbClr val="8A8A8A"/>
+                </a:solidFill>
+                <a:latin typeface="微软雅黑"/>
+                <a:ea typeface="微软雅黑"/>
+              </a:rPr>
+              <a:t>价值差 59,771</a:t>
+            </a:r>
+          </a:p>
+        </p:txBody>
+      </p:sp>
+      <p:sp>
+        <p:nvSpPr>
+          <p:cNvPr id="31" name="TextBox 30"/>
+          <p:cNvSpPr txBox="1"/>
+          <p:nvPr/>
+        </p:nvSpPr>
+        <p:spPr>
+          <a:xfrm>
+            <a:off x="6400800" y="2249424"/>
+            <a:ext cx="5138928" cy="219456"/>
+          </a:xfrm>
+          <a:prstGeom prst="rect">
+            <a:avLst/>
+          </a:prstGeom>
+          <a:noFill/>
+        </p:spPr>
+        <p:txBody>
+          <a:bodyPr wrap="square" lIns="0" rIns="0" tIns="0" bIns="0" anchor="ctr">
+            <a:spAutoFit/>
+          </a:bodyPr>
+          <a:lstStyle/>
+          <a:p>
+            <a:pPr>
+              <a:lnSpc>
+                <a:spcPct val="100000"/>
+              </a:lnSpc>
+            </a:pPr>
+            <a:r>
+              <a:rPr sz="1000" b="1">
+                <a:solidFill>
+                  <a:srgbClr val="0A0A0A"/>
+                </a:solidFill>
+                <a:latin typeface="微软雅黑"/>
+                <a:ea typeface="微软雅黑"/>
+              </a:rPr>
+              <a:t>工资收入总额</a:t>
+            </a:r>
+            <a:r>
+              <a:rPr sz="1000" b="1">
+                <a:solidFill>
+                  <a:srgbClr val="0A0A0A"/>
+                </a:solidFill>
+                <a:latin typeface="微软雅黑"/>
+                <a:ea typeface="微软雅黑"/>
+              </a:rPr>
+              <a:t>  </a:t>
+            </a:r>
+            <a:r>
+              <a:rPr sz="800" b="1">
+                <a:solidFill>
+                  <a:srgbClr val="D6A000"/>
+                </a:solidFill>
+                <a:latin typeface="微软雅黑"/>
+                <a:ea typeface="微软雅黑"/>
+              </a:rPr>
+              <a:t>41,139</a:t>
+            </a:r>
+            <a:r>
+              <a:rPr sz="800" b="1">
+                <a:solidFill>
+                  <a:srgbClr val="D6A000"/>
+                </a:solidFill>
+                <a:latin typeface="微软雅黑"/>
+                <a:ea typeface="微软雅黑"/>
+              </a:rPr>
+              <a:t>  </a:t>
+            </a:r>
+            <a:r>
+              <a:rPr sz="700" b="0">
+                <a:solidFill>
+                  <a:srgbClr val="8A8A8A"/>
+                </a:solidFill>
+                <a:latin typeface="微软雅黑"/>
+                <a:ea typeface="微软雅黑"/>
+              </a:rPr>
+              <a:t>价值差 11,130</a:t>
+            </a:r>
+          </a:p>
+        </p:txBody>
+      </p:sp>
+      <p:sp>
+        <p:nvSpPr>
+          <p:cNvPr id="32" name="TextBox 31"/>
+          <p:cNvSpPr txBox="1"/>
+          <p:nvPr/>
+        </p:nvSpPr>
+        <p:spPr>
+          <a:xfrm>
+            <a:off x="6400800" y="2578608"/>
+            <a:ext cx="5138928" cy="219456"/>
+          </a:xfrm>
+          <a:prstGeom prst="rect">
+            <a:avLst/>
+          </a:prstGeom>
+          <a:noFill/>
+        </p:spPr>
+        <p:txBody>
+          <a:bodyPr wrap="square" lIns="0" rIns="0" tIns="0" bIns="0" anchor="ctr">
+            <a:spAutoFit/>
+          </a:bodyPr>
+          <a:lstStyle/>
+          <a:p>
+            <a:pPr>
+              <a:lnSpc>
+                <a:spcPct val="100000"/>
+              </a:lnSpc>
+            </a:pPr>
+            <a:r>
+              <a:rPr sz="1000" b="1">
+                <a:solidFill>
+                  <a:srgbClr val="0A0A0A"/>
+                </a:solidFill>
+                <a:latin typeface="微软雅黑"/>
+                <a:ea typeface="微软雅黑"/>
+              </a:rPr>
+              <a:t>主行业入账金额</a:t>
+            </a:r>
+            <a:r>
+              <a:rPr sz="1000" b="1">
+                <a:solidFill>
+                  <a:srgbClr val="0A0A0A"/>
+                </a:solidFill>
+                <a:latin typeface="微软雅黑"/>
+                <a:ea typeface="微软雅黑"/>
+              </a:rPr>
+              <a:t>  </a:t>
+            </a:r>
+            <a:r>
+              <a:rPr sz="800" b="1">
+                <a:solidFill>
+                  <a:srgbClr val="D6A000"/>
+                </a:solidFill>
+                <a:latin typeface="微软雅黑"/>
+                <a:ea typeface="微软雅黑"/>
+              </a:rPr>
+              <a:t>40,916</a:t>
+            </a:r>
+            <a:r>
+              <a:rPr sz="800" b="1">
+                <a:solidFill>
+                  <a:srgbClr val="D6A000"/>
+                </a:solidFill>
+                <a:latin typeface="微软雅黑"/>
+                <a:ea typeface="微软雅黑"/>
+              </a:rPr>
+              <a:t>  </a:t>
+            </a:r>
+            <a:r>
+              <a:rPr sz="700" b="0">
+                <a:solidFill>
+                  <a:srgbClr val="8A8A8A"/>
+                </a:solidFill>
+                <a:latin typeface="微软雅黑"/>
+                <a:ea typeface="微软雅黑"/>
+              </a:rPr>
+              <a:t>价值差 16,067</a:t>
+            </a:r>
+          </a:p>
+        </p:txBody>
+      </p:sp>
+      <p:sp>
+        <p:nvSpPr>
+          <p:cNvPr id="33" name="Rectangle 32"/>
+          <p:cNvSpPr/>
+          <p:nvPr/>
+        </p:nvSpPr>
+        <p:spPr>
+          <a:xfrm>
+            <a:off x="6400800" y="3054096"/>
+            <a:ext cx="64008" cy="182880"/>
+          </a:xfrm>
+          <a:prstGeom prst="rect">
+            <a:avLst/>
+          </a:prstGeom>
+          <a:solidFill>
+            <a:srgbClr val="D6A000"/>
+          </a:solidFill>
+          <a:ln>
+            <a:noFill/>
+          </a:ln>
+          <a:effectLst/>
+        </p:spPr>
+        <p:style>
+          <a:lnRef idx="1">
+            <a:schemeClr val="accent1"/>
+          </a:lnRef>
+          <a:fillRef idx="3">
+            <a:schemeClr val="accent1"/>
+          </a:fillRef>
+          <a:effectRef idx="2">
+            <a:schemeClr val="accent1"/>
+          </a:effectRef>
+          <a:fontRef idx="minor">
+            <a:schemeClr val="lt1"/>
+          </a:fontRef>
+        </p:style>
+        <p:txBody>
+          <a:bodyPr rtlCol="0" anchor="ctr"/>
+          <a:lstStyle/>
+          <a:p>
+            <a:pPr algn="ctr"/>
+          </a:p>
+        </p:txBody>
+      </p:sp>
+      <p:sp>
+        <p:nvSpPr>
+          <p:cNvPr id="34" name="TextBox 33"/>
+          <p:cNvSpPr txBox="1"/>
+          <p:nvPr/>
+        </p:nvSpPr>
+        <p:spPr>
+          <a:xfrm>
+            <a:off x="6510528" y="3035808"/>
+            <a:ext cx="5029200" cy="219456"/>
+          </a:xfrm>
+          <a:prstGeom prst="rect">
+            <a:avLst/>
+          </a:prstGeom>
+          <a:noFill/>
+        </p:spPr>
+        <p:txBody>
+          <a:bodyPr wrap="square" lIns="0" rIns="0" tIns="0" bIns="0" anchor="t">
+            <a:spAutoFit/>
+          </a:bodyPr>
+          <a:lstStyle/>
+          <a:p>
+            <a:r>
+              <a:rPr sz="1000" b="1">
+                <a:solidFill>
+                  <a:srgbClr val="1F4E79"/>
+                </a:solidFill>
+                <a:latin typeface="微软雅黑"/>
+                <a:ea typeface="微软雅黑"/>
+              </a:rPr>
+              <a:t>现金流质量</a:t>
+            </a:r>
+          </a:p>
+        </p:txBody>
+      </p:sp>
+      <p:sp>
+        <p:nvSpPr>
+          <p:cNvPr id="35" name="TextBox 34"/>
+          <p:cNvSpPr txBox="1"/>
+          <p:nvPr/>
+        </p:nvSpPr>
+        <p:spPr>
+          <a:xfrm>
+            <a:off x="6400800" y="3346704"/>
+            <a:ext cx="5138928" cy="219456"/>
+          </a:xfrm>
+          <a:prstGeom prst="rect">
+            <a:avLst/>
+          </a:prstGeom>
+          <a:noFill/>
+        </p:spPr>
+        <p:txBody>
+          <a:bodyPr wrap="square" lIns="0" rIns="0" tIns="0" bIns="0" anchor="ctr">
+            <a:spAutoFit/>
+          </a:bodyPr>
+          <a:lstStyle/>
+          <a:p>
+            <a:pPr>
+              <a:lnSpc>
+                <a:spcPct val="100000"/>
+              </a:lnSpc>
+            </a:pPr>
+            <a:r>
+              <a:rPr sz="1000" b="1">
+                <a:solidFill>
+                  <a:srgbClr val="0A0A0A"/>
+                </a:solidFill>
+                <a:latin typeface="微软雅黑"/>
+                <a:ea typeface="微软雅黑"/>
+              </a:rPr>
+              <a:t>工资入账次数</a:t>
+            </a:r>
+            <a:r>
+              <a:rPr sz="1000" b="1">
+                <a:solidFill>
+                  <a:srgbClr val="0A0A0A"/>
+                </a:solidFill>
+                <a:latin typeface="微软雅黑"/>
+                <a:ea typeface="微软雅黑"/>
+              </a:rPr>
+              <a:t>  </a:t>
+            </a:r>
+            <a:r>
+              <a:rPr sz="800" b="0">
+                <a:solidFill>
+                  <a:srgbClr val="606060"/>
+                </a:solidFill>
+                <a:latin typeface="微软雅黑"/>
+                <a:ea typeface="微软雅黑"/>
+              </a:rPr>
+              <a:t>20.5</a:t>
+            </a:r>
+            <a:r>
+              <a:rPr sz="800" b="0">
+                <a:solidFill>
+                  <a:srgbClr val="606060"/>
+                </a:solidFill>
+                <a:latin typeface="微软雅黑"/>
+                <a:ea typeface="微软雅黑"/>
+              </a:rPr>
+              <a:t>  </a:t>
+            </a:r>
+            <a:r>
+              <a:rPr sz="700" b="0">
+                <a:solidFill>
+                  <a:srgbClr val="8A8A8A"/>
+                </a:solidFill>
+                <a:latin typeface="微软雅黑"/>
+                <a:ea typeface="微软雅黑"/>
+              </a:rPr>
+              <a:t>价值差 10.6</a:t>
+            </a:r>
+          </a:p>
+        </p:txBody>
+      </p:sp>
+      <p:sp>
+        <p:nvSpPr>
+          <p:cNvPr id="36" name="TextBox 35"/>
+          <p:cNvSpPr txBox="1"/>
+          <p:nvPr/>
+        </p:nvSpPr>
+        <p:spPr>
+          <a:xfrm>
+            <a:off x="6400800" y="3675887"/>
+            <a:ext cx="5138928" cy="219456"/>
+          </a:xfrm>
+          <a:prstGeom prst="rect">
+            <a:avLst/>
+          </a:prstGeom>
+          <a:noFill/>
+        </p:spPr>
+        <p:txBody>
+          <a:bodyPr wrap="square" lIns="0" rIns="0" tIns="0" bIns="0" anchor="ctr">
+            <a:spAutoFit/>
+          </a:bodyPr>
+          <a:lstStyle/>
+          <a:p>
+            <a:pPr>
+              <a:lnSpc>
+                <a:spcPct val="100000"/>
+              </a:lnSpc>
+            </a:pPr>
+            <a:r>
+              <a:rPr sz="1000" b="1">
+                <a:solidFill>
+                  <a:srgbClr val="0A0A0A"/>
+                </a:solidFill>
+                <a:latin typeface="微软雅黑"/>
+                <a:ea typeface="微软雅黑"/>
+              </a:rPr>
+              <a:t>发薪周期std</a:t>
+            </a:r>
+            <a:r>
+              <a:rPr sz="1000" b="1">
+                <a:solidFill>
+                  <a:srgbClr val="0A0A0A"/>
+                </a:solidFill>
+                <a:latin typeface="微软雅黑"/>
+                <a:ea typeface="微软雅黑"/>
+              </a:rPr>
+              <a:t>  </a:t>
+            </a:r>
+            <a:r>
+              <a:rPr sz="800" b="0">
+                <a:solidFill>
+                  <a:srgbClr val="606060"/>
+                </a:solidFill>
+                <a:latin typeface="微软雅黑"/>
+                <a:ea typeface="微软雅黑"/>
+              </a:rPr>
+              <a:t>2.72</a:t>
+            </a:r>
+            <a:r>
+              <a:rPr sz="800" b="0">
+                <a:solidFill>
+                  <a:srgbClr val="606060"/>
+                </a:solidFill>
+                <a:latin typeface="微软雅黑"/>
+                <a:ea typeface="微软雅黑"/>
+              </a:rPr>
+              <a:t>  </a:t>
+            </a:r>
+            <a:r>
+              <a:rPr sz="700" b="0">
+                <a:solidFill>
+                  <a:srgbClr val="8A8A8A"/>
+                </a:solidFill>
+                <a:latin typeface="微软雅黑"/>
+                <a:ea typeface="微软雅黑"/>
+              </a:rPr>
+              <a:t>价值差 3.79</a:t>
+            </a:r>
+          </a:p>
+        </p:txBody>
+      </p:sp>
+      <p:sp>
+        <p:nvSpPr>
+          <p:cNvPr id="37" name="TextBox 36"/>
+          <p:cNvSpPr txBox="1"/>
+          <p:nvPr/>
+        </p:nvSpPr>
+        <p:spPr>
+          <a:xfrm>
+            <a:off x="6400800" y="4005072"/>
+            <a:ext cx="5138928" cy="219456"/>
+          </a:xfrm>
+          <a:prstGeom prst="rect">
+            <a:avLst/>
+          </a:prstGeom>
+          <a:noFill/>
+        </p:spPr>
+        <p:txBody>
+          <a:bodyPr wrap="square" lIns="0" rIns="0" tIns="0" bIns="0" anchor="ctr">
+            <a:spAutoFit/>
+          </a:bodyPr>
+          <a:lstStyle/>
+          <a:p>
+            <a:pPr>
+              <a:lnSpc>
+                <a:spcPct val="100000"/>
+              </a:lnSpc>
+            </a:pPr>
+            <a:r>
+              <a:rPr sz="1000" b="1">
+                <a:solidFill>
+                  <a:srgbClr val="0A0A0A"/>
+                </a:solidFill>
+                <a:latin typeface="微软雅黑"/>
+                <a:ea typeface="微软雅黑"/>
+              </a:rPr>
+              <a:t>Centrelink收入占比</a:t>
+            </a:r>
+            <a:r>
+              <a:rPr sz="1000" b="1">
+                <a:solidFill>
+                  <a:srgbClr val="0A0A0A"/>
+                </a:solidFill>
+                <a:latin typeface="微软雅黑"/>
+                <a:ea typeface="微软雅黑"/>
+              </a:rPr>
+              <a:t>  </a:t>
+            </a:r>
+            <a:r>
+              <a:rPr sz="800" b="0">
+                <a:solidFill>
+                  <a:srgbClr val="606060"/>
+                </a:solidFill>
+                <a:latin typeface="微软雅黑"/>
+                <a:ea typeface="微软雅黑"/>
+              </a:rPr>
+              <a:t>2.1%</a:t>
+            </a:r>
+            <a:r>
+              <a:rPr sz="800" b="0">
+                <a:solidFill>
+                  <a:srgbClr val="606060"/>
+                </a:solidFill>
+                <a:latin typeface="微软雅黑"/>
+                <a:ea typeface="微软雅黑"/>
+              </a:rPr>
+              <a:t>  </a:t>
+            </a:r>
+            <a:r>
+              <a:rPr sz="700" b="0">
+                <a:solidFill>
+                  <a:srgbClr val="8A8A8A"/>
+                </a:solidFill>
+                <a:latin typeface="微软雅黑"/>
+                <a:ea typeface="微软雅黑"/>
+              </a:rPr>
+              <a:t>价值差 14.6%</a:t>
+            </a:r>
+          </a:p>
+        </p:txBody>
+      </p:sp>
+      <p:sp>
+        <p:nvSpPr>
+          <p:cNvPr id="38" name="Rectangle 37"/>
+          <p:cNvSpPr/>
+          <p:nvPr/>
+        </p:nvSpPr>
+        <p:spPr>
+          <a:xfrm>
+            <a:off x="6400800" y="4480560"/>
+            <a:ext cx="64008" cy="182880"/>
+          </a:xfrm>
+          <a:prstGeom prst="rect">
+            <a:avLst/>
+          </a:prstGeom>
+          <a:solidFill>
+            <a:srgbClr val="D6A000"/>
+          </a:solidFill>
+          <a:ln>
+            <a:noFill/>
+          </a:ln>
+          <a:effectLst/>
+        </p:spPr>
+        <p:style>
+          <a:lnRef idx="1">
+            <a:schemeClr val="accent1"/>
+          </a:lnRef>
+          <a:fillRef idx="3">
+            <a:schemeClr val="accent1"/>
+          </a:fillRef>
+          <a:effectRef idx="2">
+            <a:schemeClr val="accent1"/>
+          </a:effectRef>
+          <a:fontRef idx="minor">
+            <a:schemeClr val="lt1"/>
+          </a:fontRef>
+        </p:style>
+        <p:txBody>
+          <a:bodyPr rtlCol="0" anchor="ctr"/>
+          <a:lstStyle/>
+          <a:p>
+            <a:pPr algn="ctr"/>
+          </a:p>
+        </p:txBody>
+      </p:sp>
+      <p:sp>
+        <p:nvSpPr>
+          <p:cNvPr id="39" name="TextBox 38"/>
+          <p:cNvSpPr txBox="1"/>
+          <p:nvPr/>
+        </p:nvSpPr>
+        <p:spPr>
+          <a:xfrm>
+            <a:off x="6510528" y="4462272"/>
+            <a:ext cx="5029200" cy="219456"/>
+          </a:xfrm>
+          <a:prstGeom prst="rect">
+            <a:avLst/>
+          </a:prstGeom>
+          <a:noFill/>
+        </p:spPr>
+        <p:txBody>
+          <a:bodyPr wrap="square" lIns="0" rIns="0" tIns="0" bIns="0" anchor="t">
+            <a:spAutoFit/>
+          </a:bodyPr>
+          <a:lstStyle/>
+          <a:p>
+            <a:r>
+              <a:rPr sz="1000" b="1">
+                <a:solidFill>
+                  <a:srgbClr val="1F4E79"/>
+                </a:solidFill>
+                <a:latin typeface="微软雅黑"/>
+                <a:ea typeface="微软雅黑"/>
+              </a:rPr>
+              <a:t>家庭与渠道</a:t>
+            </a:r>
+          </a:p>
+        </p:txBody>
+      </p:sp>
+      <p:sp>
+        <p:nvSpPr>
+          <p:cNvPr id="40" name="TextBox 39"/>
+          <p:cNvSpPr txBox="1"/>
+          <p:nvPr/>
+        </p:nvSpPr>
+        <p:spPr>
+          <a:xfrm>
+            <a:off x="6400800" y="4773168"/>
+            <a:ext cx="5138928" cy="219456"/>
+          </a:xfrm>
+          <a:prstGeom prst="rect">
+            <a:avLst/>
+          </a:prstGeom>
+          <a:noFill/>
+        </p:spPr>
+        <p:txBody>
+          <a:bodyPr wrap="square" lIns="0" rIns="0" tIns="0" bIns="0" anchor="ctr">
+            <a:spAutoFit/>
+          </a:bodyPr>
+          <a:lstStyle/>
+          <a:p>
+            <a:pPr>
+              <a:lnSpc>
+                <a:spcPct val="100000"/>
+              </a:lnSpc>
+            </a:pPr>
+            <a:r>
+              <a:rPr sz="1000" b="1">
+                <a:solidFill>
+                  <a:srgbClr val="0A0A0A"/>
+                </a:solidFill>
+                <a:latin typeface="微软雅黑"/>
+                <a:ea typeface="微软雅黑"/>
+              </a:rPr>
+              <a:t>couple占比</a:t>
+            </a:r>
+            <a:r>
+              <a:rPr sz="1000" b="1">
+                <a:solidFill>
+                  <a:srgbClr val="0A0A0A"/>
+                </a:solidFill>
+                <a:latin typeface="微软雅黑"/>
+                <a:ea typeface="微软雅黑"/>
+              </a:rPr>
+              <a:t>  </a:t>
+            </a:r>
+            <a:r>
+              <a:rPr sz="800" b="0">
+                <a:solidFill>
+                  <a:srgbClr val="606060"/>
+                </a:solidFill>
+                <a:latin typeface="微软雅黑"/>
+                <a:ea typeface="微软雅黑"/>
+              </a:rPr>
+              <a:t>43.8%</a:t>
+            </a:r>
+            <a:r>
+              <a:rPr sz="800" b="0">
+                <a:solidFill>
+                  <a:srgbClr val="606060"/>
+                </a:solidFill>
+                <a:latin typeface="微软雅黑"/>
+                <a:ea typeface="微软雅黑"/>
+              </a:rPr>
+              <a:t>  </a:t>
+            </a:r>
+            <a:r>
+              <a:rPr sz="700" b="0">
+                <a:solidFill>
+                  <a:srgbClr val="8A8A8A"/>
+                </a:solidFill>
+                <a:latin typeface="微软雅黑"/>
+                <a:ea typeface="微软雅黑"/>
+              </a:rPr>
+              <a:t>价值差 29.1%</a:t>
+            </a:r>
+          </a:p>
+        </p:txBody>
+      </p:sp>
+      <p:sp>
+        <p:nvSpPr>
+          <p:cNvPr id="41" name="TextBox 40"/>
+          <p:cNvSpPr txBox="1"/>
+          <p:nvPr/>
+        </p:nvSpPr>
+        <p:spPr>
+          <a:xfrm>
+            <a:off x="6400800" y="5102352"/>
+            <a:ext cx="5138928" cy="219456"/>
+          </a:xfrm>
+          <a:prstGeom prst="rect">
+            <a:avLst/>
+          </a:prstGeom>
+          <a:noFill/>
+        </p:spPr>
+        <p:txBody>
+          <a:bodyPr wrap="square" lIns="0" rIns="0" tIns="0" bIns="0" anchor="ctr">
+            <a:spAutoFit/>
+          </a:bodyPr>
+          <a:lstStyle/>
+          <a:p>
+            <a:pPr>
+              <a:lnSpc>
+                <a:spcPct val="100000"/>
+              </a:lnSpc>
+            </a:pPr>
+            <a:r>
+              <a:rPr sz="1000" b="1">
+                <a:solidFill>
+                  <a:srgbClr val="0A0A0A"/>
+                </a:solidFill>
+                <a:latin typeface="微软雅黑"/>
+                <a:ea typeface="微软雅黑"/>
+              </a:rPr>
+              <a:t>Lead Partner</a:t>
+            </a:r>
+            <a:r>
+              <a:rPr sz="1000" b="1">
+                <a:solidFill>
+                  <a:srgbClr val="0A0A0A"/>
+                </a:solidFill>
+                <a:latin typeface="微软雅黑"/>
+                <a:ea typeface="微软雅黑"/>
+              </a:rPr>
+              <a:t>  </a:t>
+            </a:r>
+            <a:r>
+              <a:rPr sz="800" b="0">
+                <a:solidFill>
+                  <a:srgbClr val="606060"/>
+                </a:solidFill>
+                <a:latin typeface="微软雅黑"/>
+                <a:ea typeface="微软雅黑"/>
+              </a:rPr>
+              <a:t>19.3%</a:t>
+            </a:r>
+            <a:r>
+              <a:rPr sz="800" b="0">
+                <a:solidFill>
+                  <a:srgbClr val="606060"/>
+                </a:solidFill>
+                <a:latin typeface="微软雅黑"/>
+                <a:ea typeface="微软雅黑"/>
+              </a:rPr>
+              <a:t>  </a:t>
+            </a:r>
+            <a:r>
+              <a:rPr sz="700" b="0">
+                <a:solidFill>
+                  <a:srgbClr val="8A8A8A"/>
+                </a:solidFill>
+                <a:latin typeface="微软雅黑"/>
+                <a:ea typeface="微软雅黑"/>
+              </a:rPr>
+              <a:t>价值差 11.6%</a:t>
+            </a:r>
+          </a:p>
+        </p:txBody>
+      </p:sp>
+      <p:sp>
+        <p:nvSpPr>
+          <p:cNvPr id="42" name="TextBox 41"/>
+          <p:cNvSpPr txBox="1"/>
+          <p:nvPr/>
+        </p:nvSpPr>
+        <p:spPr>
+          <a:xfrm>
+            <a:off x="6400800" y="5431536"/>
+            <a:ext cx="5138928" cy="219456"/>
+          </a:xfrm>
+          <a:prstGeom prst="rect">
+            <a:avLst/>
+          </a:prstGeom>
+          <a:noFill/>
+        </p:spPr>
+        <p:txBody>
+          <a:bodyPr wrap="square" lIns="0" rIns="0" tIns="0" bIns="0" anchor="ctr">
+            <a:spAutoFit/>
+          </a:bodyPr>
+          <a:lstStyle/>
+          <a:p>
+            <a:pPr>
+              <a:lnSpc>
+                <a:spcPct val="100000"/>
+              </a:lnSpc>
+            </a:pPr>
+            <a:r>
+              <a:rPr sz="1000" b="1">
+                <a:solidFill>
+                  <a:srgbClr val="0A0A0A"/>
+                </a:solidFill>
+                <a:latin typeface="微软雅黑"/>
+                <a:ea typeface="微软雅黑"/>
+              </a:rPr>
+              <a:t>Owned Channels</a:t>
+            </a:r>
+            <a:r>
+              <a:rPr sz="1000" b="1">
+                <a:solidFill>
+                  <a:srgbClr val="0A0A0A"/>
+                </a:solidFill>
+                <a:latin typeface="微软雅黑"/>
+                <a:ea typeface="微软雅黑"/>
+              </a:rPr>
+              <a:t>  </a:t>
+            </a:r>
+            <a:r>
+              <a:rPr sz="800" b="0">
+                <a:solidFill>
+                  <a:srgbClr val="606060"/>
+                </a:solidFill>
+                <a:latin typeface="微软雅黑"/>
+                <a:ea typeface="微软雅黑"/>
+              </a:rPr>
+              <a:t>11.8%</a:t>
+            </a:r>
+            <a:r>
+              <a:rPr sz="800" b="0">
+                <a:solidFill>
+                  <a:srgbClr val="606060"/>
+                </a:solidFill>
+                <a:latin typeface="微软雅黑"/>
+                <a:ea typeface="微软雅黑"/>
+              </a:rPr>
+              <a:t>  </a:t>
+            </a:r>
+            <a:r>
+              <a:rPr sz="700" b="0">
+                <a:solidFill>
+                  <a:srgbClr val="8A8A8A"/>
+                </a:solidFill>
+                <a:latin typeface="微软雅黑"/>
+                <a:ea typeface="微软雅黑"/>
+              </a:rPr>
+              <a:t>价值差 7.9%</a:t>
+            </a:r>
+          </a:p>
+        </p:txBody>
+      </p:sp>
+      <p:sp>
+        <p:nvSpPr>
+          <p:cNvPr id="43" name="TextBox 42"/>
+          <p:cNvSpPr txBox="1"/>
+          <p:nvPr/>
+        </p:nvSpPr>
+        <p:spPr>
+          <a:xfrm>
+            <a:off x="512064" y="5815584"/>
+            <a:ext cx="11164824" cy="182880"/>
+          </a:xfrm>
+          <a:prstGeom prst="rect">
+            <a:avLst/>
+          </a:prstGeom>
+          <a:noFill/>
+        </p:spPr>
+        <p:txBody>
+          <a:bodyPr wrap="square" lIns="0" rIns="0" tIns="0" bIns="0" anchor="t">
+            <a:spAutoFit/>
+          </a:bodyPr>
+          <a:lstStyle/>
+          <a:p>
+            <a:r>
+              <a:rPr sz="800" b="0">
+                <a:solidFill>
+                  <a:srgbClr val="606060"/>
+                </a:solidFill>
+                <a:latin typeface="微软雅黑"/>
+                <a:ea typeface="微软雅黑"/>
+              </a:rPr>
+              <a:t>数值口径:左卡为风险分箱 1/2 组均值、右卡为价值分箱 1/2 组均值,行内灰字为对应 4/5 组对照;家庭/渠道结构差异不直接作为风险因果</a:t>
+            </a:r>
+          </a:p>
+        </p:txBody>
+      </p:sp>
+      <p:sp>
+        <p:nvSpPr>
+          <p:cNvPr id="44" name="Rectangle 43"/>
+          <p:cNvSpPr/>
+          <p:nvPr/>
+        </p:nvSpPr>
+        <p:spPr>
+          <a:xfrm>
+            <a:off x="512064" y="6144768"/>
+            <a:ext cx="11164824" cy="384048"/>
+          </a:xfrm>
+          <a:prstGeom prst="rect">
+            <a:avLst/>
+          </a:prstGeom>
+          <a:solidFill>
+            <a:srgbClr val="FAF3E0"/>
+          </a:solidFill>
+          <a:ln>
+            <a:noFill/>
+          </a:ln>
+          <a:effectLst/>
+        </p:spPr>
+        <p:style>
+          <a:lnRef idx="1">
+            <a:schemeClr val="accent1"/>
+          </a:lnRef>
+          <a:fillRef idx="3">
+            <a:schemeClr val="accent1"/>
+          </a:fillRef>
+          <a:effectRef idx="2">
+            <a:schemeClr val="accent1"/>
+          </a:effectRef>
+          <a:fontRef idx="minor">
+            <a:schemeClr val="lt1"/>
+          </a:fontRef>
+        </p:style>
+        <p:txBody>
+          <a:bodyPr rtlCol="0" anchor="ctr"/>
+          <a:lstStyle/>
+          <a:p>
+            <a:pPr algn="ctr"/>
+          </a:p>
+        </p:txBody>
+      </p:sp>
+      <p:sp>
+        <p:nvSpPr>
+          <p:cNvPr id="45" name="Rectangle 44"/>
+          <p:cNvSpPr/>
+          <p:nvPr/>
+        </p:nvSpPr>
+        <p:spPr>
+          <a:xfrm>
+            <a:off x="576072" y="6208776"/>
+            <a:ext cx="64008" cy="256032"/>
+          </a:xfrm>
+          <a:prstGeom prst="rect">
+            <a:avLst/>
+          </a:prstGeom>
+          <a:solidFill>
+            <a:srgbClr val="D6A000"/>
+          </a:solidFill>
+          <a:ln>
+            <a:noFill/>
+          </a:ln>
+          <a:effectLst/>
+        </p:spPr>
+        <p:style>
+          <a:lnRef idx="1">
+            <a:schemeClr val="accent1"/>
+          </a:lnRef>
+          <a:fillRef idx="3">
+            <a:schemeClr val="accent1"/>
+          </a:fillRef>
+          <a:effectRef idx="2">
+            <a:schemeClr val="accent1"/>
+          </a:effectRef>
+          <a:fontRef idx="minor">
+            <a:schemeClr val="lt1"/>
+          </a:fontRef>
+        </p:style>
+        <p:txBody>
+          <a:bodyPr rtlCol="0" anchor="ctr"/>
+          <a:lstStyle/>
+          <a:p>
+            <a:pPr algn="ctr"/>
+          </a:p>
+        </p:txBody>
+      </p:sp>
+      <p:sp>
+        <p:nvSpPr>
+          <p:cNvPr id="46" name="TextBox 45"/>
+          <p:cNvSpPr txBox="1"/>
+          <p:nvPr/>
+        </p:nvSpPr>
+        <p:spPr>
+          <a:xfrm>
+            <a:off x="694944" y="6181344"/>
+            <a:ext cx="10881360" cy="310896"/>
+          </a:xfrm>
+          <a:prstGeom prst="rect">
+            <a:avLst/>
+          </a:prstGeom>
+          <a:noFill/>
+        </p:spPr>
+        <p:txBody>
+          <a:bodyPr wrap="square" lIns="0" rIns="0" tIns="0" bIns="0" anchor="ctr">
+            <a:spAutoFit/>
+          </a:bodyPr>
+          <a:lstStyle/>
+          <a:p>
+            <a:r>
+              <a:rPr sz="950" b="1">
+                <a:solidFill>
+                  <a:srgbClr val="0A0A0A"/>
+                </a:solidFill>
+                <a:latin typeface="微软雅黑"/>
+                <a:ea typeface="微软雅黑"/>
+              </a:rPr>
+              <a:t>两类“好”不重叠:价值好×风险好(优先经营)与价值差×风险好(收益验证)是两类不同人群,经营策略需分开制定</a:t>
+            </a:r>
+          </a:p>
+        </p:txBody>
+      </p:sp>
+    </p:spTree>
   </p:cSld>
   <p:clrMapOvr>
     <a:masterClrMapping/>

--- a/四类客群矩阵.pptx
+++ b/四类客群矩阵.pptx
@@ -23349,20 +23349,20 @@
         </p:nvSpPr>
         <p:spPr>
           <a:xfrm>
-            <a:off x="512064" y="1097280"/>
-            <a:ext cx="5413248" cy="4617720"/>
+            <a:off x="512064" y="1188720"/>
+            <a:ext cx="2272283" cy="256032"/>
           </a:xfrm>
           <a:prstGeom prst="roundRect">
             <a:avLst>
-              <a:gd name="adj" fmla="val 3000"/>
+              <a:gd name="adj" fmla="val 50000"/>
             </a:avLst>
           </a:prstGeom>
           <a:solidFill>
-            <a:srgbClr val="FFFFFF"/>
+            <a:srgbClr val="FAF3E0"/>
           </a:solidFill>
-          <a:ln w="19050">
+          <a:ln w="12700">
             <a:solidFill>
-              <a:srgbClr val="D6D6D6"/>
+              <a:srgbClr val="D6A000"/>
             </a:solidFill>
           </a:ln>
           <a:effectLst/>
@@ -23382,32 +23382,46 @@
           </a:fontRef>
         </p:style>
         <p:txBody>
-          <a:bodyPr rtlCol="0" anchor="ctr"/>
+          <a:bodyPr rtlCol="0" anchor="ctr" wrap="none" lIns="54864" rIns="54864" tIns="18288" bIns="18288"/>
           <a:lstStyle/>
           <a:p>
             <a:pPr algn="ctr"/>
-          </a:p>
-        </p:txBody>
-      </p:sp>
-      <p:sp>
-        <p:nvSpPr>
-          <p:cNvPr id="6" name="Rectangle 5"/>
+            <a:r>
+              <a:rPr sz="900" b="1">
+                <a:solidFill>
+                  <a:srgbClr val="1F4E79"/>
+                </a:solidFill>
+                <a:latin typeface="微软雅黑"/>
+                <a:ea typeface="微软雅黑"/>
+              </a:rPr>
+              <a:t>风险好:低支出 · 低波动 · 还款更可控</a:t>
+            </a:r>
+          </a:p>
+        </p:txBody>
+      </p:sp>
+      <p:sp>
+        <p:nvSpPr>
+          <p:cNvPr id="6" name="Rounded Rectangle 5"/>
           <p:cNvSpPr/>
           <p:nvPr/>
         </p:nvSpPr>
         <p:spPr>
           <a:xfrm>
-            <a:off x="539496" y="1124712"/>
-            <a:ext cx="5358384" cy="54864"/>
-          </a:xfrm>
-          <a:prstGeom prst="rect">
-            <a:avLst/>
+            <a:off x="2948939" y="1188720"/>
+            <a:ext cx="2386583" cy="256032"/>
+          </a:xfrm>
+          <a:prstGeom prst="roundRect">
+            <a:avLst>
+              <a:gd name="adj" fmla="val 50000"/>
+            </a:avLst>
           </a:prstGeom>
           <a:solidFill>
-            <a:srgbClr val="D6A000"/>
+            <a:srgbClr val="FAF3E0"/>
           </a:solidFill>
-          <a:ln>
-            <a:noFill/>
+          <a:ln w="12700">
+            <a:solidFill>
+              <a:srgbClr val="D6A000"/>
+            </a:solidFill>
           </a:ln>
           <a:effectLst/>
         </p:spPr>
@@ -23426,10 +23440,20 @@
           </a:fontRef>
         </p:style>
         <p:txBody>
-          <a:bodyPr rtlCol="0" anchor="ctr"/>
+          <a:bodyPr rtlCol="0" anchor="ctr" wrap="none" lIns="54864" rIns="54864" tIns="18288" bIns="18288"/>
           <a:lstStyle/>
           <a:p>
             <a:pPr algn="ctr"/>
+            <a:r>
+              <a:rPr sz="900" b="1">
+                <a:solidFill>
+                  <a:srgbClr val="1F4E79"/>
+                </a:solidFill>
+                <a:latin typeface="微软雅黑"/>
+                <a:ea typeface="微软雅黑"/>
+              </a:rPr>
+              <a:t>价值好:高收入 · 现金流连续 · 发薪稳定</a:t>
+            </a:r>
           </a:p>
         </p:txBody>
       </p:sp>
@@ -23441,8 +23465,8 @@
         </p:nvSpPr>
         <p:spPr>
           <a:xfrm>
-            <a:off x="658368" y="1207007"/>
-            <a:ext cx="3108960" cy="292608"/>
+            <a:off x="512064" y="1591056"/>
+            <a:ext cx="10899648" cy="228600"/>
           </a:xfrm>
           <a:prstGeom prst="rect">
             <a:avLst/>
@@ -23450,47 +23474,1714 @@
           <a:noFill/>
         </p:spPr>
         <p:txBody>
-          <a:bodyPr wrap="square" lIns="0" rIns="0" tIns="0" bIns="0" anchor="ctr">
+          <a:bodyPr wrap="square" lIns="0" rIns="0" tIns="0" bIns="0" anchor="t">
             <a:spAutoFit/>
           </a:bodyPr>
           <a:lstStyle/>
           <a:p>
             <a:r>
-              <a:rPr sz="1400" b="1">
+              <a:rPr sz="1050" b="1">
                 <a:solidFill>
-                  <a:srgbClr val="B57900"/>
+                  <a:srgbClr val="0A0A0A"/>
                 </a:solidFill>
                 <a:latin typeface="微软雅黑"/>
                 <a:ea typeface="微软雅黑"/>
               </a:rPr>
-              <a:t>风险好人群画像</a:t>
-            </a:r>
-          </a:p>
-        </p:txBody>
-      </p:sp>
-      <p:sp>
-        <p:nvSpPr>
-          <p:cNvPr id="8" name="Rounded Rectangle 7"/>
+              <a:t>风险好 vs 价值好:关键指标对比</a:t>
+            </a:r>
+          </a:p>
+        </p:txBody>
+      </p:sp>
+      <p:graphicFrame>
+        <p:nvGraphicFramePr>
+          <p:cNvPr id="8" name="Table 7"/>
+          <p:cNvGraphicFramePr>
+            <a:graphicFrameLocks noGrp="1"/>
+          </p:cNvGraphicFramePr>
+          <p:nvPr/>
+        </p:nvGraphicFramePr>
+        <p:xfrm>
+          <a:off x="512064" y="1865376"/>
+          <a:ext cx="10899648" cy="2395728"/>
+        </p:xfrm>
+        <a:graphic>
+          <a:graphicData uri="http://schemas.openxmlformats.org/drawingml/2006/table">
+            <a:tbl>
+              <a:tblPr firstRow="0" bandRow="0">
+                <a:tableStyleId>{5C22544A-7EE6-4342-B048-85BDC9FD1C3A}</a:tableStyleId>
+              </a:tblPr>
+              <a:tblGrid>
+                <a:gridCol w="1828800"/>
+                <a:gridCol w="1700784"/>
+                <a:gridCol w="1700784"/>
+                <a:gridCol w="5669280"/>
+              </a:tblGrid>
+              <a:tr h="182880">
+                <a:tc>
+                  <a:txBody>
+                    <a:bodyPr wrap="square" lIns="73152" rIns="54864" tIns="0" bIns="0" anchor="ctr"/>
+                    <a:lstStyle/>
+                    <a:p>
+                      <a:pPr algn="l">
+                        <a:lnSpc>
+                          <a:spcPct val="100000"/>
+                        </a:lnSpc>
+                      </a:pPr>
+                      <a:r>
+                        <a:rPr sz="800" b="1">
+                          <a:solidFill>
+                            <a:srgbClr val="1F4E79"/>
+                          </a:solidFill>
+                          <a:latin typeface="微软雅黑"/>
+                          <a:ea typeface="微软雅黑"/>
+                        </a:rPr>
+                        <a:t>指标</a:t>
+                      </a:r>
+                    </a:p>
+                  </a:txBody>
+                  <a:tcPr>
+                    <a:lnB w="19050" cap="flat">
+                      <a:solidFill>
+                        <a:srgbClr val="0A0A0A"/>
+                      </a:solidFill>
+                    </a:lnB>
+                    <a:solidFill>
+                      <a:srgbClr val="E3EBF4"/>
+                    </a:solidFill>
+                  </a:tcPr>
+                </a:tc>
+                <a:tc>
+                  <a:txBody>
+                    <a:bodyPr wrap="square" lIns="73152" rIns="54864" tIns="0" bIns="0" anchor="ctr"/>
+                    <a:lstStyle/>
+                    <a:p>
+                      <a:pPr algn="ctr">
+                        <a:lnSpc>
+                          <a:spcPct val="100000"/>
+                        </a:lnSpc>
+                      </a:pPr>
+                      <a:r>
+                        <a:rPr sz="800" b="1">
+                          <a:solidFill>
+                            <a:srgbClr val="1F4E79"/>
+                          </a:solidFill>
+                          <a:latin typeface="微软雅黑"/>
+                          <a:ea typeface="微软雅黑"/>
+                        </a:rPr>
+                        <a:t>风险好(1/2)</a:t>
+                      </a:r>
+                    </a:p>
+                  </a:txBody>
+                  <a:tcPr>
+                    <a:lnB w="19050" cap="flat">
+                      <a:solidFill>
+                        <a:srgbClr val="0A0A0A"/>
+                      </a:solidFill>
+                    </a:lnB>
+                    <a:solidFill>
+                      <a:srgbClr val="E3EBF4"/>
+                    </a:solidFill>
+                  </a:tcPr>
+                </a:tc>
+                <a:tc>
+                  <a:txBody>
+                    <a:bodyPr wrap="square" lIns="73152" rIns="54864" tIns="0" bIns="0" anchor="ctr"/>
+                    <a:lstStyle/>
+                    <a:p>
+                      <a:pPr algn="ctr">
+                        <a:lnSpc>
+                          <a:spcPct val="100000"/>
+                        </a:lnSpc>
+                      </a:pPr>
+                      <a:r>
+                        <a:rPr sz="800" b="1">
+                          <a:solidFill>
+                            <a:srgbClr val="1F4E79"/>
+                          </a:solidFill>
+                          <a:latin typeface="微软雅黑"/>
+                          <a:ea typeface="微软雅黑"/>
+                        </a:rPr>
+                        <a:t>价值好(1/2)</a:t>
+                      </a:r>
+                    </a:p>
+                  </a:txBody>
+                  <a:tcPr>
+                    <a:lnB w="19050" cap="flat">
+                      <a:solidFill>
+                        <a:srgbClr val="0A0A0A"/>
+                      </a:solidFill>
+                    </a:lnB>
+                    <a:solidFill>
+                      <a:srgbClr val="E3EBF4"/>
+                    </a:solidFill>
+                  </a:tcPr>
+                </a:tc>
+                <a:tc>
+                  <a:txBody>
+                    <a:bodyPr wrap="square" lIns="73152" rIns="54864" tIns="0" bIns="0" anchor="ctr"/>
+                    <a:lstStyle/>
+                    <a:p>
+                      <a:pPr algn="l">
+                        <a:lnSpc>
+                          <a:spcPct val="100000"/>
+                        </a:lnSpc>
+                      </a:pPr>
+                      <a:r>
+                        <a:rPr sz="800" b="1">
+                          <a:solidFill>
+                            <a:srgbClr val="1F4E79"/>
+                          </a:solidFill>
+                          <a:latin typeface="微软雅黑"/>
+                          <a:ea typeface="微软雅黑"/>
+                        </a:rPr>
+                        <a:t>差异解读</a:t>
+                      </a:r>
+                    </a:p>
+                  </a:txBody>
+                  <a:tcPr>
+                    <a:lnB w="19050" cap="flat">
+                      <a:solidFill>
+                        <a:srgbClr val="0A0A0A"/>
+                      </a:solidFill>
+                    </a:lnB>
+                    <a:solidFill>
+                      <a:srgbClr val="E3EBF4"/>
+                    </a:solidFill>
+                  </a:tcPr>
+                </a:tc>
+              </a:tr>
+              <a:tr h="201168">
+                <a:tc>
+                  <a:txBody>
+                    <a:bodyPr wrap="square" lIns="73152" rIns="54864" tIns="0" bIns="0" anchor="ctr"/>
+                    <a:lstStyle/>
+                    <a:p>
+                      <a:pPr algn="l">
+                        <a:lnSpc>
+                          <a:spcPct val="100000"/>
+                        </a:lnSpc>
+                      </a:pPr>
+                      <a:r>
+                        <a:rPr sz="800" b="0">
+                          <a:solidFill>
+                            <a:srgbClr val="3D3C3A"/>
+                          </a:solidFill>
+                          <a:latin typeface="微软雅黑"/>
+                          <a:ea typeface="微软雅黑"/>
+                        </a:rPr>
+                        <a:t>工资收入总额</a:t>
+                      </a:r>
+                    </a:p>
+                  </a:txBody>
+                  <a:tcPr>
+                    <a:lnB w="9525" cap="flat">
+                      <a:solidFill>
+                        <a:srgbClr val="D6D6D6"/>
+                      </a:solidFill>
+                    </a:lnB>
+                    <a:solidFill>
+                      <a:srgbClr val="FFFFFF"/>
+                    </a:solidFill>
+                  </a:tcPr>
+                </a:tc>
+                <a:tc>
+                  <a:txBody>
+                    <a:bodyPr wrap="square" lIns="73152" rIns="54864" tIns="0" bIns="0" anchor="ctr"/>
+                    <a:lstStyle/>
+                    <a:p>
+                      <a:pPr algn="ctr">
+                        <a:lnSpc>
+                          <a:spcPct val="100000"/>
+                        </a:lnSpc>
+                      </a:pPr>
+                      <a:r>
+                        <a:rPr sz="800" b="1">
+                          <a:solidFill>
+                            <a:srgbClr val="1F4E79"/>
+                          </a:solidFill>
+                          <a:latin typeface="微软雅黑"/>
+                          <a:ea typeface="微软雅黑"/>
+                        </a:rPr>
+                        <a:t>20,922</a:t>
+                      </a:r>
+                    </a:p>
+                  </a:txBody>
+                  <a:tcPr>
+                    <a:lnB w="9525" cap="flat">
+                      <a:solidFill>
+                        <a:srgbClr val="D6D6D6"/>
+                      </a:solidFill>
+                    </a:lnB>
+                    <a:solidFill>
+                      <a:srgbClr val="FFFFFF"/>
+                    </a:solidFill>
+                  </a:tcPr>
+                </a:tc>
+                <a:tc>
+                  <a:txBody>
+                    <a:bodyPr wrap="square" lIns="73152" rIns="54864" tIns="0" bIns="0" anchor="ctr"/>
+                    <a:lstStyle/>
+                    <a:p>
+                      <a:pPr algn="ctr">
+                        <a:lnSpc>
+                          <a:spcPct val="100000"/>
+                        </a:lnSpc>
+                      </a:pPr>
+                      <a:r>
+                        <a:rPr sz="800" b="1">
+                          <a:solidFill>
+                            <a:srgbClr val="1F4E79"/>
+                          </a:solidFill>
+                          <a:latin typeface="微软雅黑"/>
+                          <a:ea typeface="微软雅黑"/>
+                        </a:rPr>
+                        <a:t>41,139</a:t>
+                      </a:r>
+                    </a:p>
+                  </a:txBody>
+                  <a:tcPr>
+                    <a:lnB w="9525" cap="flat">
+                      <a:solidFill>
+                        <a:srgbClr val="D6D6D6"/>
+                      </a:solidFill>
+                    </a:lnB>
+                    <a:solidFill>
+                      <a:srgbClr val="FFFFFF"/>
+                    </a:solidFill>
+                  </a:tcPr>
+                </a:tc>
+                <a:tc>
+                  <a:txBody>
+                    <a:bodyPr wrap="square" lIns="73152" rIns="54864" tIns="0" bIns="0" anchor="ctr"/>
+                    <a:lstStyle/>
+                    <a:p>
+                      <a:pPr algn="l">
+                        <a:lnSpc>
+                          <a:spcPct val="100000"/>
+                        </a:lnSpc>
+                      </a:pPr>
+                      <a:r>
+                        <a:rPr sz="800" b="0">
+                          <a:solidFill>
+                            <a:srgbClr val="606060"/>
+                          </a:solidFill>
+                          <a:latin typeface="微软雅黑"/>
+                          <a:ea typeface="微软雅黑"/>
+                        </a:rPr>
+                        <a:t>价值好近 2 倍——收入是价值核心</a:t>
+                      </a:r>
+                    </a:p>
+                  </a:txBody>
+                  <a:tcPr>
+                    <a:lnB w="9525" cap="flat">
+                      <a:solidFill>
+                        <a:srgbClr val="D6D6D6"/>
+                      </a:solidFill>
+                    </a:lnB>
+                    <a:solidFill>
+                      <a:srgbClr val="FFFFFF"/>
+                    </a:solidFill>
+                  </a:tcPr>
+                </a:tc>
+              </a:tr>
+              <a:tr h="201168">
+                <a:tc>
+                  <a:txBody>
+                    <a:bodyPr wrap="square" lIns="73152" rIns="54864" tIns="0" bIns="0" anchor="ctr"/>
+                    <a:lstStyle/>
+                    <a:p>
+                      <a:pPr algn="l">
+                        <a:lnSpc>
+                          <a:spcPct val="100000"/>
+                        </a:lnSpc>
+                      </a:pPr>
+                      <a:r>
+                        <a:rPr sz="800" b="0">
+                          <a:solidFill>
+                            <a:srgbClr val="3D3C3A"/>
+                          </a:solidFill>
+                          <a:latin typeface="微软雅黑"/>
+                          <a:ea typeface="微软雅黑"/>
+                        </a:rPr>
+                        <a:t>总收入金额</a:t>
+                      </a:r>
+                    </a:p>
+                  </a:txBody>
+                  <a:tcPr>
+                    <a:lnB w="9525" cap="flat">
+                      <a:solidFill>
+                        <a:srgbClr val="D6D6D6"/>
+                      </a:solidFill>
+                    </a:lnB>
+                    <a:solidFill>
+                      <a:srgbClr val="FFFFFF"/>
+                    </a:solidFill>
+                  </a:tcPr>
+                </a:tc>
+                <a:tc>
+                  <a:txBody>
+                    <a:bodyPr wrap="square" lIns="73152" rIns="54864" tIns="0" bIns="0" anchor="ctr"/>
+                    <a:lstStyle/>
+                    <a:p>
+                      <a:pPr algn="ctr">
+                        <a:lnSpc>
+                          <a:spcPct val="100000"/>
+                        </a:lnSpc>
+                      </a:pPr>
+                      <a:r>
+                        <a:rPr sz="800" b="1">
+                          <a:solidFill>
+                            <a:srgbClr val="1F4E79"/>
+                          </a:solidFill>
+                          <a:latin typeface="微软雅黑"/>
+                          <a:ea typeface="微软雅黑"/>
+                        </a:rPr>
+                        <a:t>70,151</a:t>
+                      </a:r>
+                    </a:p>
+                  </a:txBody>
+                  <a:tcPr>
+                    <a:lnB w="9525" cap="flat">
+                      <a:solidFill>
+                        <a:srgbClr val="D6D6D6"/>
+                      </a:solidFill>
+                    </a:lnB>
+                    <a:solidFill>
+                      <a:srgbClr val="FFFFFF"/>
+                    </a:solidFill>
+                  </a:tcPr>
+                </a:tc>
+                <a:tc>
+                  <a:txBody>
+                    <a:bodyPr wrap="square" lIns="73152" rIns="54864" tIns="0" bIns="0" anchor="ctr"/>
+                    <a:lstStyle/>
+                    <a:p>
+                      <a:pPr algn="ctr">
+                        <a:lnSpc>
+                          <a:spcPct val="100000"/>
+                        </a:lnSpc>
+                      </a:pPr>
+                      <a:r>
+                        <a:rPr sz="800" b="1">
+                          <a:solidFill>
+                            <a:srgbClr val="1F4E79"/>
+                          </a:solidFill>
+                          <a:latin typeface="微软雅黑"/>
+                          <a:ea typeface="微软雅黑"/>
+                        </a:rPr>
+                        <a:t>140,807</a:t>
+                      </a:r>
+                    </a:p>
+                  </a:txBody>
+                  <a:tcPr>
+                    <a:lnB w="9525" cap="flat">
+                      <a:solidFill>
+                        <a:srgbClr val="D6D6D6"/>
+                      </a:solidFill>
+                    </a:lnB>
+                    <a:solidFill>
+                      <a:srgbClr val="FFFFFF"/>
+                    </a:solidFill>
+                  </a:tcPr>
+                </a:tc>
+                <a:tc>
+                  <a:txBody>
+                    <a:bodyPr wrap="square" lIns="73152" rIns="54864" tIns="0" bIns="0" anchor="ctr"/>
+                    <a:lstStyle/>
+                    <a:p>
+                      <a:pPr algn="l">
+                        <a:lnSpc>
+                          <a:spcPct val="100000"/>
+                        </a:lnSpc>
+                      </a:pPr>
+                      <a:r>
+                        <a:rPr sz="800" b="0">
+                          <a:solidFill>
+                            <a:srgbClr val="606060"/>
+                          </a:solidFill>
+                          <a:latin typeface="微软雅黑"/>
+                          <a:ea typeface="微软雅黑"/>
+                        </a:rPr>
+                        <a:t>价值好近 2 倍——资金体量差距明显</a:t>
+                      </a:r>
+                    </a:p>
+                  </a:txBody>
+                  <a:tcPr>
+                    <a:lnB w="9525" cap="flat">
+                      <a:solidFill>
+                        <a:srgbClr val="D6D6D6"/>
+                      </a:solidFill>
+                    </a:lnB>
+                    <a:solidFill>
+                      <a:srgbClr val="FFFFFF"/>
+                    </a:solidFill>
+                  </a:tcPr>
+                </a:tc>
+              </a:tr>
+              <a:tr h="201168">
+                <a:tc>
+                  <a:txBody>
+                    <a:bodyPr wrap="square" lIns="73152" rIns="54864" tIns="0" bIns="0" anchor="ctr"/>
+                    <a:lstStyle/>
+                    <a:p>
+                      <a:pPr algn="l">
+                        <a:lnSpc>
+                          <a:spcPct val="100000"/>
+                        </a:lnSpc>
+                      </a:pPr>
+                      <a:r>
+                        <a:rPr sz="800" b="0">
+                          <a:solidFill>
+                            <a:srgbClr val="3D3C3A"/>
+                          </a:solidFill>
+                          <a:latin typeface="微软雅黑"/>
+                          <a:ea typeface="微软雅黑"/>
+                        </a:rPr>
+                        <a:t>工资入账次数</a:t>
+                      </a:r>
+                    </a:p>
+                  </a:txBody>
+                  <a:tcPr>
+                    <a:lnB w="9525" cap="flat">
+                      <a:solidFill>
+                        <a:srgbClr val="D6D6D6"/>
+                      </a:solidFill>
+                    </a:lnB>
+                    <a:solidFill>
+                      <a:srgbClr val="FFFFFF"/>
+                    </a:solidFill>
+                  </a:tcPr>
+                </a:tc>
+                <a:tc>
+                  <a:txBody>
+                    <a:bodyPr wrap="square" lIns="73152" rIns="54864" tIns="0" bIns="0" anchor="ctr"/>
+                    <a:lstStyle/>
+                    <a:p>
+                      <a:pPr algn="ctr">
+                        <a:lnSpc>
+                          <a:spcPct val="100000"/>
+                        </a:lnSpc>
+                      </a:pPr>
+                      <a:r>
+                        <a:rPr sz="800" b="1">
+                          <a:solidFill>
+                            <a:srgbClr val="1F4E79"/>
+                          </a:solidFill>
+                          <a:latin typeface="微软雅黑"/>
+                          <a:ea typeface="微软雅黑"/>
+                        </a:rPr>
+                        <a:t>13.7</a:t>
+                      </a:r>
+                    </a:p>
+                  </a:txBody>
+                  <a:tcPr>
+                    <a:lnB w="9525" cap="flat">
+                      <a:solidFill>
+                        <a:srgbClr val="D6D6D6"/>
+                      </a:solidFill>
+                    </a:lnB>
+                    <a:solidFill>
+                      <a:srgbClr val="FFFFFF"/>
+                    </a:solidFill>
+                  </a:tcPr>
+                </a:tc>
+                <a:tc>
+                  <a:txBody>
+                    <a:bodyPr wrap="square" lIns="73152" rIns="54864" tIns="0" bIns="0" anchor="ctr"/>
+                    <a:lstStyle/>
+                    <a:p>
+                      <a:pPr algn="ctr">
+                        <a:lnSpc>
+                          <a:spcPct val="100000"/>
+                        </a:lnSpc>
+                      </a:pPr>
+                      <a:r>
+                        <a:rPr sz="800" b="1">
+                          <a:solidFill>
+                            <a:srgbClr val="1F4E79"/>
+                          </a:solidFill>
+                          <a:latin typeface="微软雅黑"/>
+                          <a:ea typeface="微软雅黑"/>
+                        </a:rPr>
+                        <a:t>20.5</a:t>
+                      </a:r>
+                    </a:p>
+                  </a:txBody>
+                  <a:tcPr>
+                    <a:lnB w="9525" cap="flat">
+                      <a:solidFill>
+                        <a:srgbClr val="D6D6D6"/>
+                      </a:solidFill>
+                    </a:lnB>
+                    <a:solidFill>
+                      <a:srgbClr val="FFFFFF"/>
+                    </a:solidFill>
+                  </a:tcPr>
+                </a:tc>
+                <a:tc>
+                  <a:txBody>
+                    <a:bodyPr wrap="square" lIns="73152" rIns="54864" tIns="0" bIns="0" anchor="ctr"/>
+                    <a:lstStyle/>
+                    <a:p>
+                      <a:pPr algn="l">
+                        <a:lnSpc>
+                          <a:spcPct val="100000"/>
+                        </a:lnSpc>
+                      </a:pPr>
+                      <a:r>
+                        <a:rPr sz="800" b="0">
+                          <a:solidFill>
+                            <a:srgbClr val="606060"/>
+                          </a:solidFill>
+                          <a:latin typeface="微软雅黑"/>
+                          <a:ea typeface="微软雅黑"/>
+                        </a:rPr>
+                        <a:t>价值好更频繁——现金流更连续</a:t>
+                      </a:r>
+                    </a:p>
+                  </a:txBody>
+                  <a:tcPr>
+                    <a:lnB w="9525" cap="flat">
+                      <a:solidFill>
+                        <a:srgbClr val="D6D6D6"/>
+                      </a:solidFill>
+                    </a:lnB>
+                    <a:solidFill>
+                      <a:srgbClr val="FFFFFF"/>
+                    </a:solidFill>
+                  </a:tcPr>
+                </a:tc>
+              </a:tr>
+              <a:tr h="201168">
+                <a:tc>
+                  <a:txBody>
+                    <a:bodyPr wrap="square" lIns="73152" rIns="54864" tIns="0" bIns="0" anchor="ctr"/>
+                    <a:lstStyle/>
+                    <a:p>
+                      <a:pPr algn="l">
+                        <a:lnSpc>
+                          <a:spcPct val="100000"/>
+                        </a:lnSpc>
+                      </a:pPr>
+                      <a:r>
+                        <a:rPr sz="800" b="0">
+                          <a:solidFill>
+                            <a:srgbClr val="3D3C3A"/>
+                          </a:solidFill>
+                          <a:latin typeface="微软雅黑"/>
+                          <a:ea typeface="微软雅黑"/>
+                        </a:rPr>
+                        <a:t>主行业入账金额</a:t>
+                      </a:r>
+                    </a:p>
+                  </a:txBody>
+                  <a:tcPr>
+                    <a:lnB w="9525" cap="flat">
+                      <a:solidFill>
+                        <a:srgbClr val="D6D6D6"/>
+                      </a:solidFill>
+                    </a:lnB>
+                    <a:solidFill>
+                      <a:srgbClr val="FFFFFF"/>
+                    </a:solidFill>
+                  </a:tcPr>
+                </a:tc>
+                <a:tc>
+                  <a:txBody>
+                    <a:bodyPr wrap="square" lIns="73152" rIns="54864" tIns="0" bIns="0" anchor="ctr"/>
+                    <a:lstStyle/>
+                    <a:p>
+                      <a:pPr algn="ctr">
+                        <a:lnSpc>
+                          <a:spcPct val="100000"/>
+                        </a:lnSpc>
+                      </a:pPr>
+                      <a:r>
+                        <a:rPr sz="800" b="1">
+                          <a:solidFill>
+                            <a:srgbClr val="1F4E79"/>
+                          </a:solidFill>
+                          <a:latin typeface="微软雅黑"/>
+                          <a:ea typeface="微软雅黑"/>
+                        </a:rPr>
+                        <a:t>24,203</a:t>
+                      </a:r>
+                    </a:p>
+                  </a:txBody>
+                  <a:tcPr>
+                    <a:lnB w="9525" cap="flat">
+                      <a:solidFill>
+                        <a:srgbClr val="D6D6D6"/>
+                      </a:solidFill>
+                    </a:lnB>
+                    <a:solidFill>
+                      <a:srgbClr val="FFFFFF"/>
+                    </a:solidFill>
+                  </a:tcPr>
+                </a:tc>
+                <a:tc>
+                  <a:txBody>
+                    <a:bodyPr wrap="square" lIns="73152" rIns="54864" tIns="0" bIns="0" anchor="ctr"/>
+                    <a:lstStyle/>
+                    <a:p>
+                      <a:pPr algn="ctr">
+                        <a:lnSpc>
+                          <a:spcPct val="100000"/>
+                        </a:lnSpc>
+                      </a:pPr>
+                      <a:r>
+                        <a:rPr sz="800" b="1">
+                          <a:solidFill>
+                            <a:srgbClr val="1F4E79"/>
+                          </a:solidFill>
+                          <a:latin typeface="微软雅黑"/>
+                          <a:ea typeface="微软雅黑"/>
+                        </a:rPr>
+                        <a:t>40,916</a:t>
+                      </a:r>
+                    </a:p>
+                  </a:txBody>
+                  <a:tcPr>
+                    <a:lnB w="9525" cap="flat">
+                      <a:solidFill>
+                        <a:srgbClr val="D6D6D6"/>
+                      </a:solidFill>
+                    </a:lnB>
+                    <a:solidFill>
+                      <a:srgbClr val="FFFFFF"/>
+                    </a:solidFill>
+                  </a:tcPr>
+                </a:tc>
+                <a:tc>
+                  <a:txBody>
+                    <a:bodyPr wrap="square" lIns="73152" rIns="54864" tIns="0" bIns="0" anchor="ctr"/>
+                    <a:lstStyle/>
+                    <a:p>
+                      <a:pPr algn="l">
+                        <a:lnSpc>
+                          <a:spcPct val="100000"/>
+                        </a:lnSpc>
+                      </a:pPr>
+                      <a:r>
+                        <a:rPr sz="800" b="0">
+                          <a:solidFill>
+                            <a:srgbClr val="606060"/>
+                          </a:solidFill>
+                          <a:latin typeface="微软雅黑"/>
+                          <a:ea typeface="微软雅黑"/>
+                        </a:rPr>
+                        <a:t>价值好约 1.7 倍——主业收入更强</a:t>
+                      </a:r>
+                    </a:p>
+                  </a:txBody>
+                  <a:tcPr>
+                    <a:lnB w="9525" cap="flat">
+                      <a:solidFill>
+                        <a:srgbClr val="D6D6D6"/>
+                      </a:solidFill>
+                    </a:lnB>
+                    <a:solidFill>
+                      <a:srgbClr val="FFFFFF"/>
+                    </a:solidFill>
+                  </a:tcPr>
+                </a:tc>
+              </a:tr>
+              <a:tr h="201168">
+                <a:tc>
+                  <a:txBody>
+                    <a:bodyPr wrap="square" lIns="73152" rIns="54864" tIns="0" bIns="0" anchor="ctr"/>
+                    <a:lstStyle/>
+                    <a:p>
+                      <a:pPr algn="l">
+                        <a:lnSpc>
+                          <a:spcPct val="100000"/>
+                        </a:lnSpc>
+                      </a:pPr>
+                      <a:r>
+                        <a:rPr sz="800" b="0">
+                          <a:solidFill>
+                            <a:srgbClr val="3D3C3A"/>
+                          </a:solidFill>
+                          <a:latin typeface="微软雅黑"/>
+                          <a:ea typeface="微软雅黑"/>
+                        </a:rPr>
+                        <a:t>Centrelink收入占比</a:t>
+                      </a:r>
+                    </a:p>
+                  </a:txBody>
+                  <a:tcPr>
+                    <a:lnB w="9525" cap="flat">
+                      <a:solidFill>
+                        <a:srgbClr val="D6D6D6"/>
+                      </a:solidFill>
+                    </a:lnB>
+                    <a:solidFill>
+                      <a:srgbClr val="FFFFFF"/>
+                    </a:solidFill>
+                  </a:tcPr>
+                </a:tc>
+                <a:tc>
+                  <a:txBody>
+                    <a:bodyPr wrap="square" lIns="73152" rIns="54864" tIns="0" bIns="0" anchor="ctr"/>
+                    <a:lstStyle/>
+                    <a:p>
+                      <a:pPr algn="ctr">
+                        <a:lnSpc>
+                          <a:spcPct val="100000"/>
+                        </a:lnSpc>
+                      </a:pPr>
+                      <a:r>
+                        <a:rPr sz="800" b="1">
+                          <a:solidFill>
+                            <a:srgbClr val="1F4E79"/>
+                          </a:solidFill>
+                          <a:latin typeface="微软雅黑"/>
+                          <a:ea typeface="微软雅黑"/>
+                        </a:rPr>
+                        <a:t>10.2%</a:t>
+                      </a:r>
+                    </a:p>
+                  </a:txBody>
+                  <a:tcPr>
+                    <a:lnB w="9525" cap="flat">
+                      <a:solidFill>
+                        <a:srgbClr val="D6D6D6"/>
+                      </a:solidFill>
+                    </a:lnB>
+                    <a:solidFill>
+                      <a:srgbClr val="FFFFFF"/>
+                    </a:solidFill>
+                  </a:tcPr>
+                </a:tc>
+                <a:tc>
+                  <a:txBody>
+                    <a:bodyPr wrap="square" lIns="73152" rIns="54864" tIns="0" bIns="0" anchor="ctr"/>
+                    <a:lstStyle/>
+                    <a:p>
+                      <a:pPr algn="ctr">
+                        <a:lnSpc>
+                          <a:spcPct val="100000"/>
+                        </a:lnSpc>
+                      </a:pPr>
+                      <a:r>
+                        <a:rPr sz="800" b="1">
+                          <a:solidFill>
+                            <a:srgbClr val="1F4E79"/>
+                          </a:solidFill>
+                          <a:latin typeface="微软雅黑"/>
+                          <a:ea typeface="微软雅黑"/>
+                        </a:rPr>
+                        <a:t>2.1%</a:t>
+                      </a:r>
+                    </a:p>
+                  </a:txBody>
+                  <a:tcPr>
+                    <a:lnB w="9525" cap="flat">
+                      <a:solidFill>
+                        <a:srgbClr val="D6D6D6"/>
+                      </a:solidFill>
+                    </a:lnB>
+                    <a:solidFill>
+                      <a:srgbClr val="FFFFFF"/>
+                    </a:solidFill>
+                  </a:tcPr>
+                </a:tc>
+                <a:tc>
+                  <a:txBody>
+                    <a:bodyPr wrap="square" lIns="73152" rIns="54864" tIns="0" bIns="0" anchor="ctr"/>
+                    <a:lstStyle/>
+                    <a:p>
+                      <a:pPr algn="l">
+                        <a:lnSpc>
+                          <a:spcPct val="100000"/>
+                        </a:lnSpc>
+                      </a:pPr>
+                      <a:r>
+                        <a:rPr sz="800" b="0">
+                          <a:solidFill>
+                            <a:srgbClr val="606060"/>
+                          </a:solidFill>
+                          <a:latin typeface="微软雅黑"/>
+                          <a:ea typeface="微软雅黑"/>
+                        </a:rPr>
+                        <a:t>风险好更高——收入结构偏福利/保守</a:t>
+                      </a:r>
+                    </a:p>
+                  </a:txBody>
+                  <a:tcPr>
+                    <a:lnB w="9525" cap="flat">
+                      <a:solidFill>
+                        <a:srgbClr val="D6D6D6"/>
+                      </a:solidFill>
+                    </a:lnB>
+                    <a:solidFill>
+                      <a:srgbClr val="FFFFFF"/>
+                    </a:solidFill>
+                  </a:tcPr>
+                </a:tc>
+              </a:tr>
+              <a:tr h="201168">
+                <a:tc>
+                  <a:txBody>
+                    <a:bodyPr wrap="square" lIns="73152" rIns="54864" tIns="0" bIns="0" anchor="ctr"/>
+                    <a:lstStyle/>
+                    <a:p>
+                      <a:pPr algn="l">
+                        <a:lnSpc>
+                          <a:spcPct val="100000"/>
+                        </a:lnSpc>
+                      </a:pPr>
+                      <a:r>
+                        <a:rPr sz="800" b="0">
+                          <a:solidFill>
+                            <a:srgbClr val="3D3C3A"/>
+                          </a:solidFill>
+                          <a:latin typeface="微软雅黑"/>
+                          <a:ea typeface="微软雅黑"/>
+                        </a:rPr>
+                        <a:t>发薪周期标准差</a:t>
+                      </a:r>
+                    </a:p>
+                  </a:txBody>
+                  <a:tcPr>
+                    <a:lnB w="9525" cap="flat">
+                      <a:solidFill>
+                        <a:srgbClr val="D6D6D6"/>
+                      </a:solidFill>
+                    </a:lnB>
+                    <a:solidFill>
+                      <a:srgbClr val="FFFFFF"/>
+                    </a:solidFill>
+                  </a:tcPr>
+                </a:tc>
+                <a:tc>
+                  <a:txBody>
+                    <a:bodyPr wrap="square" lIns="73152" rIns="54864" tIns="0" bIns="0" anchor="ctr"/>
+                    <a:lstStyle/>
+                    <a:p>
+                      <a:pPr algn="ctr">
+                        <a:lnSpc>
+                          <a:spcPct val="100000"/>
+                        </a:lnSpc>
+                      </a:pPr>
+                      <a:r>
+                        <a:rPr sz="800" b="1">
+                          <a:solidFill>
+                            <a:srgbClr val="1F4E79"/>
+                          </a:solidFill>
+                          <a:latin typeface="微软雅黑"/>
+                          <a:ea typeface="微软雅黑"/>
+                        </a:rPr>
+                        <a:t>2.99</a:t>
+                      </a:r>
+                    </a:p>
+                  </a:txBody>
+                  <a:tcPr>
+                    <a:lnB w="9525" cap="flat">
+                      <a:solidFill>
+                        <a:srgbClr val="D6D6D6"/>
+                      </a:solidFill>
+                    </a:lnB>
+                    <a:solidFill>
+                      <a:srgbClr val="FFFFFF"/>
+                    </a:solidFill>
+                  </a:tcPr>
+                </a:tc>
+                <a:tc>
+                  <a:txBody>
+                    <a:bodyPr wrap="square" lIns="73152" rIns="54864" tIns="0" bIns="0" anchor="ctr"/>
+                    <a:lstStyle/>
+                    <a:p>
+                      <a:pPr algn="ctr">
+                        <a:lnSpc>
+                          <a:spcPct val="100000"/>
+                        </a:lnSpc>
+                      </a:pPr>
+                      <a:r>
+                        <a:rPr sz="800" b="1">
+                          <a:solidFill>
+                            <a:srgbClr val="1F4E79"/>
+                          </a:solidFill>
+                          <a:latin typeface="微软雅黑"/>
+                          <a:ea typeface="微软雅黑"/>
+                        </a:rPr>
+                        <a:t>2.72</a:t>
+                      </a:r>
+                    </a:p>
+                  </a:txBody>
+                  <a:tcPr>
+                    <a:lnB w="9525" cap="flat">
+                      <a:solidFill>
+                        <a:srgbClr val="D6D6D6"/>
+                      </a:solidFill>
+                    </a:lnB>
+                    <a:solidFill>
+                      <a:srgbClr val="FFFFFF"/>
+                    </a:solidFill>
+                  </a:tcPr>
+                </a:tc>
+                <a:tc>
+                  <a:txBody>
+                    <a:bodyPr wrap="square" lIns="73152" rIns="54864" tIns="0" bIns="0" anchor="ctr"/>
+                    <a:lstStyle/>
+                    <a:p>
+                      <a:pPr algn="l">
+                        <a:lnSpc>
+                          <a:spcPct val="100000"/>
+                        </a:lnSpc>
+                      </a:pPr>
+                      <a:r>
+                        <a:rPr sz="800" b="0">
+                          <a:solidFill>
+                            <a:srgbClr val="606060"/>
+                          </a:solidFill>
+                          <a:latin typeface="微软雅黑"/>
+                          <a:ea typeface="微软雅黑"/>
+                        </a:rPr>
+                        <a:t>价值好更稳定(数值更小)</a:t>
+                      </a:r>
+                    </a:p>
+                  </a:txBody>
+                  <a:tcPr>
+                    <a:lnB w="9525" cap="flat">
+                      <a:solidFill>
+                        <a:srgbClr val="D6D6D6"/>
+                      </a:solidFill>
+                    </a:lnB>
+                    <a:solidFill>
+                      <a:srgbClr val="FFFFFF"/>
+                    </a:solidFill>
+                  </a:tcPr>
+                </a:tc>
+              </a:tr>
+              <a:tr h="201168">
+                <a:tc>
+                  <a:txBody>
+                    <a:bodyPr wrap="square" lIns="73152" rIns="54864" tIns="0" bIns="0" anchor="ctr"/>
+                    <a:lstStyle/>
+                    <a:p>
+                      <a:pPr algn="l">
+                        <a:lnSpc>
+                          <a:spcPct val="100000"/>
+                        </a:lnSpc>
+                      </a:pPr>
+                      <a:r>
+                        <a:rPr sz="800" b="0">
+                          <a:solidFill>
+                            <a:srgbClr val="3D3C3A"/>
+                          </a:solidFill>
+                          <a:latin typeface="微软雅黑"/>
+                          <a:ea typeface="微软雅黑"/>
+                        </a:rPr>
+                        <a:t>总支出金额</a:t>
+                      </a:r>
+                    </a:p>
+                  </a:txBody>
+                  <a:tcPr>
+                    <a:lnB w="9525" cap="flat">
+                      <a:solidFill>
+                        <a:srgbClr val="D6D6D6"/>
+                      </a:solidFill>
+                    </a:lnB>
+                    <a:solidFill>
+                      <a:srgbClr val="FFFFFF"/>
+                    </a:solidFill>
+                  </a:tcPr>
+                </a:tc>
+                <a:tc>
+                  <a:txBody>
+                    <a:bodyPr wrap="square" lIns="73152" rIns="54864" tIns="0" bIns="0" anchor="ctr"/>
+                    <a:lstStyle/>
+                    <a:p>
+                      <a:pPr algn="ctr">
+                        <a:lnSpc>
+                          <a:spcPct val="100000"/>
+                        </a:lnSpc>
+                      </a:pPr>
+                      <a:r>
+                        <a:rPr sz="800" b="1">
+                          <a:solidFill>
+                            <a:srgbClr val="1F4E79"/>
+                          </a:solidFill>
+                          <a:latin typeface="微软雅黑"/>
+                          <a:ea typeface="微软雅黑"/>
+                        </a:rPr>
+                        <a:t>66,684</a:t>
+                      </a:r>
+                    </a:p>
+                  </a:txBody>
+                  <a:tcPr>
+                    <a:lnB w="9525" cap="flat">
+                      <a:solidFill>
+                        <a:srgbClr val="D6D6D6"/>
+                      </a:solidFill>
+                    </a:lnB>
+                    <a:solidFill>
+                      <a:srgbClr val="FFFFFF"/>
+                    </a:solidFill>
+                  </a:tcPr>
+                </a:tc>
+                <a:tc>
+                  <a:txBody>
+                    <a:bodyPr wrap="square" lIns="73152" rIns="54864" tIns="0" bIns="0" anchor="ctr"/>
+                    <a:lstStyle/>
+                    <a:p>
+                      <a:pPr algn="ctr">
+                        <a:lnSpc>
+                          <a:spcPct val="100000"/>
+                        </a:lnSpc>
+                      </a:pPr>
+                      <a:r>
+                        <a:rPr sz="800" b="1">
+                          <a:solidFill>
+                            <a:srgbClr val="1F4E79"/>
+                          </a:solidFill>
+                          <a:latin typeface="微软雅黑"/>
+                          <a:ea typeface="微软雅黑"/>
+                        </a:rPr>
+                        <a:t>139,715</a:t>
+                      </a:r>
+                    </a:p>
+                  </a:txBody>
+                  <a:tcPr>
+                    <a:lnB w="9525" cap="flat">
+                      <a:solidFill>
+                        <a:srgbClr val="D6D6D6"/>
+                      </a:solidFill>
+                    </a:lnB>
+                    <a:solidFill>
+                      <a:srgbClr val="FFFFFF"/>
+                    </a:solidFill>
+                  </a:tcPr>
+                </a:tc>
+                <a:tc>
+                  <a:txBody>
+                    <a:bodyPr wrap="square" lIns="73152" rIns="54864" tIns="0" bIns="0" anchor="ctr"/>
+                    <a:lstStyle/>
+                    <a:p>
+                      <a:pPr algn="l">
+                        <a:lnSpc>
+                          <a:spcPct val="100000"/>
+                        </a:lnSpc>
+                      </a:pPr>
+                      <a:r>
+                        <a:rPr sz="800" b="0">
+                          <a:solidFill>
+                            <a:srgbClr val="606060"/>
+                          </a:solidFill>
+                          <a:latin typeface="微软雅黑"/>
+                          <a:ea typeface="微软雅黑"/>
+                        </a:rPr>
+                        <a:t>价值好更高——资金进出体量更大</a:t>
+                      </a:r>
+                    </a:p>
+                  </a:txBody>
+                  <a:tcPr>
+                    <a:lnB w="9525" cap="flat">
+                      <a:solidFill>
+                        <a:srgbClr val="D6D6D6"/>
+                      </a:solidFill>
+                    </a:lnB>
+                    <a:solidFill>
+                      <a:srgbClr val="FFFFFF"/>
+                    </a:solidFill>
+                  </a:tcPr>
+                </a:tc>
+              </a:tr>
+              <a:tr h="201168">
+                <a:tc>
+                  <a:txBody>
+                    <a:bodyPr wrap="square" lIns="73152" rIns="54864" tIns="0" bIns="0" anchor="ctr"/>
+                    <a:lstStyle/>
+                    <a:p>
+                      <a:pPr algn="l">
+                        <a:lnSpc>
+                          <a:spcPct val="100000"/>
+                        </a:lnSpc>
+                      </a:pPr>
+                      <a:r>
+                        <a:rPr sz="800" b="0">
+                          <a:solidFill>
+                            <a:srgbClr val="3D3C3A"/>
+                          </a:solidFill>
+                          <a:latin typeface="微软雅黑"/>
+                          <a:ea typeface="微软雅黑"/>
+                        </a:rPr>
+                        <a:t>赌博支出占比</a:t>
+                      </a:r>
+                    </a:p>
+                  </a:txBody>
+                  <a:tcPr>
+                    <a:lnB w="9525" cap="flat">
+                      <a:solidFill>
+                        <a:srgbClr val="D6D6D6"/>
+                      </a:solidFill>
+                    </a:lnB>
+                    <a:solidFill>
+                      <a:srgbClr val="FFFFFF"/>
+                    </a:solidFill>
+                  </a:tcPr>
+                </a:tc>
+                <a:tc>
+                  <a:txBody>
+                    <a:bodyPr wrap="square" lIns="73152" rIns="54864" tIns="0" bIns="0" anchor="ctr"/>
+                    <a:lstStyle/>
+                    <a:p>
+                      <a:pPr algn="ctr">
+                        <a:lnSpc>
+                          <a:spcPct val="100000"/>
+                        </a:lnSpc>
+                      </a:pPr>
+                      <a:r>
+                        <a:rPr sz="800" b="1">
+                          <a:solidFill>
+                            <a:srgbClr val="1F4E79"/>
+                          </a:solidFill>
+                          <a:latin typeface="微软雅黑"/>
+                          <a:ea typeface="微软雅黑"/>
+                        </a:rPr>
+                        <a:t>2.0%</a:t>
+                      </a:r>
+                    </a:p>
+                  </a:txBody>
+                  <a:tcPr>
+                    <a:lnB w="9525" cap="flat">
+                      <a:solidFill>
+                        <a:srgbClr val="D6D6D6"/>
+                      </a:solidFill>
+                    </a:lnB>
+                    <a:solidFill>
+                      <a:srgbClr val="FFFFFF"/>
+                    </a:solidFill>
+                  </a:tcPr>
+                </a:tc>
+                <a:tc>
+                  <a:txBody>
+                    <a:bodyPr wrap="square" lIns="73152" rIns="54864" tIns="0" bIns="0" anchor="ctr"/>
+                    <a:lstStyle/>
+                    <a:p>
+                      <a:pPr algn="ctr">
+                        <a:lnSpc>
+                          <a:spcPct val="100000"/>
+                        </a:lnSpc>
+                      </a:pPr>
+                      <a:r>
+                        <a:rPr sz="800" b="1">
+                          <a:solidFill>
+                            <a:srgbClr val="1F4E79"/>
+                          </a:solidFill>
+                          <a:latin typeface="微软雅黑"/>
+                          <a:ea typeface="微软雅黑"/>
+                        </a:rPr>
+                        <a:t>3.8%</a:t>
+                      </a:r>
+                    </a:p>
+                  </a:txBody>
+                  <a:tcPr>
+                    <a:lnB w="9525" cap="flat">
+                      <a:solidFill>
+                        <a:srgbClr val="D6D6D6"/>
+                      </a:solidFill>
+                    </a:lnB>
+                    <a:solidFill>
+                      <a:srgbClr val="FFFFFF"/>
+                    </a:solidFill>
+                  </a:tcPr>
+                </a:tc>
+                <a:tc>
+                  <a:txBody>
+                    <a:bodyPr wrap="square" lIns="73152" rIns="54864" tIns="0" bIns="0" anchor="ctr"/>
+                    <a:lstStyle/>
+                    <a:p>
+                      <a:pPr algn="l">
+                        <a:lnSpc>
+                          <a:spcPct val="100000"/>
+                        </a:lnSpc>
+                      </a:pPr>
+                      <a:r>
+                        <a:rPr sz="800" b="0">
+                          <a:solidFill>
+                            <a:srgbClr val="606060"/>
+                          </a:solidFill>
+                          <a:latin typeface="微软雅黑"/>
+                          <a:ea typeface="微软雅黑"/>
+                        </a:rPr>
+                        <a:t>风险好更低——消费风险偏好弱</a:t>
+                      </a:r>
+                    </a:p>
+                  </a:txBody>
+                  <a:tcPr>
+                    <a:lnB w="9525" cap="flat">
+                      <a:solidFill>
+                        <a:srgbClr val="D6D6D6"/>
+                      </a:solidFill>
+                    </a:lnB>
+                    <a:solidFill>
+                      <a:srgbClr val="FFFFFF"/>
+                    </a:solidFill>
+                  </a:tcPr>
+                </a:tc>
+              </a:tr>
+              <a:tr h="201168">
+                <a:tc>
+                  <a:txBody>
+                    <a:bodyPr wrap="square" lIns="73152" rIns="54864" tIns="0" bIns="0" anchor="ctr"/>
+                    <a:lstStyle/>
+                    <a:p>
+                      <a:pPr algn="l">
+                        <a:lnSpc>
+                          <a:spcPct val="100000"/>
+                        </a:lnSpc>
+                      </a:pPr>
+                      <a:r>
+                        <a:rPr sz="800" b="0">
+                          <a:solidFill>
+                            <a:srgbClr val="3D3C3A"/>
+                          </a:solidFill>
+                          <a:latin typeface="微软雅黑"/>
+                          <a:ea typeface="微软雅黑"/>
+                        </a:rPr>
+                        <a:t>余额波动标准差</a:t>
+                      </a:r>
+                    </a:p>
+                  </a:txBody>
+                  <a:tcPr>
+                    <a:lnB w="9525" cap="flat">
+                      <a:solidFill>
+                        <a:srgbClr val="D6D6D6"/>
+                      </a:solidFill>
+                    </a:lnB>
+                    <a:solidFill>
+                      <a:srgbClr val="FFFFFF"/>
+                    </a:solidFill>
+                  </a:tcPr>
+                </a:tc>
+                <a:tc>
+                  <a:txBody>
+                    <a:bodyPr wrap="square" lIns="73152" rIns="54864" tIns="0" bIns="0" anchor="ctr"/>
+                    <a:lstStyle/>
+                    <a:p>
+                      <a:pPr algn="ctr">
+                        <a:lnSpc>
+                          <a:spcPct val="100000"/>
+                        </a:lnSpc>
+                      </a:pPr>
+                      <a:r>
+                        <a:rPr sz="800" b="1">
+                          <a:solidFill>
+                            <a:srgbClr val="1F4E79"/>
+                          </a:solidFill>
+                          <a:latin typeface="微软雅黑"/>
+                          <a:ea typeface="微软雅黑"/>
+                        </a:rPr>
+                        <a:t>2,688</a:t>
+                      </a:r>
+                    </a:p>
+                  </a:txBody>
+                  <a:tcPr>
+                    <a:lnB w="9525" cap="flat">
+                      <a:solidFill>
+                        <a:srgbClr val="D6D6D6"/>
+                      </a:solidFill>
+                    </a:lnB>
+                    <a:solidFill>
+                      <a:srgbClr val="FFFFFF"/>
+                    </a:solidFill>
+                  </a:tcPr>
+                </a:tc>
+                <a:tc>
+                  <a:txBody>
+                    <a:bodyPr wrap="square" lIns="73152" rIns="54864" tIns="0" bIns="0" anchor="ctr"/>
+                    <a:lstStyle/>
+                    <a:p>
+                      <a:pPr algn="ctr">
+                        <a:lnSpc>
+                          <a:spcPct val="100000"/>
+                        </a:lnSpc>
+                      </a:pPr>
+                      <a:r>
+                        <a:rPr sz="800" b="1">
+                          <a:solidFill>
+                            <a:srgbClr val="1F4E79"/>
+                          </a:solidFill>
+                          <a:latin typeface="微软雅黑"/>
+                          <a:ea typeface="微软雅黑"/>
+                        </a:rPr>
+                        <a:t>6,360</a:t>
+                      </a:r>
+                    </a:p>
+                  </a:txBody>
+                  <a:tcPr>
+                    <a:lnB w="9525" cap="flat">
+                      <a:solidFill>
+                        <a:srgbClr val="D6D6D6"/>
+                      </a:solidFill>
+                    </a:lnB>
+                    <a:solidFill>
+                      <a:srgbClr val="FFFFFF"/>
+                    </a:solidFill>
+                  </a:tcPr>
+                </a:tc>
+                <a:tc>
+                  <a:txBody>
+                    <a:bodyPr wrap="square" lIns="73152" rIns="54864" tIns="0" bIns="0" anchor="ctr"/>
+                    <a:lstStyle/>
+                    <a:p>
+                      <a:pPr algn="l">
+                        <a:lnSpc>
+                          <a:spcPct val="100000"/>
+                        </a:lnSpc>
+                      </a:pPr>
+                      <a:r>
+                        <a:rPr sz="800" b="0">
+                          <a:solidFill>
+                            <a:srgbClr val="606060"/>
+                          </a:solidFill>
+                          <a:latin typeface="微软雅黑"/>
+                          <a:ea typeface="微软雅黑"/>
+                        </a:rPr>
+                        <a:t>风险好更小——账户波动低</a:t>
+                      </a:r>
+                    </a:p>
+                  </a:txBody>
+                  <a:tcPr>
+                    <a:lnB w="9525" cap="flat">
+                      <a:solidFill>
+                        <a:srgbClr val="D6D6D6"/>
+                      </a:solidFill>
+                    </a:lnB>
+                    <a:solidFill>
+                      <a:srgbClr val="FFFFFF"/>
+                    </a:solidFill>
+                  </a:tcPr>
+                </a:tc>
+              </a:tr>
+              <a:tr h="201168">
+                <a:tc>
+                  <a:txBody>
+                    <a:bodyPr wrap="square" lIns="73152" rIns="54864" tIns="0" bIns="0" anchor="ctr"/>
+                    <a:lstStyle/>
+                    <a:p>
+                      <a:pPr algn="l">
+                        <a:lnSpc>
+                          <a:spcPct val="100000"/>
+                        </a:lnSpc>
+                      </a:pPr>
+                      <a:r>
+                        <a:rPr sz="800" b="0">
+                          <a:solidFill>
+                            <a:srgbClr val="3D3C3A"/>
+                          </a:solidFill>
+                          <a:latin typeface="微软雅黑"/>
+                          <a:ea typeface="微软雅黑"/>
+                        </a:rPr>
+                        <a:t>信贷还款金额</a:t>
+                      </a:r>
+                    </a:p>
+                  </a:txBody>
+                  <a:tcPr>
+                    <a:lnB w="9525" cap="flat">
+                      <a:solidFill>
+                        <a:srgbClr val="D6D6D6"/>
+                      </a:solidFill>
+                    </a:lnB>
+                    <a:solidFill>
+                      <a:srgbClr val="FFFFFF"/>
+                    </a:solidFill>
+                  </a:tcPr>
+                </a:tc>
+                <a:tc>
+                  <a:txBody>
+                    <a:bodyPr wrap="square" lIns="73152" rIns="54864" tIns="0" bIns="0" anchor="ctr"/>
+                    <a:lstStyle/>
+                    <a:p>
+                      <a:pPr algn="ctr">
+                        <a:lnSpc>
+                          <a:spcPct val="100000"/>
+                        </a:lnSpc>
+                      </a:pPr>
+                      <a:r>
+                        <a:rPr sz="800" b="1">
+                          <a:solidFill>
+                            <a:srgbClr val="1F4E79"/>
+                          </a:solidFill>
+                          <a:latin typeface="微软雅黑"/>
+                          <a:ea typeface="微软雅黑"/>
+                        </a:rPr>
+                        <a:t>15,780</a:t>
+                      </a:r>
+                    </a:p>
+                  </a:txBody>
+                  <a:tcPr>
+                    <a:lnB w="9525" cap="flat">
+                      <a:solidFill>
+                        <a:srgbClr val="D6D6D6"/>
+                      </a:solidFill>
+                    </a:lnB>
+                    <a:solidFill>
+                      <a:srgbClr val="FFFFFF"/>
+                    </a:solidFill>
+                  </a:tcPr>
+                </a:tc>
+                <a:tc>
+                  <a:txBody>
+                    <a:bodyPr wrap="square" lIns="73152" rIns="54864" tIns="0" bIns="0" anchor="ctr"/>
+                    <a:lstStyle/>
+                    <a:p>
+                      <a:pPr algn="ctr">
+                        <a:lnSpc>
+                          <a:spcPct val="100000"/>
+                        </a:lnSpc>
+                      </a:pPr>
+                      <a:r>
+                        <a:rPr sz="800" b="1">
+                          <a:solidFill>
+                            <a:srgbClr val="1F4E79"/>
+                          </a:solidFill>
+                          <a:latin typeface="微软雅黑"/>
+                          <a:ea typeface="微软雅黑"/>
+                        </a:rPr>
+                        <a:t>20,439</a:t>
+                      </a:r>
+                    </a:p>
+                  </a:txBody>
+                  <a:tcPr>
+                    <a:lnB w="9525" cap="flat">
+                      <a:solidFill>
+                        <a:srgbClr val="D6D6D6"/>
+                      </a:solidFill>
+                    </a:lnB>
+                    <a:solidFill>
+                      <a:srgbClr val="FFFFFF"/>
+                    </a:solidFill>
+                  </a:tcPr>
+                </a:tc>
+                <a:tc>
+                  <a:txBody>
+                    <a:bodyPr wrap="square" lIns="73152" rIns="54864" tIns="0" bIns="0" anchor="ctr"/>
+                    <a:lstStyle/>
+                    <a:p>
+                      <a:pPr algn="l">
+                        <a:lnSpc>
+                          <a:spcPct val="100000"/>
+                        </a:lnSpc>
+                      </a:pPr>
+                      <a:r>
+                        <a:rPr sz="800" b="0">
+                          <a:solidFill>
+                            <a:srgbClr val="606060"/>
+                          </a:solidFill>
+                          <a:latin typeface="微软雅黑"/>
+                          <a:ea typeface="微软雅黑"/>
+                        </a:rPr>
+                        <a:t>价值好更高——还款体量更大</a:t>
+                      </a:r>
+                    </a:p>
+                  </a:txBody>
+                  <a:tcPr>
+                    <a:lnB w="9525" cap="flat">
+                      <a:solidFill>
+                        <a:srgbClr val="D6D6D6"/>
+                      </a:solidFill>
+                    </a:lnB>
+                    <a:solidFill>
+                      <a:srgbClr val="FFFFFF"/>
+                    </a:solidFill>
+                  </a:tcPr>
+                </a:tc>
+              </a:tr>
+              <a:tr h="201168">
+                <a:tc>
+                  <a:txBody>
+                    <a:bodyPr wrap="square" lIns="73152" rIns="54864" tIns="0" bIns="0" anchor="ctr"/>
+                    <a:lstStyle/>
+                    <a:p>
+                      <a:pPr algn="l">
+                        <a:lnSpc>
+                          <a:spcPct val="100000"/>
+                        </a:lnSpc>
+                      </a:pPr>
+                      <a:r>
+                        <a:rPr sz="800" b="0">
+                          <a:solidFill>
+                            <a:srgbClr val="3D3C3A"/>
+                          </a:solidFill>
+                          <a:latin typeface="微软雅黑"/>
+                          <a:ea typeface="微软雅黑"/>
+                        </a:rPr>
+                        <a:t>贷款还款次数</a:t>
+                      </a:r>
+                    </a:p>
+                  </a:txBody>
+                  <a:tcPr>
+                    <a:lnB w="9525" cap="flat">
+                      <a:solidFill>
+                        <a:srgbClr val="D6D6D6"/>
+                      </a:solidFill>
+                    </a:lnB>
+                    <a:solidFill>
+                      <a:srgbClr val="FFFFFF"/>
+                    </a:solidFill>
+                  </a:tcPr>
+                </a:tc>
+                <a:tc>
+                  <a:txBody>
+                    <a:bodyPr wrap="square" lIns="73152" rIns="54864" tIns="0" bIns="0" anchor="ctr"/>
+                    <a:lstStyle/>
+                    <a:p>
+                      <a:pPr algn="ctr">
+                        <a:lnSpc>
+                          <a:spcPct val="100000"/>
+                        </a:lnSpc>
+                      </a:pPr>
+                      <a:r>
+                        <a:rPr sz="800" b="1">
+                          <a:solidFill>
+                            <a:srgbClr val="1F4E79"/>
+                          </a:solidFill>
+                          <a:latin typeface="微软雅黑"/>
+                          <a:ea typeface="微软雅黑"/>
+                        </a:rPr>
+                        <a:t>25.3</a:t>
+                      </a:r>
+                    </a:p>
+                  </a:txBody>
+                  <a:tcPr>
+                    <a:lnB w="9525" cap="flat">
+                      <a:solidFill>
+                        <a:srgbClr val="D6D6D6"/>
+                      </a:solidFill>
+                    </a:lnB>
+                    <a:solidFill>
+                      <a:srgbClr val="FFFFFF"/>
+                    </a:solidFill>
+                  </a:tcPr>
+                </a:tc>
+                <a:tc>
+                  <a:txBody>
+                    <a:bodyPr wrap="square" lIns="73152" rIns="54864" tIns="0" bIns="0" anchor="ctr"/>
+                    <a:lstStyle/>
+                    <a:p>
+                      <a:pPr algn="ctr">
+                        <a:lnSpc>
+                          <a:spcPct val="100000"/>
+                        </a:lnSpc>
+                      </a:pPr>
+                      <a:r>
+                        <a:rPr sz="800" b="1">
+                          <a:solidFill>
+                            <a:srgbClr val="1F4E79"/>
+                          </a:solidFill>
+                          <a:latin typeface="微软雅黑"/>
+                          <a:ea typeface="微软雅黑"/>
+                        </a:rPr>
+                        <a:t>29.4</a:t>
+                      </a:r>
+                    </a:p>
+                  </a:txBody>
+                  <a:tcPr>
+                    <a:lnB w="9525" cap="flat">
+                      <a:solidFill>
+                        <a:srgbClr val="D6D6D6"/>
+                      </a:solidFill>
+                    </a:lnB>
+                    <a:solidFill>
+                      <a:srgbClr val="FFFFFF"/>
+                    </a:solidFill>
+                  </a:tcPr>
+                </a:tc>
+                <a:tc>
+                  <a:txBody>
+                    <a:bodyPr wrap="square" lIns="73152" rIns="54864" tIns="0" bIns="0" anchor="ctr"/>
+                    <a:lstStyle/>
+                    <a:p>
+                      <a:pPr algn="l">
+                        <a:lnSpc>
+                          <a:spcPct val="100000"/>
+                        </a:lnSpc>
+                      </a:pPr>
+                      <a:r>
+                        <a:rPr sz="800" b="0">
+                          <a:solidFill>
+                            <a:srgbClr val="606060"/>
+                          </a:solidFill>
+                          <a:latin typeface="微软雅黑"/>
+                          <a:ea typeface="微软雅黑"/>
+                        </a:rPr>
+                        <a:t>价值好略多——还款活动更活跃</a:t>
+                      </a:r>
+                    </a:p>
+                  </a:txBody>
+                  <a:tcPr>
+                    <a:lnB w="9525" cap="flat">
+                      <a:solidFill>
+                        <a:srgbClr val="D6D6D6"/>
+                      </a:solidFill>
+                    </a:lnB>
+                    <a:solidFill>
+                      <a:srgbClr val="FFFFFF"/>
+                    </a:solidFill>
+                  </a:tcPr>
+                </a:tc>
+              </a:tr>
+            </a:tbl>
+          </a:graphicData>
+        </a:graphic>
+      </p:graphicFrame>
+      <p:sp>
+        <p:nvSpPr>
+          <p:cNvPr id="9" name="TextBox 8"/>
+          <p:cNvSpPr txBox="1"/>
+          <p:nvPr/>
+        </p:nvSpPr>
+        <p:spPr>
+          <a:xfrm>
+            <a:off x="512064" y="4389120"/>
+            <a:ext cx="10899648" cy="201168"/>
+          </a:xfrm>
+          <a:prstGeom prst="rect">
+            <a:avLst/>
+          </a:prstGeom>
+          <a:noFill/>
+        </p:spPr>
+        <p:txBody>
+          <a:bodyPr wrap="square" lIns="0" rIns="0" tIns="0" bIns="0" anchor="t">
+            <a:spAutoFit/>
+          </a:bodyPr>
+          <a:lstStyle/>
+          <a:p>
+            <a:r>
+              <a:rPr sz="800" b="0">
+                <a:solidFill>
+                  <a:srgbClr val="606060"/>
+                </a:solidFill>
+                <a:latin typeface="微软雅黑"/>
+                <a:ea typeface="微软雅黑"/>
+              </a:rPr>
+              <a:t>数值口径:风险/价值分箱 1/2 组均值;家庭/渠道结构仅在价值分箱下可对齐,未列本表,且不直接作为风险因果。</a:t>
+            </a:r>
+          </a:p>
+        </p:txBody>
+      </p:sp>
+      <p:sp>
+        <p:nvSpPr>
+          <p:cNvPr id="10" name="Rectangle 9"/>
           <p:cNvSpPr/>
           <p:nvPr/>
         </p:nvSpPr>
         <p:spPr>
           <a:xfrm>
-            <a:off x="3927348" y="1225295"/>
-            <a:ext cx="1869948" cy="237744"/>
-          </a:xfrm>
-          <a:prstGeom prst="roundRect">
-            <a:avLst>
-              <a:gd name="adj" fmla="val 50000"/>
-            </a:avLst>
+            <a:off x="512064" y="6217920"/>
+            <a:ext cx="11164824" cy="384048"/>
+          </a:xfrm>
+          <a:prstGeom prst="rect">
+            <a:avLst/>
           </a:prstGeom>
           <a:solidFill>
             <a:srgbClr val="FAF3E0"/>
           </a:solidFill>
-          <a:ln w="12700">
-            <a:solidFill>
-              <a:srgbClr val="D6A000"/>
-            </a:solidFill>
+          <a:ln>
+            <a:noFill/>
           </a:ln>
           <a:effectLst/>
         </p:spPr>
@@ -23509,33 +25200,23 @@
           </a:fontRef>
         </p:style>
         <p:txBody>
-          <a:bodyPr rtlCol="0" anchor="ctr" wrap="none" lIns="45720" rIns="45720" tIns="18288" bIns="18288"/>
+          <a:bodyPr rtlCol="0" anchor="ctr"/>
           <a:lstStyle/>
           <a:p>
             <a:pPr algn="ctr"/>
-            <a:r>
-              <a:rPr sz="900" b="1">
-                <a:solidFill>
-                  <a:srgbClr val="1F4E79"/>
-                </a:solidFill>
-                <a:latin typeface="微软雅黑"/>
-                <a:ea typeface="微软雅黑"/>
-              </a:rPr>
-              <a:t>低支出 · 低波动 · 还款更可控</a:t>
-            </a:r>
-          </a:p>
-        </p:txBody>
-      </p:sp>
-      <p:sp>
-        <p:nvSpPr>
-          <p:cNvPr id="9" name="Rectangle 8"/>
+          </a:p>
+        </p:txBody>
+      </p:sp>
+      <p:sp>
+        <p:nvSpPr>
+          <p:cNvPr id="11" name="Rectangle 10"/>
           <p:cNvSpPr/>
           <p:nvPr/>
         </p:nvSpPr>
         <p:spPr>
           <a:xfrm>
-            <a:off x="658368" y="1627631"/>
-            <a:ext cx="64008" cy="182880"/>
+            <a:off x="576072" y="6281928"/>
+            <a:ext cx="64008" cy="256032"/>
           </a:xfrm>
           <a:prstGeom prst="rect">
             <a:avLst/>
@@ -23572,2191 +25253,13 @@
       </p:sp>
       <p:sp>
         <p:nvSpPr>
-          <p:cNvPr id="10" name="TextBox 9"/>
-          <p:cNvSpPr txBox="1"/>
-          <p:nvPr/>
-        </p:nvSpPr>
-        <p:spPr>
-          <a:xfrm>
-            <a:off x="768096" y="1609343"/>
-            <a:ext cx="5029200" cy="219456"/>
-          </a:xfrm>
-          <a:prstGeom prst="rect">
-            <a:avLst/>
-          </a:prstGeom>
-          <a:noFill/>
-        </p:spPr>
-        <p:txBody>
-          <a:bodyPr wrap="square" lIns="0" rIns="0" tIns="0" bIns="0" anchor="t">
-            <a:spAutoFit/>
-          </a:bodyPr>
-          <a:lstStyle/>
-          <a:p>
-            <a:r>
-              <a:rPr sz="1000" b="1">
-                <a:solidFill>
-                  <a:srgbClr val="1F4E79"/>
-                </a:solidFill>
-                <a:latin typeface="微软雅黑"/>
-                <a:ea typeface="微软雅黑"/>
-              </a:rPr>
-              <a:t>收入端</a:t>
-            </a:r>
-          </a:p>
-        </p:txBody>
-      </p:sp>
-      <p:sp>
-        <p:nvSpPr>
-          <p:cNvPr id="11" name="TextBox 10"/>
-          <p:cNvSpPr txBox="1"/>
-          <p:nvPr/>
-        </p:nvSpPr>
-        <p:spPr>
-          <a:xfrm>
-            <a:off x="658368" y="1920239"/>
-            <a:ext cx="5138928" cy="219456"/>
-          </a:xfrm>
-          <a:prstGeom prst="rect">
-            <a:avLst/>
-          </a:prstGeom>
-          <a:noFill/>
-        </p:spPr>
-        <p:txBody>
-          <a:bodyPr wrap="square" lIns="0" rIns="0" tIns="0" bIns="0" anchor="ctr">
-            <a:spAutoFit/>
-          </a:bodyPr>
-          <a:lstStyle/>
-          <a:p>
-            <a:pPr>
-              <a:lnSpc>
-                <a:spcPct val="100000"/>
-              </a:lnSpc>
-            </a:pPr>
-            <a:r>
-              <a:rPr sz="1000" b="1">
-                <a:solidFill>
-                  <a:srgbClr val="0A0A0A"/>
-                </a:solidFill>
-                <a:latin typeface="微软雅黑"/>
-                <a:ea typeface="微软雅黑"/>
-              </a:rPr>
-              <a:t>总收入金额</a:t>
-            </a:r>
-            <a:r>
-              <a:rPr sz="1000" b="1">
-                <a:solidFill>
-                  <a:srgbClr val="0A0A0A"/>
-                </a:solidFill>
-                <a:latin typeface="微软雅黑"/>
-                <a:ea typeface="微软雅黑"/>
-              </a:rPr>
-              <a:t>  </a:t>
-            </a:r>
-            <a:r>
-              <a:rPr sz="800" b="0">
-                <a:solidFill>
-                  <a:srgbClr val="606060"/>
-                </a:solidFill>
-                <a:latin typeface="微软雅黑"/>
-                <a:ea typeface="微软雅黑"/>
-              </a:rPr>
-              <a:t>70,151</a:t>
-            </a:r>
-            <a:r>
-              <a:rPr sz="800" b="0">
-                <a:solidFill>
-                  <a:srgbClr val="606060"/>
-                </a:solidFill>
-                <a:latin typeface="微软雅黑"/>
-                <a:ea typeface="微软雅黑"/>
-              </a:rPr>
-              <a:t>  </a:t>
-            </a:r>
-            <a:r>
-              <a:rPr sz="700" b="0">
-                <a:solidFill>
-                  <a:srgbClr val="8A8A8A"/>
-                </a:solidFill>
-                <a:latin typeface="微软雅黑"/>
-                <a:ea typeface="微软雅黑"/>
-              </a:rPr>
-              <a:t>风险差 129,605</a:t>
-            </a:r>
-          </a:p>
-        </p:txBody>
-      </p:sp>
-      <p:sp>
-        <p:nvSpPr>
           <p:cNvPr id="12" name="TextBox 11"/>
           <p:cNvSpPr txBox="1"/>
           <p:nvPr/>
         </p:nvSpPr>
         <p:spPr>
           <a:xfrm>
-            <a:off x="658368" y="2249424"/>
-            <a:ext cx="5138928" cy="219456"/>
-          </a:xfrm>
-          <a:prstGeom prst="rect">
-            <a:avLst/>
-          </a:prstGeom>
-          <a:noFill/>
-        </p:spPr>
-        <p:txBody>
-          <a:bodyPr wrap="square" lIns="0" rIns="0" tIns="0" bIns="0" anchor="ctr">
-            <a:spAutoFit/>
-          </a:bodyPr>
-          <a:lstStyle/>
-          <a:p>
-            <a:pPr>
-              <a:lnSpc>
-                <a:spcPct val="100000"/>
-              </a:lnSpc>
-            </a:pPr>
-            <a:r>
-              <a:rPr sz="1000" b="1">
-                <a:solidFill>
-                  <a:srgbClr val="0A0A0A"/>
-                </a:solidFill>
-                <a:latin typeface="微软雅黑"/>
-                <a:ea typeface="微软雅黑"/>
-              </a:rPr>
-              <a:t>工资收入总额</a:t>
-            </a:r>
-            <a:r>
-              <a:rPr sz="1000" b="1">
-                <a:solidFill>
-                  <a:srgbClr val="0A0A0A"/>
-                </a:solidFill>
-                <a:latin typeface="微软雅黑"/>
-                <a:ea typeface="微软雅黑"/>
-              </a:rPr>
-              <a:t>  </a:t>
-            </a:r>
-            <a:r>
-              <a:rPr sz="800" b="0">
-                <a:solidFill>
-                  <a:srgbClr val="606060"/>
-                </a:solidFill>
-                <a:latin typeface="微软雅黑"/>
-                <a:ea typeface="微软雅黑"/>
-              </a:rPr>
-              <a:t>20,922</a:t>
-            </a:r>
-            <a:r>
-              <a:rPr sz="800" b="0">
-                <a:solidFill>
-                  <a:srgbClr val="606060"/>
-                </a:solidFill>
-                <a:latin typeface="微软雅黑"/>
-                <a:ea typeface="微软雅黑"/>
-              </a:rPr>
-              <a:t>  </a:t>
-            </a:r>
-            <a:r>
-              <a:rPr sz="700" b="0">
-                <a:solidFill>
-                  <a:srgbClr val="8A8A8A"/>
-                </a:solidFill>
-                <a:latin typeface="微软雅黑"/>
-                <a:ea typeface="微软雅黑"/>
-              </a:rPr>
-              <a:t>风险差 30,752</a:t>
-            </a:r>
-          </a:p>
-        </p:txBody>
-      </p:sp>
-      <p:sp>
-        <p:nvSpPr>
-          <p:cNvPr id="13" name="TextBox 12"/>
-          <p:cNvSpPr txBox="1"/>
-          <p:nvPr/>
-        </p:nvSpPr>
-        <p:spPr>
-          <a:xfrm>
-            <a:off x="658368" y="2578608"/>
-            <a:ext cx="5138928" cy="219456"/>
-          </a:xfrm>
-          <a:prstGeom prst="rect">
-            <a:avLst/>
-          </a:prstGeom>
-          <a:noFill/>
-        </p:spPr>
-        <p:txBody>
-          <a:bodyPr wrap="square" lIns="0" rIns="0" tIns="0" bIns="0" anchor="ctr">
-            <a:spAutoFit/>
-          </a:bodyPr>
-          <a:lstStyle/>
-          <a:p>
-            <a:pPr>
-              <a:lnSpc>
-                <a:spcPct val="100000"/>
-              </a:lnSpc>
-            </a:pPr>
-            <a:r>
-              <a:rPr sz="1000" b="1">
-                <a:solidFill>
-                  <a:srgbClr val="0A0A0A"/>
-                </a:solidFill>
-                <a:latin typeface="微软雅黑"/>
-                <a:ea typeface="微软雅黑"/>
-              </a:rPr>
-              <a:t>Centrelink收入占比</a:t>
-            </a:r>
-            <a:r>
-              <a:rPr sz="1000" b="1">
-                <a:solidFill>
-                  <a:srgbClr val="0A0A0A"/>
-                </a:solidFill>
-                <a:latin typeface="微软雅黑"/>
-                <a:ea typeface="微软雅黑"/>
-              </a:rPr>
-              <a:t>  </a:t>
-            </a:r>
-            <a:r>
-              <a:rPr sz="800" b="0">
-                <a:solidFill>
-                  <a:srgbClr val="606060"/>
-                </a:solidFill>
-                <a:latin typeface="微软雅黑"/>
-                <a:ea typeface="微软雅黑"/>
-              </a:rPr>
-              <a:t>10.2%</a:t>
-            </a:r>
-            <a:r>
-              <a:rPr sz="800" b="0">
-                <a:solidFill>
-                  <a:srgbClr val="606060"/>
-                </a:solidFill>
-                <a:latin typeface="微软雅黑"/>
-                <a:ea typeface="微软雅黑"/>
-              </a:rPr>
-              <a:t>  </a:t>
-            </a:r>
-            <a:r>
-              <a:rPr sz="700" b="0">
-                <a:solidFill>
-                  <a:srgbClr val="8A8A8A"/>
-                </a:solidFill>
-                <a:latin typeface="微软雅黑"/>
-                <a:ea typeface="微软雅黑"/>
-              </a:rPr>
-              <a:t>风险差 3.1%</a:t>
-            </a:r>
-          </a:p>
-        </p:txBody>
-      </p:sp>
-      <p:sp>
-        <p:nvSpPr>
-          <p:cNvPr id="14" name="TextBox 13"/>
-          <p:cNvSpPr txBox="1"/>
-          <p:nvPr/>
-        </p:nvSpPr>
-        <p:spPr>
-          <a:xfrm>
-            <a:off x="658368" y="2907791"/>
-            <a:ext cx="5138928" cy="219456"/>
-          </a:xfrm>
-          <a:prstGeom prst="rect">
-            <a:avLst/>
-          </a:prstGeom>
-          <a:noFill/>
-        </p:spPr>
-        <p:txBody>
-          <a:bodyPr wrap="square" lIns="0" rIns="0" tIns="0" bIns="0" anchor="ctr">
-            <a:spAutoFit/>
-          </a:bodyPr>
-          <a:lstStyle/>
-          <a:p>
-            <a:pPr>
-              <a:lnSpc>
-                <a:spcPct val="100000"/>
-              </a:lnSpc>
-            </a:pPr>
-            <a:r>
-              <a:rPr sz="1000" b="1">
-                <a:solidFill>
-                  <a:srgbClr val="0A0A0A"/>
-                </a:solidFill>
-                <a:latin typeface="微软雅黑"/>
-                <a:ea typeface="微软雅黑"/>
-              </a:rPr>
-              <a:t>发薪周期std</a:t>
-            </a:r>
-            <a:r>
-              <a:rPr sz="1000" b="1">
-                <a:solidFill>
-                  <a:srgbClr val="0A0A0A"/>
-                </a:solidFill>
-                <a:latin typeface="微软雅黑"/>
-                <a:ea typeface="微软雅黑"/>
-              </a:rPr>
-              <a:t>  </a:t>
-            </a:r>
-            <a:r>
-              <a:rPr sz="800" b="0">
-                <a:solidFill>
-                  <a:srgbClr val="606060"/>
-                </a:solidFill>
-                <a:latin typeface="微软雅黑"/>
-                <a:ea typeface="微软雅黑"/>
-              </a:rPr>
-              <a:t>2.99</a:t>
-            </a:r>
-            <a:r>
-              <a:rPr sz="800" b="0">
-                <a:solidFill>
-                  <a:srgbClr val="606060"/>
-                </a:solidFill>
-                <a:latin typeface="微软雅黑"/>
-                <a:ea typeface="微软雅黑"/>
-              </a:rPr>
-              <a:t>  </a:t>
-            </a:r>
-            <a:r>
-              <a:rPr sz="700" b="0">
-                <a:solidFill>
-                  <a:srgbClr val="8A8A8A"/>
-                </a:solidFill>
-                <a:latin typeface="微软雅黑"/>
-                <a:ea typeface="微软雅黑"/>
-              </a:rPr>
-              <a:t>风险差 3.35</a:t>
-            </a:r>
-          </a:p>
-        </p:txBody>
-      </p:sp>
-      <p:sp>
-        <p:nvSpPr>
-          <p:cNvPr id="15" name="Rectangle 14"/>
-          <p:cNvSpPr/>
-          <p:nvPr/>
-        </p:nvSpPr>
-        <p:spPr>
-          <a:xfrm>
-            <a:off x="658368" y="3383280"/>
-            <a:ext cx="64008" cy="182880"/>
-          </a:xfrm>
-          <a:prstGeom prst="rect">
-            <a:avLst/>
-          </a:prstGeom>
-          <a:solidFill>
-            <a:srgbClr val="D6A000"/>
-          </a:solidFill>
-          <a:ln>
-            <a:noFill/>
-          </a:ln>
-          <a:effectLst/>
-        </p:spPr>
-        <p:style>
-          <a:lnRef idx="1">
-            <a:schemeClr val="accent1"/>
-          </a:lnRef>
-          <a:fillRef idx="3">
-            <a:schemeClr val="accent1"/>
-          </a:fillRef>
-          <a:effectRef idx="2">
-            <a:schemeClr val="accent1"/>
-          </a:effectRef>
-          <a:fontRef idx="minor">
-            <a:schemeClr val="lt1"/>
-          </a:fontRef>
-        </p:style>
-        <p:txBody>
-          <a:bodyPr rtlCol="0" anchor="ctr"/>
-          <a:lstStyle/>
-          <a:p>
-            <a:pPr algn="ctr"/>
-          </a:p>
-        </p:txBody>
-      </p:sp>
-      <p:sp>
-        <p:nvSpPr>
-          <p:cNvPr id="16" name="TextBox 15"/>
-          <p:cNvSpPr txBox="1"/>
-          <p:nvPr/>
-        </p:nvSpPr>
-        <p:spPr>
-          <a:xfrm>
-            <a:off x="768096" y="3364992"/>
-            <a:ext cx="5029200" cy="219456"/>
-          </a:xfrm>
-          <a:prstGeom prst="rect">
-            <a:avLst/>
-          </a:prstGeom>
-          <a:noFill/>
-        </p:spPr>
-        <p:txBody>
-          <a:bodyPr wrap="square" lIns="0" rIns="0" tIns="0" bIns="0" anchor="t">
-            <a:spAutoFit/>
-          </a:bodyPr>
-          <a:lstStyle/>
-          <a:p>
-            <a:r>
-              <a:rPr sz="1000" b="1">
-                <a:solidFill>
-                  <a:srgbClr val="1F4E79"/>
-                </a:solidFill>
-                <a:latin typeface="微软雅黑"/>
-                <a:ea typeface="微软雅黑"/>
-              </a:rPr>
-              <a:t>行为端</a:t>
-            </a:r>
-          </a:p>
-        </p:txBody>
-      </p:sp>
-      <p:sp>
-        <p:nvSpPr>
-          <p:cNvPr id="17" name="TextBox 16"/>
-          <p:cNvSpPr txBox="1"/>
-          <p:nvPr/>
-        </p:nvSpPr>
-        <p:spPr>
-          <a:xfrm>
-            <a:off x="658368" y="3675887"/>
-            <a:ext cx="5138928" cy="219456"/>
-          </a:xfrm>
-          <a:prstGeom prst="rect">
-            <a:avLst/>
-          </a:prstGeom>
-          <a:noFill/>
-        </p:spPr>
-        <p:txBody>
-          <a:bodyPr wrap="square" lIns="0" rIns="0" tIns="0" bIns="0" anchor="ctr">
-            <a:spAutoFit/>
-          </a:bodyPr>
-          <a:lstStyle/>
-          <a:p>
-            <a:pPr>
-              <a:lnSpc>
-                <a:spcPct val="100000"/>
-              </a:lnSpc>
-            </a:pPr>
-            <a:r>
-              <a:rPr sz="1000" b="1">
-                <a:solidFill>
-                  <a:srgbClr val="0A0A0A"/>
-                </a:solidFill>
-                <a:latin typeface="微软雅黑"/>
-                <a:ea typeface="微软雅黑"/>
-              </a:rPr>
-              <a:t>总支出金额</a:t>
-            </a:r>
-            <a:r>
-              <a:rPr sz="1000" b="1">
-                <a:solidFill>
-                  <a:srgbClr val="0A0A0A"/>
-                </a:solidFill>
-                <a:latin typeface="微软雅黑"/>
-                <a:ea typeface="微软雅黑"/>
-              </a:rPr>
-              <a:t>  </a:t>
-            </a:r>
-            <a:r>
-              <a:rPr sz="800" b="1">
-                <a:solidFill>
-                  <a:srgbClr val="D6A000"/>
-                </a:solidFill>
-                <a:latin typeface="微软雅黑"/>
-                <a:ea typeface="微软雅黑"/>
-              </a:rPr>
-              <a:t>66,684</a:t>
-            </a:r>
-            <a:r>
-              <a:rPr sz="800" b="1">
-                <a:solidFill>
-                  <a:srgbClr val="D6A000"/>
-                </a:solidFill>
-                <a:latin typeface="微软雅黑"/>
-                <a:ea typeface="微软雅黑"/>
-              </a:rPr>
-              <a:t>  </a:t>
-            </a:r>
-            <a:r>
-              <a:rPr sz="700" b="0">
-                <a:solidFill>
-                  <a:srgbClr val="8A8A8A"/>
-                </a:solidFill>
-                <a:latin typeface="微软雅黑"/>
-                <a:ea typeface="微软雅黑"/>
-              </a:rPr>
-              <a:t>≈ 风险差一半</a:t>
-            </a:r>
-          </a:p>
-        </p:txBody>
-      </p:sp>
-      <p:sp>
-        <p:nvSpPr>
-          <p:cNvPr id="18" name="TextBox 17"/>
-          <p:cNvSpPr txBox="1"/>
-          <p:nvPr/>
-        </p:nvSpPr>
-        <p:spPr>
-          <a:xfrm>
-            <a:off x="658368" y="4005072"/>
-            <a:ext cx="5138928" cy="219456"/>
-          </a:xfrm>
-          <a:prstGeom prst="rect">
-            <a:avLst/>
-          </a:prstGeom>
-          <a:noFill/>
-        </p:spPr>
-        <p:txBody>
-          <a:bodyPr wrap="square" lIns="0" rIns="0" tIns="0" bIns="0" anchor="ctr">
-            <a:spAutoFit/>
-          </a:bodyPr>
-          <a:lstStyle/>
-          <a:p>
-            <a:pPr>
-              <a:lnSpc>
-                <a:spcPct val="100000"/>
-              </a:lnSpc>
-            </a:pPr>
-            <a:r>
-              <a:rPr sz="1000" b="1">
-                <a:solidFill>
-                  <a:srgbClr val="0A0A0A"/>
-                </a:solidFill>
-                <a:latin typeface="微软雅黑"/>
-                <a:ea typeface="微软雅黑"/>
-              </a:rPr>
-              <a:t>赌博支出占比</a:t>
-            </a:r>
-            <a:r>
-              <a:rPr sz="1000" b="1">
-                <a:solidFill>
-                  <a:srgbClr val="0A0A0A"/>
-                </a:solidFill>
-                <a:latin typeface="微软雅黑"/>
-                <a:ea typeface="微软雅黑"/>
-              </a:rPr>
-              <a:t>  </a:t>
-            </a:r>
-            <a:r>
-              <a:rPr sz="800" b="1">
-                <a:solidFill>
-                  <a:srgbClr val="D6A000"/>
-                </a:solidFill>
-                <a:latin typeface="微软雅黑"/>
-                <a:ea typeface="微软雅黑"/>
-              </a:rPr>
-              <a:t>2.0%</a:t>
-            </a:r>
-            <a:r>
-              <a:rPr sz="800" b="1">
-                <a:solidFill>
-                  <a:srgbClr val="D6A000"/>
-                </a:solidFill>
-                <a:latin typeface="微软雅黑"/>
-                <a:ea typeface="微软雅黑"/>
-              </a:rPr>
-              <a:t>  </a:t>
-            </a:r>
-            <a:r>
-              <a:rPr sz="700" b="0">
-                <a:solidFill>
-                  <a:srgbClr val="8A8A8A"/>
-                </a:solidFill>
-                <a:latin typeface="微软雅黑"/>
-                <a:ea typeface="微软雅黑"/>
-              </a:rPr>
-              <a:t>风险差 4.7%</a:t>
-            </a:r>
-          </a:p>
-        </p:txBody>
-      </p:sp>
-      <p:sp>
-        <p:nvSpPr>
-          <p:cNvPr id="19" name="TextBox 18"/>
-          <p:cNvSpPr txBox="1"/>
-          <p:nvPr/>
-        </p:nvSpPr>
-        <p:spPr>
-          <a:xfrm>
-            <a:off x="658368" y="4334256"/>
-            <a:ext cx="5138928" cy="219456"/>
-          </a:xfrm>
-          <a:prstGeom prst="rect">
-            <a:avLst/>
-          </a:prstGeom>
-          <a:noFill/>
-        </p:spPr>
-        <p:txBody>
-          <a:bodyPr wrap="square" lIns="0" rIns="0" tIns="0" bIns="0" anchor="ctr">
-            <a:spAutoFit/>
-          </a:bodyPr>
-          <a:lstStyle/>
-          <a:p>
-            <a:pPr>
-              <a:lnSpc>
-                <a:spcPct val="100000"/>
-              </a:lnSpc>
-            </a:pPr>
-            <a:r>
-              <a:rPr sz="1000" b="1">
-                <a:solidFill>
-                  <a:srgbClr val="0A0A0A"/>
-                </a:solidFill>
-                <a:latin typeface="微软雅黑"/>
-                <a:ea typeface="微软雅黑"/>
-              </a:rPr>
-              <a:t>余额波动std</a:t>
-            </a:r>
-            <a:r>
-              <a:rPr sz="1000" b="1">
-                <a:solidFill>
-                  <a:srgbClr val="0A0A0A"/>
-                </a:solidFill>
-                <a:latin typeface="微软雅黑"/>
-                <a:ea typeface="微软雅黑"/>
-              </a:rPr>
-              <a:t>  </a:t>
-            </a:r>
-            <a:r>
-              <a:rPr sz="800" b="1">
-                <a:solidFill>
-                  <a:srgbClr val="D6A000"/>
-                </a:solidFill>
-                <a:latin typeface="微软雅黑"/>
-                <a:ea typeface="微软雅黑"/>
-              </a:rPr>
-              <a:t>2,688</a:t>
-            </a:r>
-            <a:r>
-              <a:rPr sz="800" b="1">
-                <a:solidFill>
-                  <a:srgbClr val="D6A000"/>
-                </a:solidFill>
-                <a:latin typeface="微软雅黑"/>
-                <a:ea typeface="微软雅黑"/>
-              </a:rPr>
-              <a:t>  </a:t>
-            </a:r>
-            <a:r>
-              <a:rPr sz="700" b="0">
-                <a:solidFill>
-                  <a:srgbClr val="8A8A8A"/>
-                </a:solidFill>
-                <a:latin typeface="微软雅黑"/>
-                <a:ea typeface="微软雅黑"/>
-              </a:rPr>
-              <a:t>风险差 4,757</a:t>
-            </a:r>
-          </a:p>
-        </p:txBody>
-      </p:sp>
-      <p:sp>
-        <p:nvSpPr>
-          <p:cNvPr id="20" name="Rectangle 19"/>
-          <p:cNvSpPr/>
-          <p:nvPr/>
-        </p:nvSpPr>
-        <p:spPr>
-          <a:xfrm>
-            <a:off x="658368" y="4809744"/>
-            <a:ext cx="64008" cy="182880"/>
-          </a:xfrm>
-          <a:prstGeom prst="rect">
-            <a:avLst/>
-          </a:prstGeom>
-          <a:solidFill>
-            <a:srgbClr val="D6A000"/>
-          </a:solidFill>
-          <a:ln>
-            <a:noFill/>
-          </a:ln>
-          <a:effectLst/>
-        </p:spPr>
-        <p:style>
-          <a:lnRef idx="1">
-            <a:schemeClr val="accent1"/>
-          </a:lnRef>
-          <a:fillRef idx="3">
-            <a:schemeClr val="accent1"/>
-          </a:fillRef>
-          <a:effectRef idx="2">
-            <a:schemeClr val="accent1"/>
-          </a:effectRef>
-          <a:fontRef idx="minor">
-            <a:schemeClr val="lt1"/>
-          </a:fontRef>
-        </p:style>
-        <p:txBody>
-          <a:bodyPr rtlCol="0" anchor="ctr"/>
-          <a:lstStyle/>
-          <a:p>
-            <a:pPr algn="ctr"/>
-          </a:p>
-        </p:txBody>
-      </p:sp>
-      <p:sp>
-        <p:nvSpPr>
-          <p:cNvPr id="21" name="TextBox 20"/>
-          <p:cNvSpPr txBox="1"/>
-          <p:nvPr/>
-        </p:nvSpPr>
-        <p:spPr>
-          <a:xfrm>
-            <a:off x="768096" y="4791456"/>
-            <a:ext cx="5029200" cy="219456"/>
-          </a:xfrm>
-          <a:prstGeom prst="rect">
-            <a:avLst/>
-          </a:prstGeom>
-          <a:noFill/>
-        </p:spPr>
-        <p:txBody>
-          <a:bodyPr wrap="square" lIns="0" rIns="0" tIns="0" bIns="0" anchor="t">
-            <a:spAutoFit/>
-          </a:bodyPr>
-          <a:lstStyle/>
-          <a:p>
-            <a:r>
-              <a:rPr sz="1000" b="1">
-                <a:solidFill>
-                  <a:srgbClr val="1F4E79"/>
-                </a:solidFill>
-                <a:latin typeface="微软雅黑"/>
-                <a:ea typeface="微软雅黑"/>
-              </a:rPr>
-              <a:t>还款端</a:t>
-            </a:r>
-          </a:p>
-        </p:txBody>
-      </p:sp>
-      <p:sp>
-        <p:nvSpPr>
-          <p:cNvPr id="22" name="TextBox 21"/>
-          <p:cNvSpPr txBox="1"/>
-          <p:nvPr/>
-        </p:nvSpPr>
-        <p:spPr>
-          <a:xfrm>
-            <a:off x="658368" y="5102352"/>
-            <a:ext cx="5138928" cy="219456"/>
-          </a:xfrm>
-          <a:prstGeom prst="rect">
-            <a:avLst/>
-          </a:prstGeom>
-          <a:noFill/>
-        </p:spPr>
-        <p:txBody>
-          <a:bodyPr wrap="square" lIns="0" rIns="0" tIns="0" bIns="0" anchor="ctr">
-            <a:spAutoFit/>
-          </a:bodyPr>
-          <a:lstStyle/>
-          <a:p>
-            <a:pPr>
-              <a:lnSpc>
-                <a:spcPct val="100000"/>
-              </a:lnSpc>
-            </a:pPr>
-            <a:r>
-              <a:rPr sz="1000" b="1">
-                <a:solidFill>
-                  <a:srgbClr val="0A0A0A"/>
-                </a:solidFill>
-                <a:latin typeface="微软雅黑"/>
-                <a:ea typeface="微软雅黑"/>
-              </a:rPr>
-              <a:t>信贷还款金额</a:t>
-            </a:r>
-            <a:r>
-              <a:rPr sz="1000" b="1">
-                <a:solidFill>
-                  <a:srgbClr val="0A0A0A"/>
-                </a:solidFill>
-                <a:latin typeface="微软雅黑"/>
-                <a:ea typeface="微软雅黑"/>
-              </a:rPr>
-              <a:t>  </a:t>
-            </a:r>
-            <a:r>
-              <a:rPr sz="800" b="0">
-                <a:solidFill>
-                  <a:srgbClr val="606060"/>
-                </a:solidFill>
-                <a:latin typeface="微软雅黑"/>
-                <a:ea typeface="微软雅黑"/>
-              </a:rPr>
-              <a:t>15,780</a:t>
-            </a:r>
-            <a:r>
-              <a:rPr sz="800" b="0">
-                <a:solidFill>
-                  <a:srgbClr val="606060"/>
-                </a:solidFill>
-                <a:latin typeface="微软雅黑"/>
-                <a:ea typeface="微软雅黑"/>
-              </a:rPr>
-              <a:t>  </a:t>
-            </a:r>
-            <a:r>
-              <a:rPr sz="700" b="0">
-                <a:solidFill>
-                  <a:srgbClr val="8A8A8A"/>
-                </a:solidFill>
-                <a:latin typeface="微软雅黑"/>
-                <a:ea typeface="微软雅黑"/>
-              </a:rPr>
-              <a:t>高于风险差 10,305</a:t>
-            </a:r>
-          </a:p>
-        </p:txBody>
-      </p:sp>
-      <p:sp>
-        <p:nvSpPr>
-          <p:cNvPr id="23" name="TextBox 22"/>
-          <p:cNvSpPr txBox="1"/>
-          <p:nvPr/>
-        </p:nvSpPr>
-        <p:spPr>
-          <a:xfrm>
-            <a:off x="658368" y="5431536"/>
-            <a:ext cx="5138928" cy="219456"/>
-          </a:xfrm>
-          <a:prstGeom prst="rect">
-            <a:avLst/>
-          </a:prstGeom>
-          <a:noFill/>
-        </p:spPr>
-        <p:txBody>
-          <a:bodyPr wrap="square" lIns="0" rIns="0" tIns="0" bIns="0" anchor="ctr">
-            <a:spAutoFit/>
-          </a:bodyPr>
-          <a:lstStyle/>
-          <a:p>
-            <a:pPr>
-              <a:lnSpc>
-                <a:spcPct val="100000"/>
-              </a:lnSpc>
-            </a:pPr>
-            <a:r>
-              <a:rPr sz="1000" b="1">
-                <a:solidFill>
-                  <a:srgbClr val="0A0A0A"/>
-                </a:solidFill>
-                <a:latin typeface="微软雅黑"/>
-                <a:ea typeface="微软雅黑"/>
-              </a:rPr>
-              <a:t>贷款还款次数</a:t>
-            </a:r>
-            <a:r>
-              <a:rPr sz="1000" b="1">
-                <a:solidFill>
-                  <a:srgbClr val="0A0A0A"/>
-                </a:solidFill>
-                <a:latin typeface="微软雅黑"/>
-                <a:ea typeface="微软雅黑"/>
-              </a:rPr>
-              <a:t>  </a:t>
-            </a:r>
-            <a:r>
-              <a:rPr sz="800" b="0">
-                <a:solidFill>
-                  <a:srgbClr val="606060"/>
-                </a:solidFill>
-                <a:latin typeface="微软雅黑"/>
-                <a:ea typeface="微软雅黑"/>
-              </a:rPr>
-              <a:t>25.3</a:t>
-            </a:r>
-            <a:r>
-              <a:rPr sz="800" b="0">
-                <a:solidFill>
-                  <a:srgbClr val="606060"/>
-                </a:solidFill>
-                <a:latin typeface="微软雅黑"/>
-                <a:ea typeface="微软雅黑"/>
-              </a:rPr>
-              <a:t>  </a:t>
-            </a:r>
-            <a:r>
-              <a:rPr sz="700" b="0">
-                <a:solidFill>
-                  <a:srgbClr val="8A8A8A"/>
-                </a:solidFill>
-                <a:latin typeface="微软雅黑"/>
-                <a:ea typeface="微软雅黑"/>
-              </a:rPr>
-              <a:t>高于风险差 18.2</a:t>
-            </a:r>
-          </a:p>
-        </p:txBody>
-      </p:sp>
-      <p:sp>
-        <p:nvSpPr>
-          <p:cNvPr id="24" name="Rounded Rectangle 23"/>
-          <p:cNvSpPr/>
-          <p:nvPr/>
-        </p:nvSpPr>
-        <p:spPr>
-          <a:xfrm>
-            <a:off x="6254496" y="1097280"/>
-            <a:ext cx="5413248" cy="4617720"/>
-          </a:xfrm>
-          <a:prstGeom prst="roundRect">
-            <a:avLst>
-              <a:gd name="adj" fmla="val 3000"/>
-            </a:avLst>
-          </a:prstGeom>
-          <a:solidFill>
-            <a:srgbClr val="FFFFFF"/>
-          </a:solidFill>
-          <a:ln w="19050">
-            <a:solidFill>
-              <a:srgbClr val="D6D6D6"/>
-            </a:solidFill>
-          </a:ln>
-          <a:effectLst/>
-        </p:spPr>
-        <p:style>
-          <a:lnRef idx="1">
-            <a:schemeClr val="accent1"/>
-          </a:lnRef>
-          <a:fillRef idx="3">
-            <a:schemeClr val="accent1"/>
-          </a:fillRef>
-          <a:effectRef idx="2">
-            <a:schemeClr val="accent1"/>
-          </a:effectRef>
-          <a:fontRef idx="minor">
-            <a:schemeClr val="lt1"/>
-          </a:fontRef>
-        </p:style>
-        <p:txBody>
-          <a:bodyPr rtlCol="0" anchor="ctr"/>
-          <a:lstStyle/>
-          <a:p>
-            <a:pPr algn="ctr"/>
-          </a:p>
-        </p:txBody>
-      </p:sp>
-      <p:sp>
-        <p:nvSpPr>
-          <p:cNvPr id="25" name="Rectangle 24"/>
-          <p:cNvSpPr/>
-          <p:nvPr/>
-        </p:nvSpPr>
-        <p:spPr>
-          <a:xfrm>
-            <a:off x="6281928" y="1124712"/>
-            <a:ext cx="5358384" cy="54864"/>
-          </a:xfrm>
-          <a:prstGeom prst="rect">
-            <a:avLst/>
-          </a:prstGeom>
-          <a:solidFill>
-            <a:srgbClr val="1F4E79"/>
-          </a:solidFill>
-          <a:ln>
-            <a:noFill/>
-          </a:ln>
-          <a:effectLst/>
-        </p:spPr>
-        <p:style>
-          <a:lnRef idx="1">
-            <a:schemeClr val="accent1"/>
-          </a:lnRef>
-          <a:fillRef idx="3">
-            <a:schemeClr val="accent1"/>
-          </a:fillRef>
-          <a:effectRef idx="2">
-            <a:schemeClr val="accent1"/>
-          </a:effectRef>
-          <a:fontRef idx="minor">
-            <a:schemeClr val="lt1"/>
-          </a:fontRef>
-        </p:style>
-        <p:txBody>
-          <a:bodyPr rtlCol="0" anchor="ctr"/>
-          <a:lstStyle/>
-          <a:p>
-            <a:pPr algn="ctr"/>
-          </a:p>
-        </p:txBody>
-      </p:sp>
-      <p:sp>
-        <p:nvSpPr>
-          <p:cNvPr id="26" name="TextBox 25"/>
-          <p:cNvSpPr txBox="1"/>
-          <p:nvPr/>
-        </p:nvSpPr>
-        <p:spPr>
-          <a:xfrm>
-            <a:off x="6400800" y="1207007"/>
-            <a:ext cx="3108960" cy="292608"/>
-          </a:xfrm>
-          <a:prstGeom prst="rect">
-            <a:avLst/>
-          </a:prstGeom>
-          <a:noFill/>
-        </p:spPr>
-        <p:txBody>
-          <a:bodyPr wrap="square" lIns="0" rIns="0" tIns="0" bIns="0" anchor="ctr">
-            <a:spAutoFit/>
-          </a:bodyPr>
-          <a:lstStyle/>
-          <a:p>
-            <a:r>
-              <a:rPr sz="1400" b="1">
-                <a:solidFill>
-                  <a:srgbClr val="1F4E79"/>
-                </a:solidFill>
-                <a:latin typeface="微软雅黑"/>
-                <a:ea typeface="微软雅黑"/>
-              </a:rPr>
-              <a:t>价值好人群画像</a:t>
-            </a:r>
-          </a:p>
-        </p:txBody>
-      </p:sp>
-      <p:sp>
-        <p:nvSpPr>
-          <p:cNvPr id="27" name="Rounded Rectangle 26"/>
-          <p:cNvSpPr/>
-          <p:nvPr/>
-        </p:nvSpPr>
-        <p:spPr>
-          <a:xfrm>
-            <a:off x="9555480" y="1225295"/>
-            <a:ext cx="1984248" cy="237744"/>
-          </a:xfrm>
-          <a:prstGeom prst="roundRect">
-            <a:avLst>
-              <a:gd name="adj" fmla="val 50000"/>
-            </a:avLst>
-          </a:prstGeom>
-          <a:solidFill>
-            <a:srgbClr val="FAF3E0"/>
-          </a:solidFill>
-          <a:ln w="12700">
-            <a:solidFill>
-              <a:srgbClr val="D6A000"/>
-            </a:solidFill>
-          </a:ln>
-          <a:effectLst/>
-        </p:spPr>
-        <p:style>
-          <a:lnRef idx="1">
-            <a:schemeClr val="accent1"/>
-          </a:lnRef>
-          <a:fillRef idx="3">
-            <a:schemeClr val="accent1"/>
-          </a:fillRef>
-          <a:effectRef idx="2">
-            <a:schemeClr val="accent1"/>
-          </a:effectRef>
-          <a:fontRef idx="minor">
-            <a:schemeClr val="lt1"/>
-          </a:fontRef>
-        </p:style>
-        <p:txBody>
-          <a:bodyPr rtlCol="0" anchor="ctr" wrap="none" lIns="45720" rIns="45720" tIns="18288" bIns="18288"/>
-          <a:lstStyle/>
-          <a:p>
-            <a:pPr algn="ctr"/>
-            <a:r>
-              <a:rPr sz="900" b="1">
-                <a:solidFill>
-                  <a:srgbClr val="1F4E79"/>
-                </a:solidFill>
-                <a:latin typeface="微软雅黑"/>
-                <a:ea typeface="微软雅黑"/>
-              </a:rPr>
-              <a:t>高收入 · 现金流连续 · 发薪稳定</a:t>
-            </a:r>
-          </a:p>
-        </p:txBody>
-      </p:sp>
-      <p:sp>
-        <p:nvSpPr>
-          <p:cNvPr id="28" name="Rectangle 27"/>
-          <p:cNvSpPr/>
-          <p:nvPr/>
-        </p:nvSpPr>
-        <p:spPr>
-          <a:xfrm>
-            <a:off x="6400800" y="1627631"/>
-            <a:ext cx="64008" cy="182880"/>
-          </a:xfrm>
-          <a:prstGeom prst="rect">
-            <a:avLst/>
-          </a:prstGeom>
-          <a:solidFill>
-            <a:srgbClr val="D6A000"/>
-          </a:solidFill>
-          <a:ln>
-            <a:noFill/>
-          </a:ln>
-          <a:effectLst/>
-        </p:spPr>
-        <p:style>
-          <a:lnRef idx="1">
-            <a:schemeClr val="accent1"/>
-          </a:lnRef>
-          <a:fillRef idx="3">
-            <a:schemeClr val="accent1"/>
-          </a:fillRef>
-          <a:effectRef idx="2">
-            <a:schemeClr val="accent1"/>
-          </a:effectRef>
-          <a:fontRef idx="minor">
-            <a:schemeClr val="lt1"/>
-          </a:fontRef>
-        </p:style>
-        <p:txBody>
-          <a:bodyPr rtlCol="0" anchor="ctr"/>
-          <a:lstStyle/>
-          <a:p>
-            <a:pPr algn="ctr"/>
-          </a:p>
-        </p:txBody>
-      </p:sp>
-      <p:sp>
-        <p:nvSpPr>
-          <p:cNvPr id="29" name="TextBox 28"/>
-          <p:cNvSpPr txBox="1"/>
-          <p:nvPr/>
-        </p:nvSpPr>
-        <p:spPr>
-          <a:xfrm>
-            <a:off x="6510528" y="1609343"/>
-            <a:ext cx="5029200" cy="219456"/>
-          </a:xfrm>
-          <a:prstGeom prst="rect">
-            <a:avLst/>
-          </a:prstGeom>
-          <a:noFill/>
-        </p:spPr>
-        <p:txBody>
-          <a:bodyPr wrap="square" lIns="0" rIns="0" tIns="0" bIns="0" anchor="t">
-            <a:spAutoFit/>
-          </a:bodyPr>
-          <a:lstStyle/>
-          <a:p>
-            <a:r>
-              <a:rPr sz="1000" b="1">
-                <a:solidFill>
-                  <a:srgbClr val="1F4E79"/>
-                </a:solidFill>
-                <a:latin typeface="微软雅黑"/>
-                <a:ea typeface="微软雅黑"/>
-              </a:rPr>
-              <a:t>收入体量</a:t>
-            </a:r>
-          </a:p>
-        </p:txBody>
-      </p:sp>
-      <p:sp>
-        <p:nvSpPr>
-          <p:cNvPr id="30" name="TextBox 29"/>
-          <p:cNvSpPr txBox="1"/>
-          <p:nvPr/>
-        </p:nvSpPr>
-        <p:spPr>
-          <a:xfrm>
-            <a:off x="6400800" y="1920239"/>
-            <a:ext cx="5138928" cy="219456"/>
-          </a:xfrm>
-          <a:prstGeom prst="rect">
-            <a:avLst/>
-          </a:prstGeom>
-          <a:noFill/>
-        </p:spPr>
-        <p:txBody>
-          <a:bodyPr wrap="square" lIns="0" rIns="0" tIns="0" bIns="0" anchor="ctr">
-            <a:spAutoFit/>
-          </a:bodyPr>
-          <a:lstStyle/>
-          <a:p>
-            <a:pPr>
-              <a:lnSpc>
-                <a:spcPct val="100000"/>
-              </a:lnSpc>
-            </a:pPr>
-            <a:r>
-              <a:rPr sz="1000" b="1">
-                <a:solidFill>
-                  <a:srgbClr val="0A0A0A"/>
-                </a:solidFill>
-                <a:latin typeface="微软雅黑"/>
-                <a:ea typeface="微软雅黑"/>
-              </a:rPr>
-              <a:t>总收入金额</a:t>
-            </a:r>
-            <a:r>
-              <a:rPr sz="1000" b="1">
-                <a:solidFill>
-                  <a:srgbClr val="0A0A0A"/>
-                </a:solidFill>
-                <a:latin typeface="微软雅黑"/>
-                <a:ea typeface="微软雅黑"/>
-              </a:rPr>
-              <a:t>  </a:t>
-            </a:r>
-            <a:r>
-              <a:rPr sz="800" b="1">
-                <a:solidFill>
-                  <a:srgbClr val="D6A000"/>
-                </a:solidFill>
-                <a:latin typeface="微软雅黑"/>
-                <a:ea typeface="微软雅黑"/>
-              </a:rPr>
-              <a:t>140,807</a:t>
-            </a:r>
-            <a:r>
-              <a:rPr sz="800" b="1">
-                <a:solidFill>
-                  <a:srgbClr val="D6A000"/>
-                </a:solidFill>
-                <a:latin typeface="微软雅黑"/>
-                <a:ea typeface="微软雅黑"/>
-              </a:rPr>
-              <a:t>  </a:t>
-            </a:r>
-            <a:r>
-              <a:rPr sz="700" b="0">
-                <a:solidFill>
-                  <a:srgbClr val="8A8A8A"/>
-                </a:solidFill>
-                <a:latin typeface="微软雅黑"/>
-                <a:ea typeface="微软雅黑"/>
-              </a:rPr>
-              <a:t>价值差 59,771</a:t>
-            </a:r>
-          </a:p>
-        </p:txBody>
-      </p:sp>
-      <p:sp>
-        <p:nvSpPr>
-          <p:cNvPr id="31" name="TextBox 30"/>
-          <p:cNvSpPr txBox="1"/>
-          <p:nvPr/>
-        </p:nvSpPr>
-        <p:spPr>
-          <a:xfrm>
-            <a:off x="6400800" y="2249424"/>
-            <a:ext cx="5138928" cy="219456"/>
-          </a:xfrm>
-          <a:prstGeom prst="rect">
-            <a:avLst/>
-          </a:prstGeom>
-          <a:noFill/>
-        </p:spPr>
-        <p:txBody>
-          <a:bodyPr wrap="square" lIns="0" rIns="0" tIns="0" bIns="0" anchor="ctr">
-            <a:spAutoFit/>
-          </a:bodyPr>
-          <a:lstStyle/>
-          <a:p>
-            <a:pPr>
-              <a:lnSpc>
-                <a:spcPct val="100000"/>
-              </a:lnSpc>
-            </a:pPr>
-            <a:r>
-              <a:rPr sz="1000" b="1">
-                <a:solidFill>
-                  <a:srgbClr val="0A0A0A"/>
-                </a:solidFill>
-                <a:latin typeface="微软雅黑"/>
-                <a:ea typeface="微软雅黑"/>
-              </a:rPr>
-              <a:t>工资收入总额</a:t>
-            </a:r>
-            <a:r>
-              <a:rPr sz="1000" b="1">
-                <a:solidFill>
-                  <a:srgbClr val="0A0A0A"/>
-                </a:solidFill>
-                <a:latin typeface="微软雅黑"/>
-                <a:ea typeface="微软雅黑"/>
-              </a:rPr>
-              <a:t>  </a:t>
-            </a:r>
-            <a:r>
-              <a:rPr sz="800" b="1">
-                <a:solidFill>
-                  <a:srgbClr val="D6A000"/>
-                </a:solidFill>
-                <a:latin typeface="微软雅黑"/>
-                <a:ea typeface="微软雅黑"/>
-              </a:rPr>
-              <a:t>41,139</a:t>
-            </a:r>
-            <a:r>
-              <a:rPr sz="800" b="1">
-                <a:solidFill>
-                  <a:srgbClr val="D6A000"/>
-                </a:solidFill>
-                <a:latin typeface="微软雅黑"/>
-                <a:ea typeface="微软雅黑"/>
-              </a:rPr>
-              <a:t>  </a:t>
-            </a:r>
-            <a:r>
-              <a:rPr sz="700" b="0">
-                <a:solidFill>
-                  <a:srgbClr val="8A8A8A"/>
-                </a:solidFill>
-                <a:latin typeface="微软雅黑"/>
-                <a:ea typeface="微软雅黑"/>
-              </a:rPr>
-              <a:t>价值差 11,130</a:t>
-            </a:r>
-          </a:p>
-        </p:txBody>
-      </p:sp>
-      <p:sp>
-        <p:nvSpPr>
-          <p:cNvPr id="32" name="TextBox 31"/>
-          <p:cNvSpPr txBox="1"/>
-          <p:nvPr/>
-        </p:nvSpPr>
-        <p:spPr>
-          <a:xfrm>
-            <a:off x="6400800" y="2578608"/>
-            <a:ext cx="5138928" cy="219456"/>
-          </a:xfrm>
-          <a:prstGeom prst="rect">
-            <a:avLst/>
-          </a:prstGeom>
-          <a:noFill/>
-        </p:spPr>
-        <p:txBody>
-          <a:bodyPr wrap="square" lIns="0" rIns="0" tIns="0" bIns="0" anchor="ctr">
-            <a:spAutoFit/>
-          </a:bodyPr>
-          <a:lstStyle/>
-          <a:p>
-            <a:pPr>
-              <a:lnSpc>
-                <a:spcPct val="100000"/>
-              </a:lnSpc>
-            </a:pPr>
-            <a:r>
-              <a:rPr sz="1000" b="1">
-                <a:solidFill>
-                  <a:srgbClr val="0A0A0A"/>
-                </a:solidFill>
-                <a:latin typeface="微软雅黑"/>
-                <a:ea typeface="微软雅黑"/>
-              </a:rPr>
-              <a:t>主行业入账金额</a:t>
-            </a:r>
-            <a:r>
-              <a:rPr sz="1000" b="1">
-                <a:solidFill>
-                  <a:srgbClr val="0A0A0A"/>
-                </a:solidFill>
-                <a:latin typeface="微软雅黑"/>
-                <a:ea typeface="微软雅黑"/>
-              </a:rPr>
-              <a:t>  </a:t>
-            </a:r>
-            <a:r>
-              <a:rPr sz="800" b="1">
-                <a:solidFill>
-                  <a:srgbClr val="D6A000"/>
-                </a:solidFill>
-                <a:latin typeface="微软雅黑"/>
-                <a:ea typeface="微软雅黑"/>
-              </a:rPr>
-              <a:t>40,916</a:t>
-            </a:r>
-            <a:r>
-              <a:rPr sz="800" b="1">
-                <a:solidFill>
-                  <a:srgbClr val="D6A000"/>
-                </a:solidFill>
-                <a:latin typeface="微软雅黑"/>
-                <a:ea typeface="微软雅黑"/>
-              </a:rPr>
-              <a:t>  </a:t>
-            </a:r>
-            <a:r>
-              <a:rPr sz="700" b="0">
-                <a:solidFill>
-                  <a:srgbClr val="8A8A8A"/>
-                </a:solidFill>
-                <a:latin typeface="微软雅黑"/>
-                <a:ea typeface="微软雅黑"/>
-              </a:rPr>
-              <a:t>价值差 16,067</a:t>
-            </a:r>
-          </a:p>
-        </p:txBody>
-      </p:sp>
-      <p:sp>
-        <p:nvSpPr>
-          <p:cNvPr id="33" name="Rectangle 32"/>
-          <p:cNvSpPr/>
-          <p:nvPr/>
-        </p:nvSpPr>
-        <p:spPr>
-          <a:xfrm>
-            <a:off x="6400800" y="3054096"/>
-            <a:ext cx="64008" cy="182880"/>
-          </a:xfrm>
-          <a:prstGeom prst="rect">
-            <a:avLst/>
-          </a:prstGeom>
-          <a:solidFill>
-            <a:srgbClr val="D6A000"/>
-          </a:solidFill>
-          <a:ln>
-            <a:noFill/>
-          </a:ln>
-          <a:effectLst/>
-        </p:spPr>
-        <p:style>
-          <a:lnRef idx="1">
-            <a:schemeClr val="accent1"/>
-          </a:lnRef>
-          <a:fillRef idx="3">
-            <a:schemeClr val="accent1"/>
-          </a:fillRef>
-          <a:effectRef idx="2">
-            <a:schemeClr val="accent1"/>
-          </a:effectRef>
-          <a:fontRef idx="minor">
-            <a:schemeClr val="lt1"/>
-          </a:fontRef>
-        </p:style>
-        <p:txBody>
-          <a:bodyPr rtlCol="0" anchor="ctr"/>
-          <a:lstStyle/>
-          <a:p>
-            <a:pPr algn="ctr"/>
-          </a:p>
-        </p:txBody>
-      </p:sp>
-      <p:sp>
-        <p:nvSpPr>
-          <p:cNvPr id="34" name="TextBox 33"/>
-          <p:cNvSpPr txBox="1"/>
-          <p:nvPr/>
-        </p:nvSpPr>
-        <p:spPr>
-          <a:xfrm>
-            <a:off x="6510528" y="3035808"/>
-            <a:ext cx="5029200" cy="219456"/>
-          </a:xfrm>
-          <a:prstGeom prst="rect">
-            <a:avLst/>
-          </a:prstGeom>
-          <a:noFill/>
-        </p:spPr>
-        <p:txBody>
-          <a:bodyPr wrap="square" lIns="0" rIns="0" tIns="0" bIns="0" anchor="t">
-            <a:spAutoFit/>
-          </a:bodyPr>
-          <a:lstStyle/>
-          <a:p>
-            <a:r>
-              <a:rPr sz="1000" b="1">
-                <a:solidFill>
-                  <a:srgbClr val="1F4E79"/>
-                </a:solidFill>
-                <a:latin typeface="微软雅黑"/>
-                <a:ea typeface="微软雅黑"/>
-              </a:rPr>
-              <a:t>现金流质量</a:t>
-            </a:r>
-          </a:p>
-        </p:txBody>
-      </p:sp>
-      <p:sp>
-        <p:nvSpPr>
-          <p:cNvPr id="35" name="TextBox 34"/>
-          <p:cNvSpPr txBox="1"/>
-          <p:nvPr/>
-        </p:nvSpPr>
-        <p:spPr>
-          <a:xfrm>
-            <a:off x="6400800" y="3346704"/>
-            <a:ext cx="5138928" cy="219456"/>
-          </a:xfrm>
-          <a:prstGeom prst="rect">
-            <a:avLst/>
-          </a:prstGeom>
-          <a:noFill/>
-        </p:spPr>
-        <p:txBody>
-          <a:bodyPr wrap="square" lIns="0" rIns="0" tIns="0" bIns="0" anchor="ctr">
-            <a:spAutoFit/>
-          </a:bodyPr>
-          <a:lstStyle/>
-          <a:p>
-            <a:pPr>
-              <a:lnSpc>
-                <a:spcPct val="100000"/>
-              </a:lnSpc>
-            </a:pPr>
-            <a:r>
-              <a:rPr sz="1000" b="1">
-                <a:solidFill>
-                  <a:srgbClr val="0A0A0A"/>
-                </a:solidFill>
-                <a:latin typeface="微软雅黑"/>
-                <a:ea typeface="微软雅黑"/>
-              </a:rPr>
-              <a:t>工资入账次数</a:t>
-            </a:r>
-            <a:r>
-              <a:rPr sz="1000" b="1">
-                <a:solidFill>
-                  <a:srgbClr val="0A0A0A"/>
-                </a:solidFill>
-                <a:latin typeface="微软雅黑"/>
-                <a:ea typeface="微软雅黑"/>
-              </a:rPr>
-              <a:t>  </a:t>
-            </a:r>
-            <a:r>
-              <a:rPr sz="800" b="0">
-                <a:solidFill>
-                  <a:srgbClr val="606060"/>
-                </a:solidFill>
-                <a:latin typeface="微软雅黑"/>
-                <a:ea typeface="微软雅黑"/>
-              </a:rPr>
-              <a:t>20.5</a:t>
-            </a:r>
-            <a:r>
-              <a:rPr sz="800" b="0">
-                <a:solidFill>
-                  <a:srgbClr val="606060"/>
-                </a:solidFill>
-                <a:latin typeface="微软雅黑"/>
-                <a:ea typeface="微软雅黑"/>
-              </a:rPr>
-              <a:t>  </a:t>
-            </a:r>
-            <a:r>
-              <a:rPr sz="700" b="0">
-                <a:solidFill>
-                  <a:srgbClr val="8A8A8A"/>
-                </a:solidFill>
-                <a:latin typeface="微软雅黑"/>
-                <a:ea typeface="微软雅黑"/>
-              </a:rPr>
-              <a:t>价值差 10.6</a:t>
-            </a:r>
-          </a:p>
-        </p:txBody>
-      </p:sp>
-      <p:sp>
-        <p:nvSpPr>
-          <p:cNvPr id="36" name="TextBox 35"/>
-          <p:cNvSpPr txBox="1"/>
-          <p:nvPr/>
-        </p:nvSpPr>
-        <p:spPr>
-          <a:xfrm>
-            <a:off x="6400800" y="3675887"/>
-            <a:ext cx="5138928" cy="219456"/>
-          </a:xfrm>
-          <a:prstGeom prst="rect">
-            <a:avLst/>
-          </a:prstGeom>
-          <a:noFill/>
-        </p:spPr>
-        <p:txBody>
-          <a:bodyPr wrap="square" lIns="0" rIns="0" tIns="0" bIns="0" anchor="ctr">
-            <a:spAutoFit/>
-          </a:bodyPr>
-          <a:lstStyle/>
-          <a:p>
-            <a:pPr>
-              <a:lnSpc>
-                <a:spcPct val="100000"/>
-              </a:lnSpc>
-            </a:pPr>
-            <a:r>
-              <a:rPr sz="1000" b="1">
-                <a:solidFill>
-                  <a:srgbClr val="0A0A0A"/>
-                </a:solidFill>
-                <a:latin typeface="微软雅黑"/>
-                <a:ea typeface="微软雅黑"/>
-              </a:rPr>
-              <a:t>发薪周期std</a:t>
-            </a:r>
-            <a:r>
-              <a:rPr sz="1000" b="1">
-                <a:solidFill>
-                  <a:srgbClr val="0A0A0A"/>
-                </a:solidFill>
-                <a:latin typeface="微软雅黑"/>
-                <a:ea typeface="微软雅黑"/>
-              </a:rPr>
-              <a:t>  </a:t>
-            </a:r>
-            <a:r>
-              <a:rPr sz="800" b="0">
-                <a:solidFill>
-                  <a:srgbClr val="606060"/>
-                </a:solidFill>
-                <a:latin typeface="微软雅黑"/>
-                <a:ea typeface="微软雅黑"/>
-              </a:rPr>
-              <a:t>2.72</a:t>
-            </a:r>
-            <a:r>
-              <a:rPr sz="800" b="0">
-                <a:solidFill>
-                  <a:srgbClr val="606060"/>
-                </a:solidFill>
-                <a:latin typeface="微软雅黑"/>
-                <a:ea typeface="微软雅黑"/>
-              </a:rPr>
-              <a:t>  </a:t>
-            </a:r>
-            <a:r>
-              <a:rPr sz="700" b="0">
-                <a:solidFill>
-                  <a:srgbClr val="8A8A8A"/>
-                </a:solidFill>
-                <a:latin typeface="微软雅黑"/>
-                <a:ea typeface="微软雅黑"/>
-              </a:rPr>
-              <a:t>价值差 3.79</a:t>
-            </a:r>
-          </a:p>
-        </p:txBody>
-      </p:sp>
-      <p:sp>
-        <p:nvSpPr>
-          <p:cNvPr id="37" name="TextBox 36"/>
-          <p:cNvSpPr txBox="1"/>
-          <p:nvPr/>
-        </p:nvSpPr>
-        <p:spPr>
-          <a:xfrm>
-            <a:off x="6400800" y="4005072"/>
-            <a:ext cx="5138928" cy="219456"/>
-          </a:xfrm>
-          <a:prstGeom prst="rect">
-            <a:avLst/>
-          </a:prstGeom>
-          <a:noFill/>
-        </p:spPr>
-        <p:txBody>
-          <a:bodyPr wrap="square" lIns="0" rIns="0" tIns="0" bIns="0" anchor="ctr">
-            <a:spAutoFit/>
-          </a:bodyPr>
-          <a:lstStyle/>
-          <a:p>
-            <a:pPr>
-              <a:lnSpc>
-                <a:spcPct val="100000"/>
-              </a:lnSpc>
-            </a:pPr>
-            <a:r>
-              <a:rPr sz="1000" b="1">
-                <a:solidFill>
-                  <a:srgbClr val="0A0A0A"/>
-                </a:solidFill>
-                <a:latin typeface="微软雅黑"/>
-                <a:ea typeface="微软雅黑"/>
-              </a:rPr>
-              <a:t>Centrelink收入占比</a:t>
-            </a:r>
-            <a:r>
-              <a:rPr sz="1000" b="1">
-                <a:solidFill>
-                  <a:srgbClr val="0A0A0A"/>
-                </a:solidFill>
-                <a:latin typeface="微软雅黑"/>
-                <a:ea typeface="微软雅黑"/>
-              </a:rPr>
-              <a:t>  </a:t>
-            </a:r>
-            <a:r>
-              <a:rPr sz="800" b="0">
-                <a:solidFill>
-                  <a:srgbClr val="606060"/>
-                </a:solidFill>
-                <a:latin typeface="微软雅黑"/>
-                <a:ea typeface="微软雅黑"/>
-              </a:rPr>
-              <a:t>2.1%</a:t>
-            </a:r>
-            <a:r>
-              <a:rPr sz="800" b="0">
-                <a:solidFill>
-                  <a:srgbClr val="606060"/>
-                </a:solidFill>
-                <a:latin typeface="微软雅黑"/>
-                <a:ea typeface="微软雅黑"/>
-              </a:rPr>
-              <a:t>  </a:t>
-            </a:r>
-            <a:r>
-              <a:rPr sz="700" b="0">
-                <a:solidFill>
-                  <a:srgbClr val="8A8A8A"/>
-                </a:solidFill>
-                <a:latin typeface="微软雅黑"/>
-                <a:ea typeface="微软雅黑"/>
-              </a:rPr>
-              <a:t>价值差 14.6%</a:t>
-            </a:r>
-          </a:p>
-        </p:txBody>
-      </p:sp>
-      <p:sp>
-        <p:nvSpPr>
-          <p:cNvPr id="38" name="Rectangle 37"/>
-          <p:cNvSpPr/>
-          <p:nvPr/>
-        </p:nvSpPr>
-        <p:spPr>
-          <a:xfrm>
-            <a:off x="6400800" y="4480560"/>
-            <a:ext cx="64008" cy="182880"/>
-          </a:xfrm>
-          <a:prstGeom prst="rect">
-            <a:avLst/>
-          </a:prstGeom>
-          <a:solidFill>
-            <a:srgbClr val="D6A000"/>
-          </a:solidFill>
-          <a:ln>
-            <a:noFill/>
-          </a:ln>
-          <a:effectLst/>
-        </p:spPr>
-        <p:style>
-          <a:lnRef idx="1">
-            <a:schemeClr val="accent1"/>
-          </a:lnRef>
-          <a:fillRef idx="3">
-            <a:schemeClr val="accent1"/>
-          </a:fillRef>
-          <a:effectRef idx="2">
-            <a:schemeClr val="accent1"/>
-          </a:effectRef>
-          <a:fontRef idx="minor">
-            <a:schemeClr val="lt1"/>
-          </a:fontRef>
-        </p:style>
-        <p:txBody>
-          <a:bodyPr rtlCol="0" anchor="ctr"/>
-          <a:lstStyle/>
-          <a:p>
-            <a:pPr algn="ctr"/>
-          </a:p>
-        </p:txBody>
-      </p:sp>
-      <p:sp>
-        <p:nvSpPr>
-          <p:cNvPr id="39" name="TextBox 38"/>
-          <p:cNvSpPr txBox="1"/>
-          <p:nvPr/>
-        </p:nvSpPr>
-        <p:spPr>
-          <a:xfrm>
-            <a:off x="6510528" y="4462272"/>
-            <a:ext cx="5029200" cy="219456"/>
-          </a:xfrm>
-          <a:prstGeom prst="rect">
-            <a:avLst/>
-          </a:prstGeom>
-          <a:noFill/>
-        </p:spPr>
-        <p:txBody>
-          <a:bodyPr wrap="square" lIns="0" rIns="0" tIns="0" bIns="0" anchor="t">
-            <a:spAutoFit/>
-          </a:bodyPr>
-          <a:lstStyle/>
-          <a:p>
-            <a:r>
-              <a:rPr sz="1000" b="1">
-                <a:solidFill>
-                  <a:srgbClr val="1F4E79"/>
-                </a:solidFill>
-                <a:latin typeface="微软雅黑"/>
-                <a:ea typeface="微软雅黑"/>
-              </a:rPr>
-              <a:t>家庭与渠道</a:t>
-            </a:r>
-          </a:p>
-        </p:txBody>
-      </p:sp>
-      <p:sp>
-        <p:nvSpPr>
-          <p:cNvPr id="40" name="TextBox 39"/>
-          <p:cNvSpPr txBox="1"/>
-          <p:nvPr/>
-        </p:nvSpPr>
-        <p:spPr>
-          <a:xfrm>
-            <a:off x="6400800" y="4773168"/>
-            <a:ext cx="5138928" cy="219456"/>
-          </a:xfrm>
-          <a:prstGeom prst="rect">
-            <a:avLst/>
-          </a:prstGeom>
-          <a:noFill/>
-        </p:spPr>
-        <p:txBody>
-          <a:bodyPr wrap="square" lIns="0" rIns="0" tIns="0" bIns="0" anchor="ctr">
-            <a:spAutoFit/>
-          </a:bodyPr>
-          <a:lstStyle/>
-          <a:p>
-            <a:pPr>
-              <a:lnSpc>
-                <a:spcPct val="100000"/>
-              </a:lnSpc>
-            </a:pPr>
-            <a:r>
-              <a:rPr sz="1000" b="1">
-                <a:solidFill>
-                  <a:srgbClr val="0A0A0A"/>
-                </a:solidFill>
-                <a:latin typeface="微软雅黑"/>
-                <a:ea typeface="微软雅黑"/>
-              </a:rPr>
-              <a:t>couple占比</a:t>
-            </a:r>
-            <a:r>
-              <a:rPr sz="1000" b="1">
-                <a:solidFill>
-                  <a:srgbClr val="0A0A0A"/>
-                </a:solidFill>
-                <a:latin typeface="微软雅黑"/>
-                <a:ea typeface="微软雅黑"/>
-              </a:rPr>
-              <a:t>  </a:t>
-            </a:r>
-            <a:r>
-              <a:rPr sz="800" b="0">
-                <a:solidFill>
-                  <a:srgbClr val="606060"/>
-                </a:solidFill>
-                <a:latin typeface="微软雅黑"/>
-                <a:ea typeface="微软雅黑"/>
-              </a:rPr>
-              <a:t>43.8%</a:t>
-            </a:r>
-            <a:r>
-              <a:rPr sz="800" b="0">
-                <a:solidFill>
-                  <a:srgbClr val="606060"/>
-                </a:solidFill>
-                <a:latin typeface="微软雅黑"/>
-                <a:ea typeface="微软雅黑"/>
-              </a:rPr>
-              <a:t>  </a:t>
-            </a:r>
-            <a:r>
-              <a:rPr sz="700" b="0">
-                <a:solidFill>
-                  <a:srgbClr val="8A8A8A"/>
-                </a:solidFill>
-                <a:latin typeface="微软雅黑"/>
-                <a:ea typeface="微软雅黑"/>
-              </a:rPr>
-              <a:t>价值差 29.1%</a:t>
-            </a:r>
-          </a:p>
-        </p:txBody>
-      </p:sp>
-      <p:sp>
-        <p:nvSpPr>
-          <p:cNvPr id="41" name="TextBox 40"/>
-          <p:cNvSpPr txBox="1"/>
-          <p:nvPr/>
-        </p:nvSpPr>
-        <p:spPr>
-          <a:xfrm>
-            <a:off x="6400800" y="5102352"/>
-            <a:ext cx="5138928" cy="219456"/>
-          </a:xfrm>
-          <a:prstGeom prst="rect">
-            <a:avLst/>
-          </a:prstGeom>
-          <a:noFill/>
-        </p:spPr>
-        <p:txBody>
-          <a:bodyPr wrap="square" lIns="0" rIns="0" tIns="0" bIns="0" anchor="ctr">
-            <a:spAutoFit/>
-          </a:bodyPr>
-          <a:lstStyle/>
-          <a:p>
-            <a:pPr>
-              <a:lnSpc>
-                <a:spcPct val="100000"/>
-              </a:lnSpc>
-            </a:pPr>
-            <a:r>
-              <a:rPr sz="1000" b="1">
-                <a:solidFill>
-                  <a:srgbClr val="0A0A0A"/>
-                </a:solidFill>
-                <a:latin typeface="微软雅黑"/>
-                <a:ea typeface="微软雅黑"/>
-              </a:rPr>
-              <a:t>Lead Partner</a:t>
-            </a:r>
-            <a:r>
-              <a:rPr sz="1000" b="1">
-                <a:solidFill>
-                  <a:srgbClr val="0A0A0A"/>
-                </a:solidFill>
-                <a:latin typeface="微软雅黑"/>
-                <a:ea typeface="微软雅黑"/>
-              </a:rPr>
-              <a:t>  </a:t>
-            </a:r>
-            <a:r>
-              <a:rPr sz="800" b="0">
-                <a:solidFill>
-                  <a:srgbClr val="606060"/>
-                </a:solidFill>
-                <a:latin typeface="微软雅黑"/>
-                <a:ea typeface="微软雅黑"/>
-              </a:rPr>
-              <a:t>19.3%</a:t>
-            </a:r>
-            <a:r>
-              <a:rPr sz="800" b="0">
-                <a:solidFill>
-                  <a:srgbClr val="606060"/>
-                </a:solidFill>
-                <a:latin typeface="微软雅黑"/>
-                <a:ea typeface="微软雅黑"/>
-              </a:rPr>
-              <a:t>  </a:t>
-            </a:r>
-            <a:r>
-              <a:rPr sz="700" b="0">
-                <a:solidFill>
-                  <a:srgbClr val="8A8A8A"/>
-                </a:solidFill>
-                <a:latin typeface="微软雅黑"/>
-                <a:ea typeface="微软雅黑"/>
-              </a:rPr>
-              <a:t>价值差 11.6%</a:t>
-            </a:r>
-          </a:p>
-        </p:txBody>
-      </p:sp>
-      <p:sp>
-        <p:nvSpPr>
-          <p:cNvPr id="42" name="TextBox 41"/>
-          <p:cNvSpPr txBox="1"/>
-          <p:nvPr/>
-        </p:nvSpPr>
-        <p:spPr>
-          <a:xfrm>
-            <a:off x="6400800" y="5431536"/>
-            <a:ext cx="5138928" cy="219456"/>
-          </a:xfrm>
-          <a:prstGeom prst="rect">
-            <a:avLst/>
-          </a:prstGeom>
-          <a:noFill/>
-        </p:spPr>
-        <p:txBody>
-          <a:bodyPr wrap="square" lIns="0" rIns="0" tIns="0" bIns="0" anchor="ctr">
-            <a:spAutoFit/>
-          </a:bodyPr>
-          <a:lstStyle/>
-          <a:p>
-            <a:pPr>
-              <a:lnSpc>
-                <a:spcPct val="100000"/>
-              </a:lnSpc>
-            </a:pPr>
-            <a:r>
-              <a:rPr sz="1000" b="1">
-                <a:solidFill>
-                  <a:srgbClr val="0A0A0A"/>
-                </a:solidFill>
-                <a:latin typeface="微软雅黑"/>
-                <a:ea typeface="微软雅黑"/>
-              </a:rPr>
-              <a:t>Owned Channels</a:t>
-            </a:r>
-            <a:r>
-              <a:rPr sz="1000" b="1">
-                <a:solidFill>
-                  <a:srgbClr val="0A0A0A"/>
-                </a:solidFill>
-                <a:latin typeface="微软雅黑"/>
-                <a:ea typeface="微软雅黑"/>
-              </a:rPr>
-              <a:t>  </a:t>
-            </a:r>
-            <a:r>
-              <a:rPr sz="800" b="0">
-                <a:solidFill>
-                  <a:srgbClr val="606060"/>
-                </a:solidFill>
-                <a:latin typeface="微软雅黑"/>
-                <a:ea typeface="微软雅黑"/>
-              </a:rPr>
-              <a:t>11.8%</a:t>
-            </a:r>
-            <a:r>
-              <a:rPr sz="800" b="0">
-                <a:solidFill>
-                  <a:srgbClr val="606060"/>
-                </a:solidFill>
-                <a:latin typeface="微软雅黑"/>
-                <a:ea typeface="微软雅黑"/>
-              </a:rPr>
-              <a:t>  </a:t>
-            </a:r>
-            <a:r>
-              <a:rPr sz="700" b="0">
-                <a:solidFill>
-                  <a:srgbClr val="8A8A8A"/>
-                </a:solidFill>
-                <a:latin typeface="微软雅黑"/>
-                <a:ea typeface="微软雅黑"/>
-              </a:rPr>
-              <a:t>价值差 7.9%</a:t>
-            </a:r>
-          </a:p>
-        </p:txBody>
-      </p:sp>
-      <p:sp>
-        <p:nvSpPr>
-          <p:cNvPr id="43" name="TextBox 42"/>
-          <p:cNvSpPr txBox="1"/>
-          <p:nvPr/>
-        </p:nvSpPr>
-        <p:spPr>
-          <a:xfrm>
-            <a:off x="512064" y="5815584"/>
-            <a:ext cx="11164824" cy="182880"/>
-          </a:xfrm>
-          <a:prstGeom prst="rect">
-            <a:avLst/>
-          </a:prstGeom>
-          <a:noFill/>
-        </p:spPr>
-        <p:txBody>
-          <a:bodyPr wrap="square" lIns="0" rIns="0" tIns="0" bIns="0" anchor="t">
-            <a:spAutoFit/>
-          </a:bodyPr>
-          <a:lstStyle/>
-          <a:p>
-            <a:r>
-              <a:rPr sz="800" b="0">
-                <a:solidFill>
-                  <a:srgbClr val="606060"/>
-                </a:solidFill>
-                <a:latin typeface="微软雅黑"/>
-                <a:ea typeface="微软雅黑"/>
-              </a:rPr>
-              <a:t>数值口径:左卡为风险分箱 1/2 组均值、右卡为价值分箱 1/2 组均值,行内灰字为对应 4/5 组对照;家庭/渠道结构差异不直接作为风险因果</a:t>
-            </a:r>
-          </a:p>
-        </p:txBody>
-      </p:sp>
-      <p:sp>
-        <p:nvSpPr>
-          <p:cNvPr id="44" name="Rectangle 43"/>
-          <p:cNvSpPr/>
-          <p:nvPr/>
-        </p:nvSpPr>
-        <p:spPr>
-          <a:xfrm>
-            <a:off x="512064" y="6144768"/>
-            <a:ext cx="11164824" cy="384048"/>
-          </a:xfrm>
-          <a:prstGeom prst="rect">
-            <a:avLst/>
-          </a:prstGeom>
-          <a:solidFill>
-            <a:srgbClr val="FAF3E0"/>
-          </a:solidFill>
-          <a:ln>
-            <a:noFill/>
-          </a:ln>
-          <a:effectLst/>
-        </p:spPr>
-        <p:style>
-          <a:lnRef idx="1">
-            <a:schemeClr val="accent1"/>
-          </a:lnRef>
-          <a:fillRef idx="3">
-            <a:schemeClr val="accent1"/>
-          </a:fillRef>
-          <a:effectRef idx="2">
-            <a:schemeClr val="accent1"/>
-          </a:effectRef>
-          <a:fontRef idx="minor">
-            <a:schemeClr val="lt1"/>
-          </a:fontRef>
-        </p:style>
-        <p:txBody>
-          <a:bodyPr rtlCol="0" anchor="ctr"/>
-          <a:lstStyle/>
-          <a:p>
-            <a:pPr algn="ctr"/>
-          </a:p>
-        </p:txBody>
-      </p:sp>
-      <p:sp>
-        <p:nvSpPr>
-          <p:cNvPr id="45" name="Rectangle 44"/>
-          <p:cNvSpPr/>
-          <p:nvPr/>
-        </p:nvSpPr>
-        <p:spPr>
-          <a:xfrm>
-            <a:off x="576072" y="6208776"/>
-            <a:ext cx="64008" cy="256032"/>
-          </a:xfrm>
-          <a:prstGeom prst="rect">
-            <a:avLst/>
-          </a:prstGeom>
-          <a:solidFill>
-            <a:srgbClr val="D6A000"/>
-          </a:solidFill>
-          <a:ln>
-            <a:noFill/>
-          </a:ln>
-          <a:effectLst/>
-        </p:spPr>
-        <p:style>
-          <a:lnRef idx="1">
-            <a:schemeClr val="accent1"/>
-          </a:lnRef>
-          <a:fillRef idx="3">
-            <a:schemeClr val="accent1"/>
-          </a:fillRef>
-          <a:effectRef idx="2">
-            <a:schemeClr val="accent1"/>
-          </a:effectRef>
-          <a:fontRef idx="minor">
-            <a:schemeClr val="lt1"/>
-          </a:fontRef>
-        </p:style>
-        <p:txBody>
-          <a:bodyPr rtlCol="0" anchor="ctr"/>
-          <a:lstStyle/>
-          <a:p>
-            <a:pPr algn="ctr"/>
-          </a:p>
-        </p:txBody>
-      </p:sp>
-      <p:sp>
-        <p:nvSpPr>
-          <p:cNvPr id="46" name="TextBox 45"/>
-          <p:cNvSpPr txBox="1"/>
-          <p:nvPr/>
-        </p:nvSpPr>
-        <p:spPr>
-          <a:xfrm>
-            <a:off x="694944" y="6181344"/>
+            <a:off x="694944" y="6254496"/>
             <a:ext cx="10881360" cy="310896"/>
           </a:xfrm>
           <a:prstGeom prst="rect">
